--- a/presentations/tri-state-2026/SDA-Water-Wastewater-TriState-2026.pptx
+++ b/presentations/tri-state-2026/SDA-Water-Wastewater-TriState-2026.pptx
@@ -3814,7 +3814,7 @@
     <p:bg>
       <p:bgPr>
         <a:solidFill>
-          <a:srgbClr val="0E2A38"/>
+          <a:srgbClr val="000000"/>
         </a:solidFill>
       </p:bgPr>
     </p:bg>
@@ -3847,7 +3847,7 @@
             <a:avLst/>
           </a:prstGeom>
           <a:solidFill>
-            <a:srgbClr val="0B2230"/>
+            <a:srgbClr val="0A0A0A"/>
           </a:solidFill>
           <a:ln w="12700">
             <a:solidFill>
@@ -3874,11 +3874,11 @@
             </a:avLst>
           </a:prstGeom>
           <a:solidFill>
-            <a:srgbClr val="E8A33D"/>
+            <a:srgbClr val="3DCD58"/>
           </a:solidFill>
           <a:ln w="12700">
             <a:solidFill>
-              <a:srgbClr val="E8A33D"/>
+              <a:srgbClr val="3DCD58"/>
             </a:solidFill>
             <a:prstDash val="solid"/>
           </a:ln>
@@ -3911,11 +3911,11 @@
             <a:r>
               <a:rPr lang="en-US" sz="1500" b="1" spc="110" kern="0" dirty="0">
                 <a:solidFill>
-                  <a:srgbClr val="0E2A38"/>
-                </a:solidFill>
-                <a:latin typeface="Calibri" pitchFamily="34" charset="0"/>
-                <a:ea typeface="Calibri" pitchFamily="34" charset="-122"/>
-                <a:cs typeface="Calibri" pitchFamily="34" charset="-120"/>
+                  <a:srgbClr val="000000"/>
+                </a:solidFill>
+                <a:latin typeface="Telegraf" pitchFamily="34" charset="0"/>
+                <a:ea typeface="Telegraf" pitchFamily="34" charset="-122"/>
+                <a:cs typeface="Telegraf" pitchFamily="34" charset="-120"/>
               </a:rPr>
               <a:t>TRI-STATE SEMINAR 2026</a:t>
             </a:r>
@@ -3955,9 +3955,9 @@
                 <a:solidFill>
                   <a:srgbClr val="FFFFFF"/>
                 </a:solidFill>
-                <a:latin typeface="Cambria" pitchFamily="34" charset="0"/>
-                <a:ea typeface="Cambria" pitchFamily="34" charset="-122"/>
-                <a:cs typeface="Cambria" pitchFamily="34" charset="-120"/>
+                <a:latin typeface="Telegraf" pitchFamily="34" charset="0"/>
+                <a:ea typeface="Telegraf" pitchFamily="34" charset="-122"/>
+                <a:cs typeface="Telegraf" pitchFamily="34" charset="-120"/>
               </a:rPr>
               <a:t>The Shift to</a:t>
             </a:r>
@@ -3975,9 +3975,9 @@
                 <a:solidFill>
                   <a:srgbClr val="FFFFFF"/>
                 </a:solidFill>
-                <a:latin typeface="Cambria" pitchFamily="34" charset="0"/>
-                <a:ea typeface="Cambria" pitchFamily="34" charset="-122"/>
-                <a:cs typeface="Cambria" pitchFamily="34" charset="-120"/>
+                <a:latin typeface="Telegraf" pitchFamily="34" charset="0"/>
+                <a:ea typeface="Telegraf" pitchFamily="34" charset="-122"/>
+                <a:cs typeface="Telegraf" pitchFamily="34" charset="-120"/>
               </a:rPr>
               <a:t>Software-Defined Automation</a:t>
             </a:r>
@@ -4012,11 +4012,11 @@
             <a:r>
               <a:rPr lang="en-US" sz="3400" i="1" dirty="0">
                 <a:solidFill>
-                  <a:srgbClr val="E8A33D"/>
-                </a:solidFill>
-                <a:latin typeface="Cambria" pitchFamily="34" charset="0"/>
-                <a:ea typeface="Cambria" pitchFamily="34" charset="-122"/>
-                <a:cs typeface="Cambria" pitchFamily="34" charset="-120"/>
+                  <a:srgbClr val="3DCD58"/>
+                </a:solidFill>
+                <a:latin typeface="Telegraf" pitchFamily="34" charset="0"/>
+                <a:ea typeface="Telegraf" pitchFamily="34" charset="-122"/>
+                <a:cs typeface="Telegraf" pitchFamily="34" charset="-120"/>
               </a:rPr>
               <a:t>in Water &amp; Wastewater</a:t>
             </a:r>
@@ -4053,9 +4053,9 @@
                 <a:solidFill>
                   <a:srgbClr val="FFFFFF"/>
                 </a:solidFill>
-                <a:latin typeface="Calibri" pitchFamily="34" charset="0"/>
-                <a:ea typeface="Calibri" pitchFamily="34" charset="-122"/>
-                <a:cs typeface="Calibri" pitchFamily="34" charset="-120"/>
+                <a:latin typeface="Telegraf" pitchFamily="34" charset="0"/>
+                <a:ea typeface="Telegraf" pitchFamily="34" charset="-122"/>
+                <a:cs typeface="Telegraf" pitchFamily="34" charset="-120"/>
               </a:rPr>
               <a:t>Kyle Sanders  ·  Business Development Manager, Schneider Electric</a:t>
             </a:r>
@@ -4090,11 +4090,11 @@
             <a:r>
               <a:rPr lang="en-US" sz="1700" dirty="0">
                 <a:solidFill>
-                  <a:srgbClr val="7FB1C6"/>
-                </a:solidFill>
-                <a:latin typeface="Calibri" pitchFamily="34" charset="0"/>
-                <a:ea typeface="Calibri" pitchFamily="34" charset="-122"/>
-                <a:cs typeface="Calibri" pitchFamily="34" charset="-120"/>
+                  <a:srgbClr val="6FD9D4"/>
+                </a:solidFill>
+                <a:latin typeface="Telegraf" pitchFamily="34" charset="0"/>
+                <a:ea typeface="Telegraf" pitchFamily="34" charset="-122"/>
+                <a:cs typeface="Telegraf" pitchFamily="34" charset="-120"/>
               </a:rPr>
               <a:t>Electrical / Instrumentation &amp; Control Track  ·  Wednesday, August 5, 2026  ·  Sonoma B</a:t>
             </a:r>
@@ -4129,11 +4129,11 @@
             <a:r>
               <a:rPr lang="en-US" sz="1100" dirty="0">
                 <a:solidFill>
-                  <a:srgbClr val="3E6072"/>
-                </a:solidFill>
-                <a:latin typeface="Calibri" pitchFamily="34" charset="0"/>
-                <a:ea typeface="Calibri" pitchFamily="34" charset="-122"/>
-                <a:cs typeface="Calibri" pitchFamily="34" charset="-120"/>
+                  <a:srgbClr val="3A3A3A"/>
+                </a:solidFill>
+                <a:latin typeface="Telegraf" pitchFamily="34" charset="0"/>
+                <a:ea typeface="Telegraf" pitchFamily="34" charset="-122"/>
+                <a:cs typeface="Telegraf" pitchFamily="34" charset="-120"/>
               </a:rPr>
               <a:t>1</a:t>
             </a:r>
@@ -4155,7 +4155,7 @@
     <p:bg>
       <p:bgPr>
         <a:solidFill>
-          <a:srgbClr val="0E2A38"/>
+          <a:srgbClr val="000000"/>
         </a:solidFill>
       </p:bgPr>
     </p:bg>
@@ -4190,11 +4190,11 @@
             </a:avLst>
           </a:prstGeom>
           <a:solidFill>
-            <a:srgbClr val="E8A33D"/>
+            <a:srgbClr val="3DCD58"/>
           </a:solidFill>
           <a:ln w="12700">
             <a:solidFill>
-              <a:srgbClr val="E8A33D"/>
+              <a:srgbClr val="3DCD58"/>
             </a:solidFill>
             <a:prstDash val="solid"/>
           </a:ln>
@@ -4227,11 +4227,11 @@
             <a:r>
               <a:rPr lang="en-US" sz="1500" b="1" spc="110" kern="0" dirty="0">
                 <a:solidFill>
-                  <a:srgbClr val="0E2A38"/>
-                </a:solidFill>
-                <a:latin typeface="Calibri" pitchFamily="34" charset="0"/>
-                <a:ea typeface="Calibri" pitchFamily="34" charset="-122"/>
-                <a:cs typeface="Calibri" pitchFamily="34" charset="-120"/>
+                  <a:srgbClr val="000000"/>
+                </a:solidFill>
+                <a:latin typeface="Telegraf" pitchFamily="34" charset="0"/>
+                <a:ea typeface="Telegraf" pitchFamily="34" charset="-122"/>
+                <a:cs typeface="Telegraf" pitchFamily="34" charset="-120"/>
               </a:rPr>
               <a:t>THE PATTERN</a:t>
             </a:r>
@@ -4268,9 +4268,9 @@
                 <a:solidFill>
                   <a:srgbClr val="FFFFFF"/>
                 </a:solidFill>
-                <a:latin typeface="Cambria" pitchFamily="34" charset="0"/>
-                <a:ea typeface="Cambria" pitchFamily="34" charset="-122"/>
-                <a:cs typeface="Cambria" pitchFamily="34" charset="-120"/>
+                <a:latin typeface="Telegraf" pitchFamily="34" charset="0"/>
+                <a:ea typeface="Telegraf" pitchFamily="34" charset="-122"/>
+                <a:cs typeface="Telegraf" pitchFamily="34" charset="-120"/>
               </a:rPr>
               <a:t>Sixty years, three promises</a:t>
             </a:r>
@@ -4295,11 +4295,11 @@
             </a:avLst>
           </a:prstGeom>
           <a:solidFill>
-            <a:srgbClr val="163B4D"/>
+            <a:srgbClr val="1B1B1B"/>
           </a:solidFill>
           <a:ln w="12700">
             <a:solidFill>
-              <a:srgbClr val="163B4D"/>
+              <a:srgbClr val="1B1B1B"/>
             </a:solidFill>
             <a:prstDash val="solid"/>
           </a:ln>
@@ -4322,11 +4322,11 @@
             </a:avLst>
           </a:prstGeom>
           <a:solidFill>
-            <a:srgbClr val="E8A33D"/>
+            <a:srgbClr val="3DCD58"/>
           </a:solidFill>
           <a:ln w="12700">
             <a:solidFill>
-              <a:srgbClr val="E8A33D"/>
+              <a:srgbClr val="3DCD58"/>
             </a:solidFill>
             <a:prstDash val="solid"/>
           </a:ln>
@@ -4359,11 +4359,11 @@
             <a:r>
               <a:rPr lang="en-US" sz="1500" b="1" spc="110" kern="0" dirty="0">
                 <a:solidFill>
-                  <a:srgbClr val="0E2A38"/>
-                </a:solidFill>
-                <a:latin typeface="Calibri" pitchFamily="34" charset="0"/>
-                <a:ea typeface="Calibri" pitchFamily="34" charset="-122"/>
-                <a:cs typeface="Calibri" pitchFamily="34" charset="-120"/>
+                  <a:srgbClr val="000000"/>
+                </a:solidFill>
+                <a:latin typeface="Telegraf" pitchFamily="34" charset="0"/>
+                <a:ea typeface="Telegraf" pitchFamily="34" charset="-122"/>
+                <a:cs typeface="Telegraf" pitchFamily="34" charset="-120"/>
               </a:rPr>
               <a:t>1968</a:t>
             </a:r>
@@ -4400,9 +4400,9 @@
                 <a:solidFill>
                   <a:srgbClr val="FFFFFF"/>
                 </a:solidFill>
-                <a:latin typeface="Cambria" pitchFamily="34" charset="0"/>
-                <a:ea typeface="Cambria" pitchFamily="34" charset="-122"/>
-                <a:cs typeface="Cambria" pitchFamily="34" charset="-120"/>
+                <a:latin typeface="Telegraf" pitchFamily="34" charset="0"/>
+                <a:ea typeface="Telegraf" pitchFamily="34" charset="-122"/>
+                <a:cs typeface="Telegraf" pitchFamily="34" charset="-120"/>
               </a:rPr>
               <a:t>The PLC</a:t>
             </a:r>
@@ -4440,11 +4440,11 @@
             <a:r>
               <a:rPr lang="en-US" sz="1800" dirty="0">
                 <a:solidFill>
-                  <a:srgbClr val="7FB1C6"/>
-                </a:solidFill>
-                <a:latin typeface="Calibri" pitchFamily="34" charset="0"/>
-                <a:ea typeface="Calibri" pitchFamily="34" charset="-122"/>
-                <a:cs typeface="Calibri" pitchFamily="34" charset="-120"/>
+                  <a:srgbClr val="6FD9D4"/>
+                </a:solidFill>
+                <a:latin typeface="Telegraf" pitchFamily="34" charset="0"/>
+                <a:ea typeface="Telegraf" pitchFamily="34" charset="-122"/>
+                <a:cs typeface="Telegraf" pitchFamily="34" charset="-120"/>
               </a:rPr>
               <a:t>"Change the logic</a:t>
             </a:r>
@@ -4460,11 +4460,11 @@
             <a:r>
               <a:rPr lang="en-US" sz="1800" dirty="0">
                 <a:solidFill>
-                  <a:srgbClr val="7FB1C6"/>
-                </a:solidFill>
-                <a:latin typeface="Calibri" pitchFamily="34" charset="0"/>
-                <a:ea typeface="Calibri" pitchFamily="34" charset="-122"/>
-                <a:cs typeface="Calibri" pitchFamily="34" charset="-120"/>
+                  <a:srgbClr val="6FD9D4"/>
+                </a:solidFill>
+                <a:latin typeface="Telegraf" pitchFamily="34" charset="0"/>
+                <a:ea typeface="Telegraf" pitchFamily="34" charset="-122"/>
+                <a:cs typeface="Telegraf" pitchFamily="34" charset="-120"/>
               </a:rPr>
               <a:t>without rewiring</a:t>
             </a:r>
@@ -4480,11 +4480,11 @@
             <a:r>
               <a:rPr lang="en-US" sz="1800" dirty="0">
                 <a:solidFill>
-                  <a:srgbClr val="7FB1C6"/>
-                </a:solidFill>
-                <a:latin typeface="Calibri" pitchFamily="34" charset="0"/>
-                <a:ea typeface="Calibri" pitchFamily="34" charset="-122"/>
-                <a:cs typeface="Calibri" pitchFamily="34" charset="-120"/>
+                  <a:srgbClr val="6FD9D4"/>
+                </a:solidFill>
+                <a:latin typeface="Telegraf" pitchFamily="34" charset="0"/>
+                <a:ea typeface="Telegraf" pitchFamily="34" charset="-122"/>
+                <a:cs typeface="Telegraf" pitchFamily="34" charset="-120"/>
               </a:rPr>
               <a:t>the panel."</a:t>
             </a:r>
@@ -4509,11 +4509,11 @@
             </a:avLst>
           </a:prstGeom>
           <a:solidFill>
-            <a:srgbClr val="163B4D"/>
+            <a:srgbClr val="1B1B1B"/>
           </a:solidFill>
           <a:ln w="12700">
             <a:solidFill>
-              <a:srgbClr val="163B4D"/>
+              <a:srgbClr val="1B1B1B"/>
             </a:solidFill>
             <a:prstDash val="solid"/>
           </a:ln>
@@ -4536,11 +4536,11 @@
             </a:avLst>
           </a:prstGeom>
           <a:solidFill>
-            <a:srgbClr val="E8A33D"/>
+            <a:srgbClr val="00A19C"/>
           </a:solidFill>
           <a:ln w="12700">
             <a:solidFill>
-              <a:srgbClr val="E8A33D"/>
+              <a:srgbClr val="00A19C"/>
             </a:solidFill>
             <a:prstDash val="solid"/>
           </a:ln>
@@ -4573,11 +4573,11 @@
             <a:r>
               <a:rPr lang="en-US" sz="1500" b="1" spc="110" kern="0" dirty="0">
                 <a:solidFill>
-                  <a:srgbClr val="0E2A38"/>
-                </a:solidFill>
-                <a:latin typeface="Calibri" pitchFamily="34" charset="0"/>
-                <a:ea typeface="Calibri" pitchFamily="34" charset="-122"/>
-                <a:cs typeface="Calibri" pitchFamily="34" charset="-120"/>
+                  <a:srgbClr val="FFFFFF"/>
+                </a:solidFill>
+                <a:latin typeface="Telegraf" pitchFamily="34" charset="0"/>
+                <a:ea typeface="Telegraf" pitchFamily="34" charset="-122"/>
+                <a:cs typeface="Telegraf" pitchFamily="34" charset="-120"/>
               </a:rPr>
               <a:t>1975</a:t>
             </a:r>
@@ -4614,9 +4614,9 @@
                 <a:solidFill>
                   <a:srgbClr val="FFFFFF"/>
                 </a:solidFill>
-                <a:latin typeface="Cambria" pitchFamily="34" charset="0"/>
-                <a:ea typeface="Cambria" pitchFamily="34" charset="-122"/>
-                <a:cs typeface="Cambria" pitchFamily="34" charset="-120"/>
+                <a:latin typeface="Telegraf" pitchFamily="34" charset="0"/>
+                <a:ea typeface="Telegraf" pitchFamily="34" charset="-122"/>
+                <a:cs typeface="Telegraf" pitchFamily="34" charset="-120"/>
               </a:rPr>
               <a:t>The DCS</a:t>
             </a:r>
@@ -4654,11 +4654,11 @@
             <a:r>
               <a:rPr lang="en-US" sz="1800" dirty="0">
                 <a:solidFill>
-                  <a:srgbClr val="7FB1C6"/>
-                </a:solidFill>
-                <a:latin typeface="Calibri" pitchFamily="34" charset="0"/>
-                <a:ea typeface="Calibri" pitchFamily="34" charset="-122"/>
-                <a:cs typeface="Calibri" pitchFamily="34" charset="-120"/>
+                  <a:srgbClr val="6FD9D4"/>
+                </a:solidFill>
+                <a:latin typeface="Telegraf" pitchFamily="34" charset="0"/>
+                <a:ea typeface="Telegraf" pitchFamily="34" charset="-122"/>
+                <a:cs typeface="Telegraf" pitchFamily="34" charset="-120"/>
               </a:rPr>
               <a:t>"Control the whole</a:t>
             </a:r>
@@ -4674,11 +4674,11 @@
             <a:r>
               <a:rPr lang="en-US" sz="1800" dirty="0">
                 <a:solidFill>
-                  <a:srgbClr val="7FB1C6"/>
-                </a:solidFill>
-                <a:latin typeface="Calibri" pitchFamily="34" charset="0"/>
-                <a:ea typeface="Calibri" pitchFamily="34" charset="-122"/>
-                <a:cs typeface="Calibri" pitchFamily="34" charset="-120"/>
+                  <a:srgbClr val="6FD9D4"/>
+                </a:solidFill>
+                <a:latin typeface="Telegraf" pitchFamily="34" charset="0"/>
+                <a:ea typeface="Telegraf" pitchFamily="34" charset="-122"/>
+                <a:cs typeface="Telegraf" pitchFamily="34" charset="-120"/>
               </a:rPr>
               <a:t>plant without one</a:t>
             </a:r>
@@ -4694,11 +4694,11 @@
             <a:r>
               <a:rPr lang="en-US" sz="1800" dirty="0">
                 <a:solidFill>
-                  <a:srgbClr val="7FB1C6"/>
-                </a:solidFill>
-                <a:latin typeface="Calibri" pitchFamily="34" charset="0"/>
-                <a:ea typeface="Calibri" pitchFamily="34" charset="-122"/>
-                <a:cs typeface="Calibri" pitchFamily="34" charset="-120"/>
+                  <a:srgbClr val="6FD9D4"/>
+                </a:solidFill>
+                <a:latin typeface="Telegraf" pitchFamily="34" charset="0"/>
+                <a:ea typeface="Telegraf" pitchFamily="34" charset="-122"/>
+                <a:cs typeface="Telegraf" pitchFamily="34" charset="-120"/>
               </a:rPr>
               <a:t>point of failure."</a:t>
             </a:r>
@@ -4723,11 +4723,11 @@
             </a:avLst>
           </a:prstGeom>
           <a:solidFill>
-            <a:srgbClr val="163B4D"/>
+            <a:srgbClr val="1B1B1B"/>
           </a:solidFill>
           <a:ln w="12700">
             <a:solidFill>
-              <a:srgbClr val="163B4D"/>
+              <a:srgbClr val="1B1B1B"/>
             </a:solidFill>
             <a:prstDash val="solid"/>
           </a:ln>
@@ -4750,11 +4750,11 @@
             </a:avLst>
           </a:prstGeom>
           <a:solidFill>
-            <a:srgbClr val="E8A33D"/>
+            <a:srgbClr val="E2231A"/>
           </a:solidFill>
           <a:ln w="12700">
             <a:solidFill>
-              <a:srgbClr val="E8A33D"/>
+              <a:srgbClr val="E2231A"/>
             </a:solidFill>
             <a:prstDash val="solid"/>
           </a:ln>
@@ -4787,11 +4787,11 @@
             <a:r>
               <a:rPr lang="en-US" sz="1500" b="1" spc="110" kern="0" dirty="0">
                 <a:solidFill>
-                  <a:srgbClr val="0E2A38"/>
-                </a:solidFill>
-                <a:latin typeface="Calibri" pitchFamily="34" charset="0"/>
-                <a:ea typeface="Calibri" pitchFamily="34" charset="-122"/>
-                <a:cs typeface="Calibri" pitchFamily="34" charset="-120"/>
+                  <a:srgbClr val="FFFFFF"/>
+                </a:solidFill>
+                <a:latin typeface="Telegraf" pitchFamily="34" charset="0"/>
+                <a:ea typeface="Telegraf" pitchFamily="34" charset="-122"/>
+                <a:cs typeface="Telegraf" pitchFamily="34" charset="-120"/>
               </a:rPr>
               <a:t>1989</a:t>
             </a:r>
@@ -4828,9 +4828,9 @@
                 <a:solidFill>
                   <a:srgbClr val="FFFFFF"/>
                 </a:solidFill>
-                <a:latin typeface="Cambria" pitchFamily="34" charset="0"/>
-                <a:ea typeface="Cambria" pitchFamily="34" charset="-122"/>
-                <a:cs typeface="Cambria" pitchFamily="34" charset="-120"/>
+                <a:latin typeface="Telegraf" pitchFamily="34" charset="0"/>
+                <a:ea typeface="Telegraf" pitchFamily="34" charset="-122"/>
+                <a:cs typeface="Telegraf" pitchFamily="34" charset="-120"/>
               </a:rPr>
               <a:t>SCADA</a:t>
             </a:r>
@@ -4868,11 +4868,11 @@
             <a:r>
               <a:rPr lang="en-US" sz="1800" dirty="0">
                 <a:solidFill>
-                  <a:srgbClr val="7FB1C6"/>
-                </a:solidFill>
-                <a:latin typeface="Calibri" pitchFamily="34" charset="0"/>
-                <a:ea typeface="Calibri" pitchFamily="34" charset="-122"/>
-                <a:cs typeface="Calibri" pitchFamily="34" charset="-120"/>
+                  <a:srgbClr val="6FD9D4"/>
+                </a:solidFill>
+                <a:latin typeface="Telegraf" pitchFamily="34" charset="0"/>
+                <a:ea typeface="Telegraf" pitchFamily="34" charset="-122"/>
+                <a:cs typeface="Telegraf" pitchFamily="34" charset="-120"/>
               </a:rPr>
               <a:t>"See everything,</a:t>
             </a:r>
@@ -4888,11 +4888,11 @@
             <a:r>
               <a:rPr lang="en-US" sz="1800" dirty="0">
                 <a:solidFill>
-                  <a:srgbClr val="7FB1C6"/>
-                </a:solidFill>
-                <a:latin typeface="Calibri" pitchFamily="34" charset="0"/>
-                <a:ea typeface="Calibri" pitchFamily="34" charset="-122"/>
-                <a:cs typeface="Calibri" pitchFamily="34" charset="-120"/>
+                  <a:srgbClr val="6FD9D4"/>
+                </a:solidFill>
+                <a:latin typeface="Telegraf" pitchFamily="34" charset="0"/>
+                <a:ea typeface="Telegraf" pitchFamily="34" charset="-122"/>
+                <a:cs typeface="Telegraf" pitchFamily="34" charset="-120"/>
               </a:rPr>
               <a:t>from one screen,</a:t>
             </a:r>
@@ -4908,11 +4908,11 @@
             <a:r>
               <a:rPr lang="en-US" sz="1800" dirty="0">
                 <a:solidFill>
-                  <a:srgbClr val="7FB1C6"/>
-                </a:solidFill>
-                <a:latin typeface="Calibri" pitchFamily="34" charset="0"/>
-                <a:ea typeface="Calibri" pitchFamily="34" charset="-122"/>
-                <a:cs typeface="Calibri" pitchFamily="34" charset="-120"/>
+                  <a:srgbClr val="6FD9D4"/>
+                </a:solidFill>
+                <a:latin typeface="Telegraf" pitchFamily="34" charset="0"/>
+                <a:ea typeface="Telegraf" pitchFamily="34" charset="-122"/>
+                <a:cs typeface="Telegraf" pitchFamily="34" charset="-120"/>
               </a:rPr>
               <a:t>from anywhere."</a:t>
             </a:r>
@@ -4947,11 +4947,11 @@
             <a:r>
               <a:rPr lang="en-US" sz="2400" i="1" dirty="0">
                 <a:solidFill>
-                  <a:srgbClr val="E8A33D"/>
-                </a:solidFill>
-                <a:latin typeface="Calibri" pitchFamily="34" charset="0"/>
-                <a:ea typeface="Calibri" pitchFamily="34" charset="-122"/>
-                <a:cs typeface="Calibri" pitchFamily="34" charset="-120"/>
+                  <a:srgbClr val="3DCD58"/>
+                </a:solidFill>
+                <a:latin typeface="Telegraf" pitchFamily="34" charset="0"/>
+                <a:ea typeface="Telegraf" pitchFamily="34" charset="-122"/>
+                <a:cs typeface="Telegraf" pitchFamily="34" charset="-120"/>
               </a:rPr>
               <a:t>Every one of those promises was kept. That is not the problem.</a:t>
             </a:r>
@@ -4986,11 +4986,11 @@
             <a:r>
               <a:rPr lang="en-US" sz="1100" dirty="0">
                 <a:solidFill>
-                  <a:srgbClr val="3E6072"/>
-                </a:solidFill>
-                <a:latin typeface="Calibri" pitchFamily="34" charset="0"/>
-                <a:ea typeface="Calibri" pitchFamily="34" charset="-122"/>
-                <a:cs typeface="Calibri" pitchFamily="34" charset="-120"/>
+                  <a:srgbClr val="3A3A3A"/>
+                </a:solidFill>
+                <a:latin typeface="Telegraf" pitchFamily="34" charset="0"/>
+                <a:ea typeface="Telegraf" pitchFamily="34" charset="-122"/>
+                <a:cs typeface="Telegraf" pitchFamily="34" charset="-120"/>
               </a:rPr>
               <a:t>10</a:t>
             </a:r>
@@ -5012,7 +5012,7 @@
     <p:bg>
       <p:bgPr>
         <a:solidFill>
-          <a:srgbClr val="0E2A38"/>
+          <a:srgbClr val="000000"/>
         </a:solidFill>
       </p:bgPr>
     </p:bg>
@@ -5047,11 +5047,11 @@
             </a:avLst>
           </a:prstGeom>
           <a:solidFill>
-            <a:srgbClr val="E8A33D"/>
+            <a:srgbClr val="3DCD58"/>
           </a:solidFill>
           <a:ln w="12700">
             <a:solidFill>
-              <a:srgbClr val="E8A33D"/>
+              <a:srgbClr val="3DCD58"/>
             </a:solidFill>
             <a:prstDash val="solid"/>
           </a:ln>
@@ -5084,11 +5084,11 @@
             <a:r>
               <a:rPr lang="en-US" sz="1500" b="1" spc="110" kern="0" dirty="0">
                 <a:solidFill>
-                  <a:srgbClr val="0E2A38"/>
-                </a:solidFill>
-                <a:latin typeface="Calibri" pitchFamily="34" charset="0"/>
-                <a:ea typeface="Calibri" pitchFamily="34" charset="-122"/>
-                <a:cs typeface="Calibri" pitchFamily="34" charset="-120"/>
+                  <a:srgbClr val="000000"/>
+                </a:solidFill>
+                <a:latin typeface="Telegraf" pitchFamily="34" charset="0"/>
+                <a:ea typeface="Telegraf" pitchFamily="34" charset="-122"/>
+                <a:cs typeface="Telegraf" pitchFamily="34" charset="-120"/>
               </a:rPr>
               <a:t>ACT II</a:t>
             </a:r>
@@ -5125,9 +5125,9 @@
                 <a:solidFill>
                   <a:srgbClr val="FFFFFF"/>
                 </a:solidFill>
-                <a:latin typeface="Cambria" pitchFamily="34" charset="0"/>
-                <a:ea typeface="Cambria" pitchFamily="34" charset="-122"/>
-                <a:cs typeface="Cambria" pitchFamily="34" charset="-120"/>
+                <a:latin typeface="Telegraf" pitchFamily="34" charset="0"/>
+                <a:ea typeface="Telegraf" pitchFamily="34" charset="-122"/>
+                <a:cs typeface="Telegraf" pitchFamily="34" charset="-120"/>
               </a:rPr>
               <a:t>The seam we never cut</a:t>
             </a:r>
@@ -5165,11 +5165,11 @@
             <a:r>
               <a:rPr lang="en-US" sz="2300" dirty="0">
                 <a:solidFill>
-                  <a:srgbClr val="7FB1C6"/>
-                </a:solidFill>
-                <a:latin typeface="Calibri" pitchFamily="34" charset="0"/>
-                <a:ea typeface="Calibri" pitchFamily="34" charset="-122"/>
-                <a:cs typeface="Calibri" pitchFamily="34" charset="-120"/>
+                  <a:srgbClr val="6FD9D4"/>
+                </a:solidFill>
+                <a:latin typeface="Telegraf" pitchFamily="34" charset="0"/>
+                <a:ea typeface="Telegraf" pitchFamily="34" charset="-122"/>
+                <a:cs typeface="Telegraf" pitchFamily="34" charset="-120"/>
               </a:rPr>
               <a:t>The PLC separated logic from wiring. Nobody ever separated logic from the box.</a:t>
             </a:r>
@@ -5204,11 +5204,11 @@
             <a:r>
               <a:rPr lang="en-US" sz="1100" dirty="0">
                 <a:solidFill>
-                  <a:srgbClr val="3E6072"/>
-                </a:solidFill>
-                <a:latin typeface="Calibri" pitchFamily="34" charset="0"/>
-                <a:ea typeface="Calibri" pitchFamily="34" charset="-122"/>
-                <a:cs typeface="Calibri" pitchFamily="34" charset="-120"/>
+                  <a:srgbClr val="3A3A3A"/>
+                </a:solidFill>
+                <a:latin typeface="Telegraf" pitchFamily="34" charset="0"/>
+                <a:ea typeface="Telegraf" pitchFamily="34" charset="-122"/>
+                <a:cs typeface="Telegraf" pitchFamily="34" charset="-120"/>
               </a:rPr>
               <a:t>11</a:t>
             </a:r>
@@ -5265,11 +5265,11 @@
             </a:avLst>
           </a:prstGeom>
           <a:solidFill>
-            <a:srgbClr val="1C7293"/>
+            <a:srgbClr val="00A19C"/>
           </a:solidFill>
           <a:ln w="12700">
             <a:solidFill>
-              <a:srgbClr val="1C7293"/>
+              <a:srgbClr val="00A19C"/>
             </a:solidFill>
             <a:prstDash val="solid"/>
           </a:ln>
@@ -5304,9 +5304,9 @@
                 <a:solidFill>
                   <a:srgbClr val="FFFFFF"/>
                 </a:solidFill>
-                <a:latin typeface="Calibri" pitchFamily="34" charset="0"/>
-                <a:ea typeface="Calibri" pitchFamily="34" charset="-122"/>
-                <a:cs typeface="Calibri" pitchFamily="34" charset="-120"/>
+                <a:latin typeface="Telegraf" pitchFamily="34" charset="0"/>
+                <a:ea typeface="Telegraf" pitchFamily="34" charset="-122"/>
+                <a:cs typeface="Telegraf" pitchFamily="34" charset="-120"/>
               </a:rPr>
               <a:t>THE VILLAIN</a:t>
             </a:r>
@@ -5341,11 +5341,11 @@
             <a:r>
               <a:rPr lang="en-US" sz="3800" b="1" dirty="0">
                 <a:solidFill>
-                  <a:srgbClr val="12242E"/>
-                </a:solidFill>
-                <a:latin typeface="Cambria" pitchFamily="34" charset="0"/>
-                <a:ea typeface="Cambria" pitchFamily="34" charset="-122"/>
-                <a:cs typeface="Cambria" pitchFamily="34" charset="-120"/>
+                  <a:srgbClr val="FFFFFF"/>
+                </a:solidFill>
+                <a:latin typeface="Telegraf" pitchFamily="34" charset="0"/>
+                <a:ea typeface="Telegraf" pitchFamily="34" charset="-122"/>
+                <a:cs typeface="Telegraf" pitchFamily="34" charset="-120"/>
               </a:rPr>
               <a:t>Your control logic has a serial number</a:t>
             </a:r>
@@ -5383,11 +5383,11 @@
             <a:r>
               <a:rPr lang="en-US" sz="2300" dirty="0">
                 <a:solidFill>
-                  <a:srgbClr val="12242E"/>
-                </a:solidFill>
-                <a:latin typeface="Calibri" pitchFamily="34" charset="0"/>
-                <a:ea typeface="Calibri" pitchFamily="34" charset="-122"/>
-                <a:cs typeface="Calibri" pitchFamily="34" charset="-120"/>
+                  <a:srgbClr val="FFFFFF"/>
+                </a:solidFill>
+                <a:latin typeface="Telegraf" pitchFamily="34" charset="0"/>
+                <a:ea typeface="Telegraf" pitchFamily="34" charset="-122"/>
+                <a:cs typeface="Telegraf" pitchFamily="34" charset="-120"/>
               </a:rPr>
               <a:t>The logic that runs your plant is compiled for one manufacturer's controller, spoken over that manufacturer's protocol, and edited in that manufacturer's software.</a:t>
             </a:r>
@@ -5422,11 +5422,11 @@
             <a:r>
               <a:rPr lang="en-US" sz="2300" b="1" dirty="0">
                 <a:solidFill>
-                  <a:srgbClr val="12242E"/>
-                </a:solidFill>
-                <a:latin typeface="Calibri" pitchFamily="34" charset="0"/>
-                <a:ea typeface="Calibri" pitchFamily="34" charset="-122"/>
-                <a:cs typeface="Calibri" pitchFamily="34" charset="-120"/>
+                  <a:srgbClr val="FFFFFF"/>
+                </a:solidFill>
+                <a:latin typeface="Telegraf" pitchFamily="34" charset="0"/>
+                <a:ea typeface="Telegraf" pitchFamily="34" charset="-122"/>
+                <a:cs typeface="Telegraf" pitchFamily="34" charset="-120"/>
               </a:rPr>
               <a:t>Move any one of those three and the logic doesn't travel. It gets rewritten.</a:t>
             </a:r>
@@ -5451,11 +5451,11 @@
             </a:avLst>
           </a:prstGeom>
           <a:solidFill>
-            <a:srgbClr val="EDF3F6"/>
+            <a:srgbClr val="161616"/>
           </a:solidFill>
           <a:ln w="12700">
             <a:solidFill>
-              <a:srgbClr val="EDF3F6"/>
+              <a:srgbClr val="161616"/>
             </a:solidFill>
             <a:prstDash val="solid"/>
           </a:ln>
@@ -5491,11 +5491,11 @@
             <a:r>
               <a:rPr lang="en-US" sz="1800" b="1" dirty="0">
                 <a:solidFill>
-                  <a:srgbClr val="12242E"/>
-                </a:solidFill>
-                <a:latin typeface="Calibri" pitchFamily="34" charset="0"/>
-                <a:ea typeface="Calibri" pitchFamily="34" charset="-122"/>
-                <a:cs typeface="Calibri" pitchFamily="34" charset="-120"/>
+                  <a:srgbClr val="FFFFFF"/>
+                </a:solidFill>
+                <a:latin typeface="Telegraf" pitchFamily="34" charset="0"/>
+                <a:ea typeface="Telegraf" pitchFamily="34" charset="-122"/>
+                <a:cs typeface="Telegraf" pitchFamily="34" charset="-120"/>
               </a:rPr>
               <a:t>You own it on paper.
 </a:t>
@@ -5512,11 +5512,11 @@
             <a:r>
               <a:rPr lang="en-US" sz="1800" dirty="0">
                 <a:solidFill>
-                  <a:srgbClr val="5B7386"/>
-                </a:solidFill>
-                <a:latin typeface="Calibri" pitchFamily="34" charset="0"/>
-                <a:ea typeface="Calibri" pitchFamily="34" charset="-122"/>
-                <a:cs typeface="Calibri" pitchFamily="34" charset="-120"/>
+                  <a:srgbClr val="9AA3AA"/>
+                </a:solidFill>
+                <a:latin typeface="Telegraf" pitchFamily="34" charset="0"/>
+                <a:ea typeface="Telegraf" pitchFamily="34" charset="-122"/>
+                <a:cs typeface="Telegraf" pitchFamily="34" charset="-120"/>
               </a:rPr>
               <a:t>It's in your capital budget, your as-builts, your O&amp;M manual.</a:t>
             </a:r>
@@ -5541,11 +5541,11 @@
             </a:avLst>
           </a:prstGeom>
           <a:solidFill>
-            <a:srgbClr val="EDF3F6"/>
+            <a:srgbClr val="161616"/>
           </a:solidFill>
           <a:ln w="12700">
             <a:solidFill>
-              <a:srgbClr val="EDF3F6"/>
+              <a:srgbClr val="161616"/>
             </a:solidFill>
             <a:prstDash val="solid"/>
           </a:ln>
@@ -5581,11 +5581,11 @@
             <a:r>
               <a:rPr lang="en-US" sz="1800" b="1" dirty="0">
                 <a:solidFill>
-                  <a:srgbClr val="E8A33D"/>
-                </a:solidFill>
-                <a:latin typeface="Calibri" pitchFamily="34" charset="0"/>
-                <a:ea typeface="Calibri" pitchFamily="34" charset="-122"/>
-                <a:cs typeface="Calibri" pitchFamily="34" charset="-120"/>
+                  <a:srgbClr val="3DCD58"/>
+                </a:solidFill>
+                <a:latin typeface="Telegraf" pitchFamily="34" charset="0"/>
+                <a:ea typeface="Telegraf" pitchFamily="34" charset="-122"/>
+                <a:cs typeface="Telegraf" pitchFamily="34" charset="-120"/>
               </a:rPr>
               <a:t>You don't own it in practice.
 </a:t>
@@ -5602,11 +5602,11 @@
             <a:r>
               <a:rPr lang="en-US" sz="1800" dirty="0">
                 <a:solidFill>
-                  <a:srgbClr val="12242E"/>
-                </a:solidFill>
-                <a:latin typeface="Calibri" pitchFamily="34" charset="0"/>
-                <a:ea typeface="Calibri" pitchFamily="34" charset="-122"/>
-                <a:cs typeface="Calibri" pitchFamily="34" charset="-120"/>
+                  <a:srgbClr val="FFFFFF"/>
+                </a:solidFill>
+                <a:latin typeface="Telegraf" pitchFamily="34" charset="0"/>
+                <a:ea typeface="Telegraf" pitchFamily="34" charset="-122"/>
+                <a:cs typeface="Telegraf" pitchFamily="34" charset="-120"/>
               </a:rPr>
               <a:t>You can't move it, price it against an alternative, or outlive the hardware it was written for.</a:t>
             </a:r>
@@ -5641,11 +5641,11 @@
             <a:r>
               <a:rPr lang="en-US" sz="1100" dirty="0">
                 <a:solidFill>
-                  <a:srgbClr val="AEC1CC"/>
-                </a:solidFill>
-                <a:latin typeface="Calibri" pitchFamily="34" charset="0"/>
-                <a:ea typeface="Calibri" pitchFamily="34" charset="-122"/>
-                <a:cs typeface="Calibri" pitchFamily="34" charset="-120"/>
+                  <a:srgbClr val="3A3A3A"/>
+                </a:solidFill>
+                <a:latin typeface="Telegraf" pitchFamily="34" charset="0"/>
+                <a:ea typeface="Telegraf" pitchFamily="34" charset="-122"/>
+                <a:cs typeface="Telegraf" pitchFamily="34" charset="-120"/>
               </a:rPr>
               <a:t>12</a:t>
             </a:r>
@@ -5667,7 +5667,7 @@
     <p:bg>
       <p:bgPr>
         <a:solidFill>
-          <a:srgbClr val="0E2A38"/>
+          <a:srgbClr val="000000"/>
         </a:solidFill>
       </p:bgPr>
     </p:bg>
@@ -5702,11 +5702,11 @@
             </a:avLst>
           </a:prstGeom>
           <a:solidFill>
-            <a:srgbClr val="E8A33D"/>
+            <a:srgbClr val="3DCD58"/>
           </a:solidFill>
           <a:ln w="12700">
             <a:solidFill>
-              <a:srgbClr val="E8A33D"/>
+              <a:srgbClr val="3DCD58"/>
             </a:solidFill>
             <a:prstDash val="solid"/>
           </a:ln>
@@ -5739,11 +5739,11 @@
             <a:r>
               <a:rPr lang="en-US" sz="1500" b="1" spc="110" kern="0" dirty="0">
                 <a:solidFill>
-                  <a:srgbClr val="0E2A38"/>
-                </a:solidFill>
-                <a:latin typeface="Calibri" pitchFamily="34" charset="0"/>
-                <a:ea typeface="Calibri" pitchFamily="34" charset="-122"/>
-                <a:cs typeface="Calibri" pitchFamily="34" charset="-120"/>
+                  <a:srgbClr val="000000"/>
+                </a:solidFill>
+                <a:latin typeface="Telegraf" pitchFamily="34" charset="0"/>
+                <a:ea typeface="Telegraf" pitchFamily="34" charset="-122"/>
+                <a:cs typeface="Telegraf" pitchFamily="34" charset="-120"/>
               </a:rPr>
               <a:t>WHY IT HAPPENED</a:t>
             </a:r>
@@ -5780,9 +5780,9 @@
                 <a:solidFill>
                   <a:srgbClr val="FFFFFF"/>
                 </a:solidFill>
-                <a:latin typeface="Cambria" pitchFamily="34" charset="0"/>
-                <a:ea typeface="Cambria" pitchFamily="34" charset="-122"/>
-                <a:cs typeface="Cambria" pitchFamily="34" charset="-120"/>
+                <a:latin typeface="Telegraf" pitchFamily="34" charset="0"/>
+                <a:ea typeface="Telegraf" pitchFamily="34" charset="-122"/>
+                <a:cs typeface="Telegraf" pitchFamily="34" charset="-120"/>
               </a:rPr>
               <a:t>Nobody set out to trap you</a:t>
             </a:r>
@@ -5807,11 +5807,11 @@
             </a:avLst>
           </a:prstGeom>
           <a:solidFill>
-            <a:srgbClr val="1C7293"/>
+            <a:srgbClr val="00A19C"/>
           </a:solidFill>
           <a:ln w="12700">
             <a:solidFill>
-              <a:srgbClr val="1C7293"/>
+              <a:srgbClr val="00A19C"/>
             </a:solidFill>
             <a:prstDash val="solid"/>
           </a:ln>
@@ -5844,11 +5844,11 @@
             <a:r>
               <a:rPr lang="en-US" sz="2200" b="1" dirty="0">
                 <a:solidFill>
-                  <a:srgbClr val="FFFFFF"/>
-                </a:solidFill>
-                <a:latin typeface="Cambria" pitchFamily="34" charset="0"/>
-                <a:ea typeface="Cambria" pitchFamily="34" charset="-122"/>
-                <a:cs typeface="Cambria" pitchFamily="34" charset="-120"/>
+                  <a:srgbClr val="000000"/>
+                </a:solidFill>
+                <a:latin typeface="Telegraf" pitchFamily="34" charset="0"/>
+                <a:ea typeface="Telegraf" pitchFamily="34" charset="-122"/>
+                <a:cs typeface="Telegraf" pitchFamily="34" charset="-120"/>
               </a:rPr>
               <a:t>1</a:t>
             </a:r>
@@ -5883,11 +5883,11 @@
             <a:r>
               <a:rPr lang="en-US" sz="2400" b="1" dirty="0">
                 <a:solidFill>
-                  <a:srgbClr val="FFFFFF"/>
-                </a:solidFill>
-                <a:latin typeface="Cambria" pitchFamily="34" charset="0"/>
-                <a:ea typeface="Cambria" pitchFamily="34" charset="-122"/>
-                <a:cs typeface="Cambria" pitchFamily="34" charset="-120"/>
+                  <a:srgbClr val="00A19C"/>
+                </a:solidFill>
+                <a:latin typeface="Telegraf" pitchFamily="34" charset="0"/>
+                <a:ea typeface="Telegraf" pitchFamily="34" charset="-122"/>
+                <a:cs typeface="Telegraf" pitchFamily="34" charset="-120"/>
               </a:rPr>
               <a:t>There were no standards to use.</a:t>
             </a:r>
@@ -5925,11 +5925,11 @@
             <a:r>
               <a:rPr lang="en-US" sz="1800" dirty="0">
                 <a:solidFill>
-                  <a:srgbClr val="7FB1C6"/>
-                </a:solidFill>
-                <a:latin typeface="Calibri" pitchFamily="34" charset="0"/>
-                <a:ea typeface="Calibri" pitchFamily="34" charset="-122"/>
-                <a:cs typeface="Calibri" pitchFamily="34" charset="-120"/>
+                  <a:srgbClr val="6FD9D4"/>
+                </a:solidFill>
+                <a:latin typeface="Telegraf" pitchFamily="34" charset="0"/>
+                <a:ea typeface="Telegraf" pitchFamily="34" charset="-122"/>
+                <a:cs typeface="Telegraf" pitchFamily="34" charset="-120"/>
               </a:rPr>
               <a:t>In 1975 there was no Ethernet on a plant floor, no OPC, no common runtime. If you wanted controllers to talk, you invented the protocol yourself.</a:t>
             </a:r>
@@ -5954,11 +5954,11 @@
             </a:avLst>
           </a:prstGeom>
           <a:solidFill>
-            <a:srgbClr val="1C7293"/>
+            <a:srgbClr val="E2231A"/>
           </a:solidFill>
           <a:ln w="12700">
             <a:solidFill>
-              <a:srgbClr val="1C7293"/>
+              <a:srgbClr val="E2231A"/>
             </a:solidFill>
             <a:prstDash val="solid"/>
           </a:ln>
@@ -5993,9 +5993,9 @@
                 <a:solidFill>
                   <a:srgbClr val="FFFFFF"/>
                 </a:solidFill>
-                <a:latin typeface="Cambria" pitchFamily="34" charset="0"/>
-                <a:ea typeface="Cambria" pitchFamily="34" charset="-122"/>
-                <a:cs typeface="Cambria" pitchFamily="34" charset="-120"/>
+                <a:latin typeface="Telegraf" pitchFamily="34" charset="0"/>
+                <a:ea typeface="Telegraf" pitchFamily="34" charset="-122"/>
+                <a:cs typeface="Telegraf" pitchFamily="34" charset="-120"/>
               </a:rPr>
               <a:t>2</a:t>
             </a:r>
@@ -6030,11 +6030,11 @@
             <a:r>
               <a:rPr lang="en-US" sz="2400" b="1" dirty="0">
                 <a:solidFill>
-                  <a:srgbClr val="FFFFFF"/>
-                </a:solidFill>
-                <a:latin typeface="Cambria" pitchFamily="34" charset="0"/>
-                <a:ea typeface="Cambria" pitchFamily="34" charset="-122"/>
-                <a:cs typeface="Cambria" pitchFamily="34" charset="-120"/>
+                  <a:srgbClr val="E2231A"/>
+                </a:solidFill>
+                <a:latin typeface="Telegraf" pitchFamily="34" charset="0"/>
+                <a:ea typeface="Telegraf" pitchFamily="34" charset="-122"/>
+                <a:cs typeface="Telegraf" pitchFamily="34" charset="-120"/>
               </a:rPr>
               <a:t>Proprietary was the engineering answer.</a:t>
             </a:r>
@@ -6072,11 +6072,11 @@
             <a:r>
               <a:rPr lang="en-US" sz="1800" dirty="0">
                 <a:solidFill>
-                  <a:srgbClr val="7FB1C6"/>
-                </a:solidFill>
-                <a:latin typeface="Calibri" pitchFamily="34" charset="0"/>
-                <a:ea typeface="Calibri" pitchFamily="34" charset="-122"/>
-                <a:cs typeface="Calibri" pitchFamily="34" charset="-120"/>
+                  <a:srgbClr val="6FD9D4"/>
+                </a:solidFill>
+                <a:latin typeface="Telegraf" pitchFamily="34" charset="0"/>
+                <a:ea typeface="Telegraf" pitchFamily="34" charset="-122"/>
+                <a:cs typeface="Telegraf" pitchFamily="34" charset="-120"/>
               </a:rPr>
               <a:t>Owning every layer was how you guaranteed determinism, timing, and support. It made the system work — and it made it supportable.</a:t>
             </a:r>
@@ -6101,11 +6101,11 @@
             </a:avLst>
           </a:prstGeom>
           <a:solidFill>
-            <a:srgbClr val="E8A33D"/>
+            <a:srgbClr val="3DCD58"/>
           </a:solidFill>
           <a:ln w="12700">
             <a:solidFill>
-              <a:srgbClr val="E8A33D"/>
+              <a:srgbClr val="3DCD58"/>
             </a:solidFill>
             <a:prstDash val="solid"/>
           </a:ln>
@@ -6138,11 +6138,11 @@
             <a:r>
               <a:rPr lang="en-US" sz="2200" b="1" dirty="0">
                 <a:solidFill>
-                  <a:srgbClr val="0E2A38"/>
-                </a:solidFill>
-                <a:latin typeface="Cambria" pitchFamily="34" charset="0"/>
-                <a:ea typeface="Cambria" pitchFamily="34" charset="-122"/>
-                <a:cs typeface="Cambria" pitchFamily="34" charset="-120"/>
+                  <a:srgbClr val="FFFFFF"/>
+                </a:solidFill>
+                <a:latin typeface="Telegraf" pitchFamily="34" charset="0"/>
+                <a:ea typeface="Telegraf" pitchFamily="34" charset="-122"/>
+                <a:cs typeface="Telegraf" pitchFamily="34" charset="-120"/>
               </a:rPr>
               <a:t>3</a:t>
             </a:r>
@@ -6177,11 +6177,11 @@
             <a:r>
               <a:rPr lang="en-US" sz="2400" b="1" dirty="0">
                 <a:solidFill>
-                  <a:srgbClr val="E8A33D"/>
-                </a:solidFill>
-                <a:latin typeface="Cambria" pitchFamily="34" charset="0"/>
-                <a:ea typeface="Cambria" pitchFamily="34" charset="-122"/>
-                <a:cs typeface="Cambria" pitchFamily="34" charset="-120"/>
+                  <a:srgbClr val="3DCD58"/>
+                </a:solidFill>
+                <a:latin typeface="Telegraf" pitchFamily="34" charset="0"/>
+                <a:ea typeface="Telegraf" pitchFamily="34" charset="-122"/>
+                <a:cs typeface="Telegraf" pitchFamily="34" charset="-120"/>
               </a:rPr>
               <a:t>And then it became the business model.</a:t>
             </a:r>
@@ -6219,11 +6219,11 @@
             <a:r>
               <a:rPr lang="en-US" sz="1800" dirty="0">
                 <a:solidFill>
-                  <a:srgbClr val="7FB1C6"/>
-                </a:solidFill>
-                <a:latin typeface="Calibri" pitchFamily="34" charset="0"/>
-                <a:ea typeface="Calibri" pitchFamily="34" charset="-122"/>
-                <a:cs typeface="Calibri" pitchFamily="34" charset="-120"/>
+                  <a:srgbClr val="6FD9D4"/>
+                </a:solidFill>
+                <a:latin typeface="Telegraf" pitchFamily="34" charset="0"/>
+                <a:ea typeface="Telegraf" pitchFamily="34" charset="-122"/>
+                <a:cs typeface="Telegraf" pitchFamily="34" charset="-120"/>
               </a:rPr>
               <a:t>Once the stack only worked end-to-end, the next controller, the next license, and the next migration were all decided by the vendor's calendar, not yours.</a:t>
             </a:r>
@@ -6239,8 +6239,8 @@
         </p:nvSpPr>
         <p:spPr>
           <a:xfrm>
-            <a:off x="640080" y="6263640"/>
-            <a:ext cx="10332720" cy="457200"/>
+            <a:off x="640080" y="6217920"/>
+            <a:ext cx="10332720" cy="548640"/>
           </a:xfrm>
           <a:prstGeom prst="rect">
             <a:avLst/>
@@ -6256,17 +6256,17 @@
               <a:buNone/>
             </a:pPr>
             <a:r>
-              <a:rPr lang="en-US" sz="2000" i="1" dirty="0">
+              <a:rPr lang="en-US" sz="1800" i="1" dirty="0">
                 <a:solidFill>
                   <a:srgbClr val="FFFFFF"/>
                 </a:solidFill>
-                <a:latin typeface="Calibri" pitchFamily="34" charset="0"/>
-                <a:ea typeface="Calibri" pitchFamily="34" charset="-122"/>
-                <a:cs typeface="Calibri" pitchFamily="34" charset="-120"/>
+                <a:latin typeface="Telegraf" pitchFamily="34" charset="0"/>
+                <a:ea typeface="Telegraf" pitchFamily="34" charset="-122"/>
+                <a:cs typeface="Telegraf" pitchFamily="34" charset="-120"/>
               </a:rPr>
               <a:t>Schneider Electric. Rockwell. Siemens. Emerson. Honeywell. All of us. Including us.</a:t>
             </a:r>
-            <a:endParaRPr lang="en-US" sz="2000" dirty="0"/>
+            <a:endParaRPr lang="en-US" sz="1800" dirty="0"/>
           </a:p>
         </p:txBody>
       </p:sp>
@@ -6297,11 +6297,11 @@
             <a:r>
               <a:rPr lang="en-US" sz="1100" dirty="0">
                 <a:solidFill>
-                  <a:srgbClr val="3E6072"/>
-                </a:solidFill>
-                <a:latin typeface="Calibri" pitchFamily="34" charset="0"/>
-                <a:ea typeface="Calibri" pitchFamily="34" charset="-122"/>
-                <a:cs typeface="Calibri" pitchFamily="34" charset="-120"/>
+                  <a:srgbClr val="3A3A3A"/>
+                </a:solidFill>
+                <a:latin typeface="Telegraf" pitchFamily="34" charset="0"/>
+                <a:ea typeface="Telegraf" pitchFamily="34" charset="-122"/>
+                <a:cs typeface="Telegraf" pitchFamily="34" charset="-120"/>
               </a:rPr>
               <a:t>13</a:t>
             </a:r>
@@ -6358,11 +6358,11 @@
             </a:avLst>
           </a:prstGeom>
           <a:solidFill>
-            <a:srgbClr val="1C7293"/>
+            <a:srgbClr val="00A19C"/>
           </a:solidFill>
           <a:ln w="12700">
             <a:solidFill>
-              <a:srgbClr val="1C7293"/>
+              <a:srgbClr val="00A19C"/>
             </a:solidFill>
             <a:prstDash val="solid"/>
           </a:ln>
@@ -6397,9 +6397,9 @@
                 <a:solidFill>
                   <a:srgbClr val="FFFFFF"/>
                 </a:solidFill>
-                <a:latin typeface="Calibri" pitchFamily="34" charset="0"/>
-                <a:ea typeface="Calibri" pitchFamily="34" charset="-122"/>
-                <a:cs typeface="Calibri" pitchFamily="34" charset="-120"/>
+                <a:latin typeface="Telegraf" pitchFamily="34" charset="0"/>
+                <a:ea typeface="Telegraf" pitchFamily="34" charset="-122"/>
+                <a:cs typeface="Telegraf" pitchFamily="34" charset="-120"/>
               </a:rPr>
               <a:t>THE BILL</a:t>
             </a:r>
@@ -6434,11 +6434,11 @@
             <a:r>
               <a:rPr lang="en-US" sz="3800" b="1" dirty="0">
                 <a:solidFill>
-                  <a:srgbClr val="12242E"/>
-                </a:solidFill>
-                <a:latin typeface="Cambria" pitchFamily="34" charset="0"/>
-                <a:ea typeface="Cambria" pitchFamily="34" charset="-122"/>
-                <a:cs typeface="Cambria" pitchFamily="34" charset="-120"/>
+                  <a:srgbClr val="FFFFFF"/>
+                </a:solidFill>
+                <a:latin typeface="Telegraf" pitchFamily="34" charset="0"/>
+                <a:ea typeface="Telegraf" pitchFamily="34" charset="-122"/>
+                <a:cs typeface="Telegraf" pitchFamily="34" charset="-120"/>
               </a:rPr>
               <a:t>Four things are coming due at once</a:t>
             </a:r>
@@ -6463,11 +6463,11 @@
             </a:avLst>
           </a:prstGeom>
           <a:solidFill>
-            <a:srgbClr val="EDF3F6"/>
+            <a:srgbClr val="161616"/>
           </a:solidFill>
           <a:ln w="12700">
             <a:solidFill>
-              <a:srgbClr val="EDF3F6"/>
+              <a:srgbClr val="161616"/>
             </a:solidFill>
             <a:prstDash val="solid"/>
           </a:ln>
@@ -6490,11 +6490,11 @@
             </a:avLst>
           </a:prstGeom>
           <a:solidFill>
-            <a:srgbClr val="E8A33D"/>
+            <a:srgbClr val="3DCD58"/>
           </a:solidFill>
           <a:ln w="12700">
             <a:solidFill>
-              <a:srgbClr val="E8A33D"/>
+              <a:srgbClr val="3DCD58"/>
             </a:solidFill>
             <a:prstDash val="solid"/>
           </a:ln>
@@ -6527,11 +6527,11 @@
             <a:r>
               <a:rPr lang="en-US" sz="2100" b="1" dirty="0">
                 <a:solidFill>
-                  <a:srgbClr val="0E2A38"/>
-                </a:solidFill>
-                <a:latin typeface="Cambria" pitchFamily="34" charset="0"/>
-                <a:ea typeface="Cambria" pitchFamily="34" charset="-122"/>
-                <a:cs typeface="Cambria" pitchFamily="34" charset="-120"/>
+                  <a:srgbClr val="000000"/>
+                </a:solidFill>
+                <a:latin typeface="Telegraf" pitchFamily="34" charset="0"/>
+                <a:ea typeface="Telegraf" pitchFamily="34" charset="-122"/>
+                <a:cs typeface="Telegraf" pitchFamily="34" charset="-120"/>
               </a:rPr>
               <a:t>1</a:t>
             </a:r>
@@ -6566,11 +6566,11 @@
             <a:r>
               <a:rPr lang="en-US" sz="2400" b="1" dirty="0">
                 <a:solidFill>
-                  <a:srgbClr val="1C7293"/>
-                </a:solidFill>
-                <a:latin typeface="Cambria" pitchFamily="34" charset="0"/>
-                <a:ea typeface="Cambria" pitchFamily="34" charset="-122"/>
-                <a:cs typeface="Cambria" pitchFamily="34" charset="-120"/>
+                  <a:srgbClr val="00A19C"/>
+                </a:solidFill>
+                <a:latin typeface="Telegraf" pitchFamily="34" charset="0"/>
+                <a:ea typeface="Telegraf" pitchFamily="34" charset="-122"/>
+                <a:cs typeface="Telegraf" pitchFamily="34" charset="-120"/>
               </a:rPr>
               <a:t>Lifecycle</a:t>
             </a:r>
@@ -6608,11 +6608,11 @@
             <a:r>
               <a:rPr lang="en-US" sz="1700" dirty="0">
                 <a:solidFill>
-                  <a:srgbClr val="12242E"/>
-                </a:solidFill>
-                <a:latin typeface="Calibri" pitchFamily="34" charset="0"/>
-                <a:ea typeface="Calibri" pitchFamily="34" charset="-122"/>
-                <a:cs typeface="Calibri" pitchFamily="34" charset="-120"/>
+                  <a:srgbClr val="FFFFFF"/>
+                </a:solidFill>
+                <a:latin typeface="Telegraf" pitchFamily="34" charset="0"/>
+                <a:ea typeface="Telegraf" pitchFamily="34" charset="-122"/>
+                <a:cs typeface="Telegraf" pitchFamily="34" charset="-120"/>
               </a:rPr>
               <a:t>A chip goes end-of-support and a maintenance decision becomes a capital project.</a:t>
             </a:r>
@@ -6637,11 +6637,11 @@
             </a:avLst>
           </a:prstGeom>
           <a:solidFill>
-            <a:srgbClr val="EDF3F6"/>
+            <a:srgbClr val="161616"/>
           </a:solidFill>
           <a:ln w="12700">
             <a:solidFill>
-              <a:srgbClr val="EDF3F6"/>
+              <a:srgbClr val="161616"/>
             </a:solidFill>
             <a:prstDash val="solid"/>
           </a:ln>
@@ -6664,11 +6664,11 @@
             </a:avLst>
           </a:prstGeom>
           <a:solidFill>
-            <a:srgbClr val="E8A33D"/>
+            <a:srgbClr val="3DCD58"/>
           </a:solidFill>
           <a:ln w="12700">
             <a:solidFill>
-              <a:srgbClr val="E8A33D"/>
+              <a:srgbClr val="3DCD58"/>
             </a:solidFill>
             <a:prstDash val="solid"/>
           </a:ln>
@@ -6701,11 +6701,11 @@
             <a:r>
               <a:rPr lang="en-US" sz="2100" b="1" dirty="0">
                 <a:solidFill>
-                  <a:srgbClr val="0E2A38"/>
-                </a:solidFill>
-                <a:latin typeface="Cambria" pitchFamily="34" charset="0"/>
-                <a:ea typeface="Cambria" pitchFamily="34" charset="-122"/>
-                <a:cs typeface="Cambria" pitchFamily="34" charset="-120"/>
+                  <a:srgbClr val="000000"/>
+                </a:solidFill>
+                <a:latin typeface="Telegraf" pitchFamily="34" charset="0"/>
+                <a:ea typeface="Telegraf" pitchFamily="34" charset="-122"/>
+                <a:cs typeface="Telegraf" pitchFamily="34" charset="-120"/>
               </a:rPr>
               <a:t>2</a:t>
             </a:r>
@@ -6740,11 +6740,11 @@
             <a:r>
               <a:rPr lang="en-US" sz="2400" b="1" dirty="0">
                 <a:solidFill>
-                  <a:srgbClr val="1C7293"/>
-                </a:solidFill>
-                <a:latin typeface="Cambria" pitchFamily="34" charset="0"/>
-                <a:ea typeface="Cambria" pitchFamily="34" charset="-122"/>
-                <a:cs typeface="Cambria" pitchFamily="34" charset="-120"/>
+                  <a:srgbClr val="00A19C"/>
+                </a:solidFill>
+                <a:latin typeface="Telegraf" pitchFamily="34" charset="0"/>
+                <a:ea typeface="Telegraf" pitchFamily="34" charset="-122"/>
+                <a:cs typeface="Telegraf" pitchFamily="34" charset="-120"/>
               </a:rPr>
               <a:t>Cybersecurity</a:t>
             </a:r>
@@ -6782,11 +6782,11 @@
             <a:r>
               <a:rPr lang="en-US" sz="1700" dirty="0">
                 <a:solidFill>
-                  <a:srgbClr val="12242E"/>
-                </a:solidFill>
-                <a:latin typeface="Calibri" pitchFamily="34" charset="0"/>
-                <a:ea typeface="Calibri" pitchFamily="34" charset="-122"/>
-                <a:cs typeface="Calibri" pitchFamily="34" charset="-120"/>
+                  <a:srgbClr val="FFFFFF"/>
+                </a:solidFill>
+                <a:latin typeface="Telegraf" pitchFamily="34" charset="0"/>
+                <a:ea typeface="Telegraf" pitchFamily="34" charset="-122"/>
+                <a:cs typeface="Telegraf" pitchFamily="34" charset="-120"/>
               </a:rPr>
               <a:t>Systems designed before the threat model existed, in a sector now being targeted.</a:t>
             </a:r>
@@ -6811,11 +6811,11 @@
             </a:avLst>
           </a:prstGeom>
           <a:solidFill>
-            <a:srgbClr val="EDF3F6"/>
+            <a:srgbClr val="161616"/>
           </a:solidFill>
           <a:ln w="12700">
             <a:solidFill>
-              <a:srgbClr val="EDF3F6"/>
+              <a:srgbClr val="161616"/>
             </a:solidFill>
             <a:prstDash val="solid"/>
           </a:ln>
@@ -6838,11 +6838,11 @@
             </a:avLst>
           </a:prstGeom>
           <a:solidFill>
-            <a:srgbClr val="E8A33D"/>
+            <a:srgbClr val="3DCD58"/>
           </a:solidFill>
           <a:ln w="12700">
             <a:solidFill>
-              <a:srgbClr val="E8A33D"/>
+              <a:srgbClr val="3DCD58"/>
             </a:solidFill>
             <a:prstDash val="solid"/>
           </a:ln>
@@ -6875,11 +6875,11 @@
             <a:r>
               <a:rPr lang="en-US" sz="2100" b="1" dirty="0">
                 <a:solidFill>
-                  <a:srgbClr val="0E2A38"/>
-                </a:solidFill>
-                <a:latin typeface="Cambria" pitchFamily="34" charset="0"/>
-                <a:ea typeface="Cambria" pitchFamily="34" charset="-122"/>
-                <a:cs typeface="Cambria" pitchFamily="34" charset="-120"/>
+                  <a:srgbClr val="000000"/>
+                </a:solidFill>
+                <a:latin typeface="Telegraf" pitchFamily="34" charset="0"/>
+                <a:ea typeface="Telegraf" pitchFamily="34" charset="-122"/>
+                <a:cs typeface="Telegraf" pitchFamily="34" charset="-120"/>
               </a:rPr>
               <a:t>3</a:t>
             </a:r>
@@ -6914,11 +6914,11 @@
             <a:r>
               <a:rPr lang="en-US" sz="2400" b="1" dirty="0">
                 <a:solidFill>
-                  <a:srgbClr val="1C7293"/>
-                </a:solidFill>
-                <a:latin typeface="Cambria" pitchFamily="34" charset="0"/>
-                <a:ea typeface="Cambria" pitchFamily="34" charset="-122"/>
-                <a:cs typeface="Cambria" pitchFamily="34" charset="-120"/>
+                  <a:srgbClr val="00A19C"/>
+                </a:solidFill>
+                <a:latin typeface="Telegraf" pitchFamily="34" charset="0"/>
+                <a:ea typeface="Telegraf" pitchFamily="34" charset="-122"/>
+                <a:cs typeface="Telegraf" pitchFamily="34" charset="-120"/>
               </a:rPr>
               <a:t>Data &amp; AI</a:t>
             </a:r>
@@ -6956,11 +6956,11 @@
             <a:r>
               <a:rPr lang="en-US" sz="1700" dirty="0">
                 <a:solidFill>
-                  <a:srgbClr val="12242E"/>
-                </a:solidFill>
-                <a:latin typeface="Calibri" pitchFamily="34" charset="0"/>
-                <a:ea typeface="Calibri" pitchFamily="34" charset="-122"/>
-                <a:cs typeface="Calibri" pitchFamily="34" charset="-120"/>
+                  <a:srgbClr val="FFFFFF"/>
+                </a:solidFill>
+                <a:latin typeface="Telegraf" pitchFamily="34" charset="0"/>
+                <a:ea typeface="Telegraf" pitchFamily="34" charset="-122"/>
+                <a:cs typeface="Telegraf" pitchFamily="34" charset="-120"/>
               </a:rPr>
               <a:t>The data exists. It's stranded behind a protocol built to talk to one screen.</a:t>
             </a:r>
@@ -6985,11 +6985,11 @@
             </a:avLst>
           </a:prstGeom>
           <a:solidFill>
-            <a:srgbClr val="EDF3F6"/>
+            <a:srgbClr val="161616"/>
           </a:solidFill>
           <a:ln w="12700">
             <a:solidFill>
-              <a:srgbClr val="EDF3F6"/>
+              <a:srgbClr val="161616"/>
             </a:solidFill>
             <a:prstDash val="solid"/>
           </a:ln>
@@ -7012,11 +7012,11 @@
             </a:avLst>
           </a:prstGeom>
           <a:solidFill>
-            <a:srgbClr val="E8A33D"/>
+            <a:srgbClr val="3DCD58"/>
           </a:solidFill>
           <a:ln w="12700">
             <a:solidFill>
-              <a:srgbClr val="E8A33D"/>
+              <a:srgbClr val="3DCD58"/>
             </a:solidFill>
             <a:prstDash val="solid"/>
           </a:ln>
@@ -7049,11 +7049,11 @@
             <a:r>
               <a:rPr lang="en-US" sz="2100" b="1" dirty="0">
                 <a:solidFill>
-                  <a:srgbClr val="0E2A38"/>
-                </a:solidFill>
-                <a:latin typeface="Cambria" pitchFamily="34" charset="0"/>
-                <a:ea typeface="Cambria" pitchFamily="34" charset="-122"/>
-                <a:cs typeface="Cambria" pitchFamily="34" charset="-120"/>
+                  <a:srgbClr val="000000"/>
+                </a:solidFill>
+                <a:latin typeface="Telegraf" pitchFamily="34" charset="0"/>
+                <a:ea typeface="Telegraf" pitchFamily="34" charset="-122"/>
+                <a:cs typeface="Telegraf" pitchFamily="34" charset="-120"/>
               </a:rPr>
               <a:t>4</a:t>
             </a:r>
@@ -7088,11 +7088,11 @@
             <a:r>
               <a:rPr lang="en-US" sz="2400" b="1" dirty="0">
                 <a:solidFill>
-                  <a:srgbClr val="1C7293"/>
-                </a:solidFill>
-                <a:latin typeface="Cambria" pitchFamily="34" charset="0"/>
-                <a:ea typeface="Cambria" pitchFamily="34" charset="-122"/>
-                <a:cs typeface="Cambria" pitchFamily="34" charset="-120"/>
+                  <a:srgbClr val="00A19C"/>
+                </a:solidFill>
+                <a:latin typeface="Telegraf" pitchFamily="34" charset="0"/>
+                <a:ea typeface="Telegraf" pitchFamily="34" charset="-122"/>
+                <a:cs typeface="Telegraf" pitchFamily="34" charset="-120"/>
               </a:rPr>
               <a:t>Workforce</a:t>
             </a:r>
@@ -7130,11 +7130,11 @@
             <a:r>
               <a:rPr lang="en-US" sz="1700" dirty="0">
                 <a:solidFill>
-                  <a:srgbClr val="12242E"/>
-                </a:solidFill>
-                <a:latin typeface="Calibri" pitchFamily="34" charset="0"/>
-                <a:ea typeface="Calibri" pitchFamily="34" charset="-122"/>
-                <a:cs typeface="Calibri" pitchFamily="34" charset="-120"/>
+                  <a:srgbClr val="FFFFFF"/>
+                </a:solidFill>
+                <a:latin typeface="Telegraf" pitchFamily="34" charset="0"/>
+                <a:ea typeface="Telegraf" pitchFamily="34" charset="-122"/>
+                <a:cs typeface="Telegraf" pitchFamily="34" charset="-120"/>
               </a:rPr>
               <a:t>The people who can read your ladder logic are retiring. Their replacements are IT-native.</a:t>
             </a:r>
@@ -7169,11 +7169,11 @@
             <a:r>
               <a:rPr lang="en-US" sz="2000" i="1" dirty="0">
                 <a:solidFill>
-                  <a:srgbClr val="E8A33D"/>
-                </a:solidFill>
-                <a:latin typeface="Calibri" pitchFamily="34" charset="0"/>
-                <a:ea typeface="Calibri" pitchFamily="34" charset="-122"/>
-                <a:cs typeface="Calibri" pitchFamily="34" charset="-120"/>
+                  <a:srgbClr val="3DCD58"/>
+                </a:solidFill>
+                <a:latin typeface="Telegraf" pitchFamily="34" charset="0"/>
+                <a:ea typeface="Telegraf" pitchFamily="34" charset="-122"/>
+                <a:cs typeface="Telegraf" pitchFamily="34" charset="-120"/>
               </a:rPr>
               <a:t>Any one of these is survivable. They are arriving together.</a:t>
             </a:r>
@@ -7208,11 +7208,11 @@
             <a:r>
               <a:rPr lang="en-US" sz="1100" dirty="0">
                 <a:solidFill>
-                  <a:srgbClr val="AEC1CC"/>
-                </a:solidFill>
-                <a:latin typeface="Calibri" pitchFamily="34" charset="0"/>
-                <a:ea typeface="Calibri" pitchFamily="34" charset="-122"/>
-                <a:cs typeface="Calibri" pitchFamily="34" charset="-120"/>
+                  <a:srgbClr val="3A3A3A"/>
+                </a:solidFill>
+                <a:latin typeface="Telegraf" pitchFamily="34" charset="0"/>
+                <a:ea typeface="Telegraf" pitchFamily="34" charset="-122"/>
+                <a:cs typeface="Telegraf" pitchFamily="34" charset="-120"/>
               </a:rPr>
               <a:t>14</a:t>
             </a:r>
@@ -7269,11 +7269,11 @@
             </a:avLst>
           </a:prstGeom>
           <a:solidFill>
-            <a:srgbClr val="1C7293"/>
+            <a:srgbClr val="00A19C"/>
           </a:solidFill>
           <a:ln w="12700">
             <a:solidFill>
-              <a:srgbClr val="1C7293"/>
+              <a:srgbClr val="00A19C"/>
             </a:solidFill>
             <a:prstDash val="solid"/>
           </a:ln>
@@ -7308,9 +7308,9 @@
                 <a:solidFill>
                   <a:srgbClr val="FFFFFF"/>
                 </a:solidFill>
-                <a:latin typeface="Calibri" pitchFamily="34" charset="0"/>
-                <a:ea typeface="Calibri" pitchFamily="34" charset="-122"/>
-                <a:cs typeface="Calibri" pitchFamily="34" charset="-120"/>
+                <a:latin typeface="Telegraf" pitchFamily="34" charset="0"/>
+                <a:ea typeface="Telegraf" pitchFamily="34" charset="-122"/>
+                <a:cs typeface="Telegraf" pitchFamily="34" charset="-120"/>
               </a:rPr>
               <a:t>BILL ONE</a:t>
             </a:r>
@@ -7345,11 +7345,11 @@
             <a:r>
               <a:rPr lang="en-US" sz="3800" b="1" dirty="0">
                 <a:solidFill>
-                  <a:srgbClr val="12242E"/>
-                </a:solidFill>
-                <a:latin typeface="Cambria" pitchFamily="34" charset="0"/>
-                <a:ea typeface="Cambria" pitchFamily="34" charset="-122"/>
-                <a:cs typeface="Cambria" pitchFamily="34" charset="-120"/>
+                  <a:srgbClr val="FFFFFF"/>
+                </a:solidFill>
+                <a:latin typeface="Telegraf" pitchFamily="34" charset="0"/>
+                <a:ea typeface="Telegraf" pitchFamily="34" charset="-122"/>
+                <a:cs typeface="Telegraf" pitchFamily="34" charset="-120"/>
               </a:rPr>
               <a:t>Lifecycle: someone else owns your calendar</a:t>
             </a:r>
@@ -7387,11 +7387,11 @@
             <a:r>
               <a:rPr lang="en-US" sz="2100" dirty="0">
                 <a:solidFill>
-                  <a:srgbClr val="12242E"/>
-                </a:solidFill>
-                <a:latin typeface="Calibri" pitchFamily="34" charset="0"/>
-                <a:ea typeface="Calibri" pitchFamily="34" charset="-122"/>
-                <a:cs typeface="Calibri" pitchFamily="34" charset="-120"/>
+                  <a:srgbClr val="FFFFFF"/>
+                </a:solidFill>
+                <a:latin typeface="Telegraf" pitchFamily="34" charset="0"/>
+                <a:ea typeface="Telegraf" pitchFamily="34" charset="-122"/>
+                <a:cs typeface="Telegraf" pitchFamily="34" charset="-120"/>
               </a:rPr>
               <a:t>A processor goes end-of-support. Nothing about your process changed. Nothing about your logic changed. But the logic can only run on that processor —</a:t>
             </a:r>
@@ -7429,11 +7429,11 @@
             <a:r>
               <a:rPr lang="en-US" sz="2100" b="1" dirty="0">
                 <a:solidFill>
-                  <a:srgbClr val="12242E"/>
-                </a:solidFill>
-                <a:latin typeface="Calibri" pitchFamily="34" charset="0"/>
-                <a:ea typeface="Calibri" pitchFamily="34" charset="-122"/>
-                <a:cs typeface="Calibri" pitchFamily="34" charset="-120"/>
+                  <a:srgbClr val="FFFFFF"/>
+                </a:solidFill>
+                <a:latin typeface="Telegraf" pitchFamily="34" charset="0"/>
+                <a:ea typeface="Telegraf" pitchFamily="34" charset="-122"/>
+                <a:cs typeface="Telegraf" pitchFamily="34" charset="-120"/>
               </a:rPr>
               <a:t>— so a component decision becomes a capital project, on a schedule you didn't set.</a:t>
             </a:r>
@@ -7450,7 +7450,7 @@
         <p:spPr>
           <a:xfrm>
             <a:off x="640080" y="4800600"/>
-            <a:ext cx="6400800" cy="1463040"/>
+            <a:ext cx="6400800" cy="1417320"/>
           </a:xfrm>
           <a:prstGeom prst="rect">
             <a:avLst/>
@@ -7464,56 +7464,56 @@
           <a:p>
             <a:pPr indent="0" marL="0">
               <a:lnSpc>
-                <a:spcPts val="2700"/>
+                <a:spcPts val="2200"/>
               </a:lnSpc>
               <a:buNone/>
             </a:pPr>
             <a:r>
-              <a:rPr lang="en-US" sz="2000" dirty="0">
-                <a:solidFill>
-                  <a:srgbClr val="12242E"/>
-                </a:solidFill>
-                <a:latin typeface="Calibri" pitchFamily="34" charset="0"/>
-                <a:ea typeface="Calibri" pitchFamily="34" charset="-122"/>
-                <a:cs typeface="Calibri" pitchFamily="34" charset="-120"/>
+              <a:rPr lang="en-US" sz="1700" dirty="0">
+                <a:solidFill>
+                  <a:srgbClr val="FFFFFF"/>
+                </a:solidFill>
+                <a:latin typeface="Telegraf" pitchFamily="34" charset="0"/>
+                <a:ea typeface="Telegraf" pitchFamily="34" charset="-122"/>
+                <a:cs typeface="Telegraf" pitchFamily="34" charset="-120"/>
               </a:rPr>
               <a:t>And the second cost is worse: </a:t>
             </a:r>
             <a:pPr indent="0" marL="0">
               <a:lnSpc>
-                <a:spcPts val="2700"/>
+                <a:spcPts val="2200"/>
               </a:lnSpc>
               <a:buNone/>
             </a:pPr>
             <a:r>
-              <a:rPr lang="en-US" sz="2000" b="1" dirty="0">
-                <a:solidFill>
-                  <a:srgbClr val="E8A33D"/>
-                </a:solidFill>
-                <a:latin typeface="Calibri" pitchFamily="34" charset="0"/>
-                <a:ea typeface="Calibri" pitchFamily="34" charset="-122"/>
-                <a:cs typeface="Calibri" pitchFamily="34" charset="-120"/>
+              <a:rPr lang="en-US" sz="1700" b="1" dirty="0">
+                <a:solidFill>
+                  <a:srgbClr val="3DCD58"/>
+                </a:solidFill>
+                <a:latin typeface="Telegraf" pitchFamily="34" charset="0"/>
+                <a:ea typeface="Telegraf" pitchFamily="34" charset="-122"/>
+                <a:cs typeface="Telegraf" pitchFamily="34" charset="-120"/>
               </a:rPr>
               <a:t>every migration re-engineers logic that was already correct.</a:t>
             </a:r>
             <a:pPr indent="0" marL="0">
               <a:lnSpc>
-                <a:spcPts val="2700"/>
+                <a:spcPts val="2200"/>
               </a:lnSpc>
               <a:buNone/>
             </a:pPr>
             <a:r>
-              <a:rPr lang="en-US" sz="2000" dirty="0">
-                <a:solidFill>
-                  <a:srgbClr val="12242E"/>
-                </a:solidFill>
-                <a:latin typeface="Calibri" pitchFamily="34" charset="0"/>
-                <a:ea typeface="Calibri" pitchFamily="34" charset="-122"/>
-                <a:cs typeface="Calibri" pitchFamily="34" charset="-120"/>
+              <a:rPr lang="en-US" sz="1700" dirty="0">
+                <a:solidFill>
+                  <a:srgbClr val="FFFFFF"/>
+                </a:solidFill>
+                <a:latin typeface="Telegraf" pitchFamily="34" charset="0"/>
+                <a:ea typeface="Telegraf" pitchFamily="34" charset="-122"/>
+                <a:cs typeface="Telegraf" pitchFamily="34" charset="-120"/>
               </a:rPr>
               <a:t> You pay twice for the same thinking, and you re-introduce risk into a plant that was running fine.</a:t>
             </a:r>
-            <a:endParaRPr lang="en-US" sz="2000" dirty="0"/>
+            <a:endParaRPr lang="en-US" sz="1700" dirty="0"/>
           </a:p>
         </p:txBody>
       </p:sp>
@@ -7534,11 +7534,11 @@
             </a:avLst>
           </a:prstGeom>
           <a:solidFill>
-            <a:srgbClr val="EDF3F6"/>
+            <a:srgbClr val="161616"/>
           </a:solidFill>
           <a:ln w="12700">
             <a:solidFill>
-              <a:srgbClr val="EDF3F6"/>
+              <a:srgbClr val="161616"/>
             </a:solidFill>
             <a:prstDash val="solid"/>
           </a:ln>
@@ -7574,11 +7574,11 @@
             <a:r>
               <a:rPr lang="en-US" sz="1700" dirty="0">
                 <a:solidFill>
-                  <a:srgbClr val="5B7386"/>
-                </a:solidFill>
-                <a:latin typeface="Calibri" pitchFamily="34" charset="0"/>
-                <a:ea typeface="Calibri" pitchFamily="34" charset="-122"/>
-                <a:cs typeface="Calibri" pitchFamily="34" charset="-120"/>
+                  <a:srgbClr val="9AA3AA"/>
+                </a:solidFill>
+                <a:latin typeface="Telegraf" pitchFamily="34" charset="0"/>
+                <a:ea typeface="Telegraf" pitchFamily="34" charset="-122"/>
+                <a:cs typeface="Telegraf" pitchFamily="34" charset="-120"/>
               </a:rPr>
               <a:t>Typical water/wastewater</a:t>
             </a:r>
@@ -7594,11 +7594,11 @@
             <a:r>
               <a:rPr lang="en-US" sz="1700" dirty="0">
                 <a:solidFill>
-                  <a:srgbClr val="5B7386"/>
-                </a:solidFill>
-                <a:latin typeface="Calibri" pitchFamily="34" charset="0"/>
-                <a:ea typeface="Calibri" pitchFamily="34" charset="-122"/>
-                <a:cs typeface="Calibri" pitchFamily="34" charset="-120"/>
+                  <a:srgbClr val="9AA3AA"/>
+                </a:solidFill>
+                <a:latin typeface="Telegraf" pitchFamily="34" charset="0"/>
+                <a:ea typeface="Telegraf" pitchFamily="34" charset="-122"/>
+                <a:cs typeface="Telegraf" pitchFamily="34" charset="-120"/>
               </a:rPr>
               <a:t>control system in service</a:t>
             </a:r>
@@ -7633,11 +7633,11 @@
             <a:r>
               <a:rPr lang="en-US" sz="6600" b="1" dirty="0">
                 <a:solidFill>
-                  <a:srgbClr val="1C7293"/>
-                </a:solidFill>
-                <a:latin typeface="Cambria" pitchFamily="34" charset="0"/>
-                <a:ea typeface="Cambria" pitchFamily="34" charset="-122"/>
-                <a:cs typeface="Cambria" pitchFamily="34" charset="-120"/>
+                  <a:srgbClr val="00A19C"/>
+                </a:solidFill>
+                <a:latin typeface="Telegraf" pitchFamily="34" charset="0"/>
+                <a:ea typeface="Telegraf" pitchFamily="34" charset="-122"/>
+                <a:cs typeface="Telegraf" pitchFamily="34" charset="-120"/>
               </a:rPr>
               <a:t>25–35</a:t>
             </a:r>
@@ -7672,11 +7672,11 @@
             <a:r>
               <a:rPr lang="en-US" sz="2200" dirty="0">
                 <a:solidFill>
-                  <a:srgbClr val="1C7293"/>
-                </a:solidFill>
-                <a:latin typeface="Calibri" pitchFamily="34" charset="0"/>
-                <a:ea typeface="Calibri" pitchFamily="34" charset="-122"/>
-                <a:cs typeface="Calibri" pitchFamily="34" charset="-120"/>
+                  <a:srgbClr val="00A19C"/>
+                </a:solidFill>
+                <a:latin typeface="Telegraf" pitchFamily="34" charset="0"/>
+                <a:ea typeface="Telegraf" pitchFamily="34" charset="-122"/>
+                <a:cs typeface="Telegraf" pitchFamily="34" charset="-120"/>
               </a:rPr>
               <a:t>years</a:t>
             </a:r>
@@ -7714,11 +7714,11 @@
             <a:r>
               <a:rPr lang="en-US" sz="1600" i="1" dirty="0">
                 <a:solidFill>
-                  <a:srgbClr val="12242E"/>
-                </a:solidFill>
-                <a:latin typeface="Calibri" pitchFamily="34" charset="0"/>
-                <a:ea typeface="Calibri" pitchFamily="34" charset="-122"/>
-                <a:cs typeface="Calibri" pitchFamily="34" charset="-120"/>
+                  <a:srgbClr val="FFFFFF"/>
+                </a:solidFill>
+                <a:latin typeface="Telegraf" pitchFamily="34" charset="0"/>
+                <a:ea typeface="Telegraf" pitchFamily="34" charset="-122"/>
+                <a:cs typeface="Telegraf" pitchFamily="34" charset="-120"/>
               </a:rPr>
               <a:t>Hardware generations that logic has now outlived: three or four.</a:t>
             </a:r>
@@ -7753,11 +7753,11 @@
             <a:r>
               <a:rPr lang="en-US" sz="1100" dirty="0">
                 <a:solidFill>
-                  <a:srgbClr val="5B7386"/>
-                </a:solidFill>
-                <a:latin typeface="Calibri" pitchFamily="34" charset="0"/>
-                <a:ea typeface="Calibri" pitchFamily="34" charset="-122"/>
-                <a:cs typeface="Calibri" pitchFamily="34" charset="-120"/>
+                  <a:srgbClr val="9AA3AA"/>
+                </a:solidFill>
+                <a:latin typeface="Telegraf" pitchFamily="34" charset="0"/>
+                <a:ea typeface="Telegraf" pitchFamily="34" charset="-122"/>
+                <a:cs typeface="Telegraf" pitchFamily="34" charset="-120"/>
               </a:rPr>
               <a:t>Source: Frost &amp; Sullivan, Modernising Water and Wastewater Operations, 2025</a:t>
             </a:r>
@@ -7792,11 +7792,11 @@
             <a:r>
               <a:rPr lang="en-US" sz="1100" dirty="0">
                 <a:solidFill>
-                  <a:srgbClr val="AEC1CC"/>
-                </a:solidFill>
-                <a:latin typeface="Calibri" pitchFamily="34" charset="0"/>
-                <a:ea typeface="Calibri" pitchFamily="34" charset="-122"/>
-                <a:cs typeface="Calibri" pitchFamily="34" charset="-120"/>
+                  <a:srgbClr val="3A3A3A"/>
+                </a:solidFill>
+                <a:latin typeface="Telegraf" pitchFamily="34" charset="0"/>
+                <a:ea typeface="Telegraf" pitchFamily="34" charset="-122"/>
+                <a:cs typeface="Telegraf" pitchFamily="34" charset="-120"/>
               </a:rPr>
               <a:t>15</a:t>
             </a:r>
@@ -7853,11 +7853,11 @@
             </a:avLst>
           </a:prstGeom>
           <a:solidFill>
-            <a:srgbClr val="1C7293"/>
+            <a:srgbClr val="00A19C"/>
           </a:solidFill>
           <a:ln w="12700">
             <a:solidFill>
-              <a:srgbClr val="1C7293"/>
+              <a:srgbClr val="00A19C"/>
             </a:solidFill>
             <a:prstDash val="solid"/>
           </a:ln>
@@ -7892,9 +7892,9 @@
                 <a:solidFill>
                   <a:srgbClr val="FFFFFF"/>
                 </a:solidFill>
-                <a:latin typeface="Calibri" pitchFamily="34" charset="0"/>
-                <a:ea typeface="Calibri" pitchFamily="34" charset="-122"/>
-                <a:cs typeface="Calibri" pitchFamily="34" charset="-120"/>
+                <a:latin typeface="Telegraf" pitchFamily="34" charset="0"/>
+                <a:ea typeface="Telegraf" pitchFamily="34" charset="-122"/>
+                <a:cs typeface="Telegraf" pitchFamily="34" charset="-120"/>
               </a:rPr>
               <a:t>BILL TWO</a:t>
             </a:r>
@@ -7929,11 +7929,11 @@
             <a:r>
               <a:rPr lang="en-US" sz="3400" b="1" dirty="0">
                 <a:solidFill>
-                  <a:srgbClr val="12242E"/>
-                </a:solidFill>
-                <a:latin typeface="Cambria" pitchFamily="34" charset="0"/>
-                <a:ea typeface="Cambria" pitchFamily="34" charset="-122"/>
-                <a:cs typeface="Cambria" pitchFamily="34" charset="-120"/>
+                  <a:srgbClr val="FFFFFF"/>
+                </a:solidFill>
+                <a:latin typeface="Telegraf" pitchFamily="34" charset="0"/>
+                <a:ea typeface="Telegraf" pitchFamily="34" charset="-122"/>
+                <a:cs typeface="Telegraf" pitchFamily="34" charset="-120"/>
               </a:rPr>
               <a:t>Cybersecurity: built before the threat existed</a:t>
             </a:r>
@@ -7971,11 +7971,11 @@
             <a:r>
               <a:rPr lang="en-US" sz="2200" dirty="0">
                 <a:solidFill>
-                  <a:srgbClr val="12242E"/>
-                </a:solidFill>
-                <a:latin typeface="Calibri" pitchFamily="34" charset="0"/>
-                <a:ea typeface="Calibri" pitchFamily="34" charset="-122"/>
-                <a:cs typeface="Calibri" pitchFamily="34" charset="-120"/>
+                  <a:srgbClr val="FFFFFF"/>
+                </a:solidFill>
+                <a:latin typeface="Telegraf" pitchFamily="34" charset="0"/>
+                <a:ea typeface="Telegraf" pitchFamily="34" charset="-122"/>
+                <a:cs typeface="Telegraf" pitchFamily="34" charset="-120"/>
               </a:rPr>
               <a:t>These systems were designed for a world where the threat was a lightning strike, not a nation-state. Now water is a named target.</a:t>
             </a:r>
@@ -8000,11 +8000,11 @@
             </a:avLst>
           </a:prstGeom>
           <a:solidFill>
-            <a:srgbClr val="EDF3F6"/>
+            <a:srgbClr val="161616"/>
           </a:solidFill>
           <a:ln w="12700">
             <a:solidFill>
-              <a:srgbClr val="EDF3F6"/>
+              <a:srgbClr val="161616"/>
             </a:solidFill>
             <a:prstDash val="solid"/>
           </a:ln>
@@ -8037,11 +8037,11 @@
             <a:r>
               <a:rPr lang="en-US" sz="2200" b="1" dirty="0">
                 <a:solidFill>
-                  <a:srgbClr val="1C7293"/>
-                </a:solidFill>
-                <a:latin typeface="Cambria" pitchFamily="34" charset="0"/>
-                <a:ea typeface="Cambria" pitchFamily="34" charset="-122"/>
-                <a:cs typeface="Cambria" pitchFamily="34" charset="-120"/>
+                  <a:srgbClr val="00A19C"/>
+                </a:solidFill>
+                <a:latin typeface="Telegraf" pitchFamily="34" charset="0"/>
+                <a:ea typeface="Telegraf" pitchFamily="34" charset="-122"/>
+                <a:cs typeface="Telegraf" pitchFamily="34" charset="-120"/>
               </a:rPr>
               <a:t>Aliquippa, PA — Nov 2023</a:t>
             </a:r>
@@ -8079,11 +8079,11 @@
             <a:r>
               <a:rPr lang="en-US" sz="1800" dirty="0">
                 <a:solidFill>
-                  <a:srgbClr val="12242E"/>
-                </a:solidFill>
-                <a:latin typeface="Calibri" pitchFamily="34" charset="0"/>
-                <a:ea typeface="Calibri" pitchFamily="34" charset="-122"/>
-                <a:cs typeface="Calibri" pitchFamily="34" charset="-120"/>
+                  <a:srgbClr val="FFFFFF"/>
+                </a:solidFill>
+                <a:latin typeface="Telegraf" pitchFamily="34" charset="0"/>
+                <a:ea typeface="Telegraf" pitchFamily="34" charset="-122"/>
+                <a:cs typeface="Telegraf" pitchFamily="34" charset="-120"/>
               </a:rPr>
               <a:t>A booster station PLC reached over the internet with a default password. Crews caught it on alarm and went to manual. That was the whole defense.</a:t>
             </a:r>
@@ -8108,11 +8108,11 @@
             </a:avLst>
           </a:prstGeom>
           <a:solidFill>
-            <a:srgbClr val="EDF3F6"/>
+            <a:srgbClr val="161616"/>
           </a:solidFill>
           <a:ln w="12700">
             <a:solidFill>
-              <a:srgbClr val="EDF3F6"/>
+              <a:srgbClr val="161616"/>
             </a:solidFill>
             <a:prstDash val="solid"/>
           </a:ln>
@@ -8145,11 +8145,11 @@
             <a:r>
               <a:rPr lang="en-US" sz="4600" b="1" dirty="0">
                 <a:solidFill>
-                  <a:srgbClr val="E8A33D"/>
-                </a:solidFill>
-                <a:latin typeface="Cambria" pitchFamily="34" charset="0"/>
-                <a:ea typeface="Cambria" pitchFamily="34" charset="-122"/>
-                <a:cs typeface="Cambria" pitchFamily="34" charset="-120"/>
+                  <a:srgbClr val="3DCD58"/>
+                </a:solidFill>
+                <a:latin typeface="Telegraf" pitchFamily="34" charset="0"/>
+                <a:ea typeface="Telegraf" pitchFamily="34" charset="-122"/>
+                <a:cs typeface="Telegraf" pitchFamily="34" charset="-120"/>
               </a:rPr>
               <a:t>70%+</a:t>
             </a:r>
@@ -8187,11 +8187,11 @@
             <a:r>
               <a:rPr lang="en-US" sz="1700" dirty="0">
                 <a:solidFill>
-                  <a:srgbClr val="12242E"/>
-                </a:solidFill>
-                <a:latin typeface="Calibri" pitchFamily="34" charset="0"/>
-                <a:ea typeface="Calibri" pitchFamily="34" charset="-122"/>
-                <a:cs typeface="Calibri" pitchFamily="34" charset="-120"/>
+                  <a:srgbClr val="FFFFFF"/>
+                </a:solidFill>
+                <a:latin typeface="Telegraf" pitchFamily="34" charset="0"/>
+                <a:ea typeface="Telegraf" pitchFamily="34" charset="-122"/>
+                <a:cs typeface="Telegraf" pitchFamily="34" charset="-120"/>
               </a:rPr>
               <a:t>of drinking-water systems EPA inspected were out of compliance with Safe Drinking Water Act §1433 cybersecurity requirements.</a:t>
             </a:r>
@@ -8229,11 +8229,11 @@
             <a:r>
               <a:rPr lang="en-US" sz="2000" b="1" dirty="0">
                 <a:solidFill>
-                  <a:srgbClr val="12242E"/>
-                </a:solidFill>
-                <a:latin typeface="Calibri" pitchFamily="34" charset="0"/>
-                <a:ea typeface="Calibri" pitchFamily="34" charset="-122"/>
-                <a:cs typeface="Calibri" pitchFamily="34" charset="-120"/>
+                  <a:srgbClr val="FFFFFF"/>
+                </a:solidFill>
+                <a:latin typeface="Telegraf" pitchFamily="34" charset="0"/>
+                <a:ea typeface="Telegraf" pitchFamily="34" charset="-122"/>
+                <a:cs typeface="Telegraf" pitchFamily="34" charset="-120"/>
               </a:rPr>
               <a:t>The architectural problem: you can't patch what you can't take offline — and you can't take it offline when there's no way to test the change first.</a:t>
             </a:r>
@@ -8268,11 +8268,11 @@
             <a:r>
               <a:rPr lang="en-US" sz="1100" dirty="0">
                 <a:solidFill>
-                  <a:srgbClr val="5B7386"/>
-                </a:solidFill>
-                <a:latin typeface="Calibri" pitchFamily="34" charset="0"/>
-                <a:ea typeface="Calibri" pitchFamily="34" charset="-122"/>
-                <a:cs typeface="Calibri" pitchFamily="34" charset="-120"/>
+                  <a:srgbClr val="9AA3AA"/>
+                </a:solidFill>
+                <a:latin typeface="Telegraf" pitchFamily="34" charset="0"/>
+                <a:ea typeface="Telegraf" pitchFamily="34" charset="-122"/>
+                <a:cs typeface="Telegraf" pitchFamily="34" charset="-120"/>
               </a:rPr>
               <a:t>Sources: EPA Enforcement Alert, May 2024; Municipal Water Authority of Aliquippa incident, Nov 2023 (CISA / WaterISAC)</a:t>
             </a:r>
@@ -8307,11 +8307,11 @@
             <a:r>
               <a:rPr lang="en-US" sz="1100" dirty="0">
                 <a:solidFill>
-                  <a:srgbClr val="AEC1CC"/>
-                </a:solidFill>
-                <a:latin typeface="Calibri" pitchFamily="34" charset="0"/>
-                <a:ea typeface="Calibri" pitchFamily="34" charset="-122"/>
-                <a:cs typeface="Calibri" pitchFamily="34" charset="-120"/>
+                  <a:srgbClr val="3A3A3A"/>
+                </a:solidFill>
+                <a:latin typeface="Telegraf" pitchFamily="34" charset="0"/>
+                <a:ea typeface="Telegraf" pitchFamily="34" charset="-122"/>
+                <a:cs typeface="Telegraf" pitchFamily="34" charset="-120"/>
               </a:rPr>
               <a:t>16</a:t>
             </a:r>
@@ -8368,11 +8368,11 @@
             </a:avLst>
           </a:prstGeom>
           <a:solidFill>
-            <a:srgbClr val="1C7293"/>
+            <a:srgbClr val="00A19C"/>
           </a:solidFill>
           <a:ln w="12700">
             <a:solidFill>
-              <a:srgbClr val="1C7293"/>
+              <a:srgbClr val="00A19C"/>
             </a:solidFill>
             <a:prstDash val="solid"/>
           </a:ln>
@@ -8407,9 +8407,9 @@
                 <a:solidFill>
                   <a:srgbClr val="FFFFFF"/>
                 </a:solidFill>
-                <a:latin typeface="Calibri" pitchFamily="34" charset="0"/>
-                <a:ea typeface="Calibri" pitchFamily="34" charset="-122"/>
-                <a:cs typeface="Calibri" pitchFamily="34" charset="-120"/>
+                <a:latin typeface="Telegraf" pitchFamily="34" charset="0"/>
+                <a:ea typeface="Telegraf" pitchFamily="34" charset="-122"/>
+                <a:cs typeface="Telegraf" pitchFamily="34" charset="-120"/>
               </a:rPr>
               <a:t>BILL THREE</a:t>
             </a:r>
@@ -8444,11 +8444,11 @@
             <a:r>
               <a:rPr lang="en-US" sz="3800" b="1" dirty="0">
                 <a:solidFill>
-                  <a:srgbClr val="12242E"/>
-                </a:solidFill>
-                <a:latin typeface="Cambria" pitchFamily="34" charset="0"/>
-                <a:ea typeface="Cambria" pitchFamily="34" charset="-122"/>
-                <a:cs typeface="Cambria" pitchFamily="34" charset="-120"/>
+                  <a:srgbClr val="FFFFFF"/>
+                </a:solidFill>
+                <a:latin typeface="Telegraf" pitchFamily="34" charset="0"/>
+                <a:ea typeface="Telegraf" pitchFamily="34" charset="-122"/>
+                <a:cs typeface="Telegraf" pitchFamily="34" charset="-120"/>
               </a:rPr>
               <a:t>Data &amp; AI: it's not missing, it's stranded</a:t>
             </a:r>
@@ -8486,11 +8486,11 @@
             <a:r>
               <a:rPr lang="en-US" sz="2100" dirty="0">
                 <a:solidFill>
-                  <a:srgbClr val="12242E"/>
-                </a:solidFill>
-                <a:latin typeface="Calibri" pitchFamily="34" charset="0"/>
-                <a:ea typeface="Calibri" pitchFamily="34" charset="-122"/>
-                <a:cs typeface="Calibri" pitchFamily="34" charset="-120"/>
+                  <a:srgbClr val="FFFFFF"/>
+                </a:solidFill>
+                <a:latin typeface="Telegraf" pitchFamily="34" charset="0"/>
+                <a:ea typeface="Telegraf" pitchFamily="34" charset="-122"/>
+                <a:cs typeface="Telegraf" pitchFamily="34" charset="-120"/>
               </a:rPr>
               <a:t>Every conversation about AI in water skips the boring part. Predictive maintenance, anomaly detection, optimization — none of it is a modeling problem first. It's an access problem.</a:t>
             </a:r>
@@ -8528,11 +8528,11 @@
             <a:r>
               <a:rPr lang="en-US" sz="2100" dirty="0">
                 <a:solidFill>
-                  <a:srgbClr val="12242E"/>
-                </a:solidFill>
-                <a:latin typeface="Calibri" pitchFamily="34" charset="0"/>
-                <a:ea typeface="Calibri" pitchFamily="34" charset="-122"/>
-                <a:cs typeface="Calibri" pitchFamily="34" charset="-120"/>
+                  <a:srgbClr val="FFFFFF"/>
+                </a:solidFill>
+                <a:latin typeface="Telegraf" pitchFamily="34" charset="0"/>
+                <a:ea typeface="Telegraf" pitchFamily="34" charset="-122"/>
+                <a:cs typeface="Telegraf" pitchFamily="34" charset="-120"/>
               </a:rPr>
               <a:t>Your plant already generates the data. It's sitting inside a controller, in a proprietary format, behind a protocol designed in 1985 to talk to exactly one screen.</a:t>
             </a:r>
@@ -8548,8 +8548,8 @@
         </p:nvSpPr>
         <p:spPr>
           <a:xfrm>
-            <a:off x="640080" y="5486400"/>
-            <a:ext cx="6309360" cy="914400"/>
+            <a:off x="640080" y="5440680"/>
+            <a:ext cx="6309360" cy="1051560"/>
           </a:xfrm>
           <a:prstGeom prst="rect">
             <a:avLst/>
@@ -8570,11 +8570,11 @@
             <a:r>
               <a:rPr lang="en-US" sz="2000" b="1" i="1" dirty="0">
                 <a:solidFill>
-                  <a:srgbClr val="E8A33D"/>
-                </a:solidFill>
-                <a:latin typeface="Calibri" pitchFamily="34" charset="0"/>
-                <a:ea typeface="Calibri" pitchFamily="34" charset="-122"/>
-                <a:cs typeface="Calibri" pitchFamily="34" charset="-120"/>
+                  <a:srgbClr val="3DCD58"/>
+                </a:solidFill>
+                <a:latin typeface="Telegraf" pitchFamily="34" charset="0"/>
+                <a:ea typeface="Telegraf" pitchFamily="34" charset="-122"/>
+                <a:cs typeface="Telegraf" pitchFamily="34" charset="-120"/>
               </a:rPr>
               <a:t>There is no AI strategy that survives contact with a system that can't hand over its own data.</a:t>
             </a:r>
@@ -8599,11 +8599,11 @@
             </a:avLst>
           </a:prstGeom>
           <a:solidFill>
-            <a:srgbClr val="EDF3F6"/>
+            <a:srgbClr val="161616"/>
           </a:solidFill>
           <a:ln w="12700">
             <a:solidFill>
-              <a:srgbClr val="EDF3F6"/>
+              <a:srgbClr val="161616"/>
             </a:solidFill>
             <a:prstDash val="solid"/>
           </a:ln>
@@ -8639,11 +8639,11 @@
             <a:r>
               <a:rPr lang="en-US" sz="1700" dirty="0">
                 <a:solidFill>
-                  <a:srgbClr val="5B7386"/>
-                </a:solidFill>
-                <a:latin typeface="Calibri" pitchFamily="34" charset="0"/>
-                <a:ea typeface="Calibri" pitchFamily="34" charset="-122"/>
-                <a:cs typeface="Calibri" pitchFamily="34" charset="-120"/>
+                  <a:srgbClr val="9AA3AA"/>
+                </a:solidFill>
+                <a:latin typeface="Telegraf" pitchFamily="34" charset="0"/>
+                <a:ea typeface="Telegraf" pitchFamily="34" charset="-122"/>
+                <a:cs typeface="Telegraf" pitchFamily="34" charset="-120"/>
               </a:rPr>
               <a:t>What that looked like in</a:t>
             </a:r>
@@ -8659,11 +8659,11 @@
             <a:r>
               <a:rPr lang="en-US" sz="1700" dirty="0">
                 <a:solidFill>
-                  <a:srgbClr val="5B7386"/>
-                </a:solidFill>
-                <a:latin typeface="Calibri" pitchFamily="34" charset="0"/>
-                <a:ea typeface="Calibri" pitchFamily="34" charset="-122"/>
-                <a:cs typeface="Calibri" pitchFamily="34" charset="-120"/>
+                  <a:srgbClr val="9AA3AA"/>
+                </a:solidFill>
+                <a:latin typeface="Telegraf" pitchFamily="34" charset="0"/>
+                <a:ea typeface="Telegraf" pitchFamily="34" charset="-122"/>
+                <a:cs typeface="Telegraf" pitchFamily="34" charset="-120"/>
               </a:rPr>
               <a:t>Conroe, Texas — before</a:t>
             </a:r>
@@ -8698,11 +8698,11 @@
             <a:r>
               <a:rPr lang="en-US" sz="5200" b="1" dirty="0">
                 <a:solidFill>
-                  <a:srgbClr val="1C7293"/>
-                </a:solidFill>
-                <a:latin typeface="Cambria" pitchFamily="34" charset="0"/>
-                <a:ea typeface="Cambria" pitchFamily="34" charset="-122"/>
-                <a:cs typeface="Cambria" pitchFamily="34" charset="-120"/>
+                  <a:srgbClr val="00A19C"/>
+                </a:solidFill>
+                <a:latin typeface="Telegraf" pitchFamily="34" charset="0"/>
+                <a:ea typeface="Telegraf" pitchFamily="34" charset="-122"/>
+                <a:cs typeface="Telegraf" pitchFamily="34" charset="-120"/>
               </a:rPr>
               <a:t>5 hours</a:t>
             </a:r>
@@ -8737,11 +8737,11 @@
             <a:r>
               <a:rPr lang="en-US" sz="2200" dirty="0">
                 <a:solidFill>
-                  <a:srgbClr val="1C7293"/>
-                </a:solidFill>
-                <a:latin typeface="Calibri" pitchFamily="34" charset="0"/>
-                <a:ea typeface="Calibri" pitchFamily="34" charset="-122"/>
-                <a:cs typeface="Calibri" pitchFamily="34" charset="-120"/>
+                  <a:srgbClr val="00A19C"/>
+                </a:solidFill>
+                <a:latin typeface="Telegraf" pitchFamily="34" charset="0"/>
+                <a:ea typeface="Telegraf" pitchFamily="34" charset="-122"/>
+                <a:cs typeface="Telegraf" pitchFamily="34" charset="-120"/>
               </a:rPr>
               <a:t>every day</a:t>
             </a:r>
@@ -8779,11 +8779,11 @@
             <a:r>
               <a:rPr lang="en-US" sz="1700" dirty="0">
                 <a:solidFill>
-                  <a:srgbClr val="12242E"/>
-                </a:solidFill>
-                <a:latin typeface="Calibri" pitchFamily="34" charset="0"/>
-                <a:ea typeface="Calibri" pitchFamily="34" charset="-122"/>
-                <a:cs typeface="Calibri" pitchFamily="34" charset="-120"/>
+                  <a:srgbClr val="FFFFFF"/>
+                </a:solidFill>
+                <a:latin typeface="Telegraf" pitchFamily="34" charset="0"/>
+                <a:ea typeface="Telegraf" pitchFamily="34" charset="-122"/>
+                <a:cs typeface="Telegraf" pitchFamily="34" charset="-120"/>
               </a:rPr>
               <a:t>of staff time spent collecting, by hand, data the plant had already produced.</a:t>
             </a:r>
@@ -8818,11 +8818,11 @@
             <a:r>
               <a:rPr lang="en-US" sz="1100" dirty="0">
                 <a:solidFill>
-                  <a:srgbClr val="AEC1CC"/>
-                </a:solidFill>
-                <a:latin typeface="Calibri" pitchFamily="34" charset="0"/>
-                <a:ea typeface="Calibri" pitchFamily="34" charset="-122"/>
-                <a:cs typeface="Calibri" pitchFamily="34" charset="-120"/>
+                  <a:srgbClr val="3A3A3A"/>
+                </a:solidFill>
+                <a:latin typeface="Telegraf" pitchFamily="34" charset="0"/>
+                <a:ea typeface="Telegraf" pitchFamily="34" charset="-122"/>
+                <a:cs typeface="Telegraf" pitchFamily="34" charset="-120"/>
               </a:rPr>
               <a:t>17</a:t>
             </a:r>
@@ -8879,11 +8879,11 @@
             </a:avLst>
           </a:prstGeom>
           <a:solidFill>
-            <a:srgbClr val="1C7293"/>
+            <a:srgbClr val="00A19C"/>
           </a:solidFill>
           <a:ln w="12700">
             <a:solidFill>
-              <a:srgbClr val="1C7293"/>
+              <a:srgbClr val="00A19C"/>
             </a:solidFill>
             <a:prstDash val="solid"/>
           </a:ln>
@@ -8918,9 +8918,9 @@
                 <a:solidFill>
                   <a:srgbClr val="FFFFFF"/>
                 </a:solidFill>
-                <a:latin typeface="Calibri" pitchFamily="34" charset="0"/>
-                <a:ea typeface="Calibri" pitchFamily="34" charset="-122"/>
-                <a:cs typeface="Calibri" pitchFamily="34" charset="-120"/>
+                <a:latin typeface="Telegraf" pitchFamily="34" charset="0"/>
+                <a:ea typeface="Telegraf" pitchFamily="34" charset="-122"/>
+                <a:cs typeface="Telegraf" pitchFamily="34" charset="-120"/>
               </a:rPr>
               <a:t>BILL FOUR</a:t>
             </a:r>
@@ -8955,11 +8955,11 @@
             <a:r>
               <a:rPr lang="en-US" sz="3800" b="1" dirty="0">
                 <a:solidFill>
-                  <a:srgbClr val="12242E"/>
-                </a:solidFill>
-                <a:latin typeface="Cambria" pitchFamily="34" charset="0"/>
-                <a:ea typeface="Cambria" pitchFamily="34" charset="-122"/>
-                <a:cs typeface="Cambria" pitchFamily="34" charset="-120"/>
+                  <a:srgbClr val="FFFFFF"/>
+                </a:solidFill>
+                <a:latin typeface="Telegraf" pitchFamily="34" charset="0"/>
+                <a:ea typeface="Telegraf" pitchFamily="34" charset="-122"/>
+                <a:cs typeface="Telegraf" pitchFamily="34" charset="-120"/>
               </a:rPr>
               <a:t>Workforce: the logic is in someone's head</a:t>
             </a:r>
@@ -8997,11 +8997,11 @@
             <a:r>
               <a:rPr lang="en-US" sz="2200" dirty="0">
                 <a:solidFill>
-                  <a:srgbClr val="12242E"/>
-                </a:solidFill>
-                <a:latin typeface="Calibri" pitchFamily="34" charset="0"/>
-                <a:ea typeface="Calibri" pitchFamily="34" charset="-122"/>
-                <a:cs typeface="Calibri" pitchFamily="34" charset="-120"/>
+                  <a:srgbClr val="FFFFFF"/>
+                </a:solidFill>
+                <a:latin typeface="Telegraf" pitchFamily="34" charset="0"/>
+                <a:ea typeface="Telegraf" pitchFamily="34" charset="-122"/>
+                <a:cs typeface="Telegraf" pitchFamily="34" charset="-120"/>
               </a:rPr>
               <a:t>The person who knows why that interlock is there didn't document it. They remember it. And they are retiring.</a:t>
             </a:r>
@@ -9036,11 +9036,11 @@
             <a:r>
               <a:rPr lang="en-US" sz="6000" b="1" dirty="0">
                 <a:solidFill>
-                  <a:srgbClr val="1C7293"/>
-                </a:solidFill>
-                <a:latin typeface="Cambria" pitchFamily="34" charset="0"/>
-                <a:ea typeface="Cambria" pitchFamily="34" charset="-122"/>
-                <a:cs typeface="Cambria" pitchFamily="34" charset="-120"/>
+                  <a:srgbClr val="00A19C"/>
+                </a:solidFill>
+                <a:latin typeface="Telegraf" pitchFamily="34" charset="0"/>
+                <a:ea typeface="Telegraf" pitchFamily="34" charset="-122"/>
+                <a:cs typeface="Telegraf" pitchFamily="34" charset="-120"/>
               </a:rPr>
               <a:t>21%</a:t>
             </a:r>
@@ -9075,11 +9075,11 @@
             <a:r>
               <a:rPr lang="en-US" sz="1700" dirty="0">
                 <a:solidFill>
-                  <a:srgbClr val="5B7386"/>
-                </a:solidFill>
-                <a:latin typeface="Calibri" pitchFamily="34" charset="0"/>
-                <a:ea typeface="Calibri" pitchFamily="34" charset="-122"/>
-                <a:cs typeface="Calibri" pitchFamily="34" charset="-120"/>
+                  <a:srgbClr val="9AA3AA"/>
+                </a:solidFill>
+                <a:latin typeface="Telegraf" pitchFamily="34" charset="0"/>
+                <a:ea typeface="Telegraf" pitchFamily="34" charset="-122"/>
+                <a:cs typeface="Telegraf" pitchFamily="34" charset="-120"/>
               </a:rPr>
               <a:t>of utility employees eligible to</a:t>
             </a:r>
@@ -9092,11 +9092,11 @@
             <a:r>
               <a:rPr lang="en-US" sz="1700" dirty="0">
                 <a:solidFill>
-                  <a:srgbClr val="5B7386"/>
-                </a:solidFill>
-                <a:latin typeface="Calibri" pitchFamily="34" charset="0"/>
-                <a:ea typeface="Calibri" pitchFamily="34" charset="-122"/>
-                <a:cs typeface="Calibri" pitchFamily="34" charset="-120"/>
+                  <a:srgbClr val="9AA3AA"/>
+                </a:solidFill>
+                <a:latin typeface="Telegraf" pitchFamily="34" charset="0"/>
+                <a:ea typeface="Telegraf" pitchFamily="34" charset="-122"/>
+                <a:cs typeface="Telegraf" pitchFamily="34" charset="-120"/>
               </a:rPr>
               <a:t>retire within five years</a:t>
             </a:r>
@@ -9131,11 +9131,11 @@
             <a:r>
               <a:rPr lang="en-US" sz="6000" b="1" dirty="0">
                 <a:solidFill>
-                  <a:srgbClr val="E8A33D"/>
-                </a:solidFill>
-                <a:latin typeface="Cambria" pitchFamily="34" charset="0"/>
-                <a:ea typeface="Cambria" pitchFamily="34" charset="-122"/>
-                <a:cs typeface="Cambria" pitchFamily="34" charset="-120"/>
+                  <a:srgbClr val="3DCD58"/>
+                </a:solidFill>
+                <a:latin typeface="Telegraf" pitchFamily="34" charset="0"/>
+                <a:ea typeface="Telegraf" pitchFamily="34" charset="-122"/>
+                <a:cs typeface="Telegraf" pitchFamily="34" charset="-120"/>
               </a:rPr>
               <a:t>9%</a:t>
             </a:r>
@@ -9170,11 +9170,11 @@
             <a:r>
               <a:rPr lang="en-US" sz="1700" dirty="0">
                 <a:solidFill>
-                  <a:srgbClr val="5B7386"/>
-                </a:solidFill>
-                <a:latin typeface="Calibri" pitchFamily="34" charset="0"/>
-                <a:ea typeface="Calibri" pitchFamily="34" charset="-122"/>
-                <a:cs typeface="Calibri" pitchFamily="34" charset="-120"/>
+                  <a:srgbClr val="9AA3AA"/>
+                </a:solidFill>
+                <a:latin typeface="Telegraf" pitchFamily="34" charset="0"/>
+                <a:ea typeface="Telegraf" pitchFamily="34" charset="-122"/>
+                <a:cs typeface="Telegraf" pitchFamily="34" charset="-120"/>
               </a:rPr>
               <a:t>average vacancy rate — before</a:t>
             </a:r>
@@ -9187,11 +9187,11 @@
             <a:r>
               <a:rPr lang="en-US" sz="1700" dirty="0">
                 <a:solidFill>
-                  <a:srgbClr val="5B7386"/>
-                </a:solidFill>
-                <a:latin typeface="Calibri" pitchFamily="34" charset="0"/>
-                <a:ea typeface="Calibri" pitchFamily="34" charset="-122"/>
-                <a:cs typeface="Calibri" pitchFamily="34" charset="-120"/>
+                  <a:srgbClr val="9AA3AA"/>
+                </a:solidFill>
+                <a:latin typeface="Telegraf" pitchFamily="34" charset="0"/>
+                <a:ea typeface="Telegraf" pitchFamily="34" charset="-122"/>
+                <a:cs typeface="Telegraf" pitchFamily="34" charset="-120"/>
               </a:rPr>
               <a:t>those retirements land</a:t>
             </a:r>
@@ -9226,11 +9226,11 @@
             <a:r>
               <a:rPr lang="en-US" sz="6000" b="1" dirty="0">
                 <a:solidFill>
-                  <a:srgbClr val="1C7293"/>
-                </a:solidFill>
-                <a:latin typeface="Cambria" pitchFamily="34" charset="0"/>
-                <a:ea typeface="Cambria" pitchFamily="34" charset="-122"/>
-                <a:cs typeface="Cambria" pitchFamily="34" charset="-120"/>
+                  <a:srgbClr val="00A19C"/>
+                </a:solidFill>
+                <a:latin typeface="Telegraf" pitchFamily="34" charset="0"/>
+                <a:ea typeface="Telegraf" pitchFamily="34" charset="-122"/>
+                <a:cs typeface="Telegraf" pitchFamily="34" charset="-120"/>
               </a:rPr>
               <a:t>~10k</a:t>
             </a:r>
@@ -9265,11 +9265,11 @@
             <a:r>
               <a:rPr lang="en-US" sz="1700" dirty="0">
                 <a:solidFill>
-                  <a:srgbClr val="5B7386"/>
-                </a:solidFill>
-                <a:latin typeface="Calibri" pitchFamily="34" charset="0"/>
-                <a:ea typeface="Calibri" pitchFamily="34" charset="-122"/>
-                <a:cs typeface="Calibri" pitchFamily="34" charset="-120"/>
+                  <a:srgbClr val="9AA3AA"/>
+                </a:solidFill>
+                <a:latin typeface="Telegraf" pitchFamily="34" charset="0"/>
+                <a:ea typeface="Telegraf" pitchFamily="34" charset="-122"/>
+                <a:cs typeface="Telegraf" pitchFamily="34" charset="-120"/>
               </a:rPr>
               <a:t>operator openings per year</a:t>
             </a:r>
@@ -9282,11 +9282,11 @@
             <a:r>
               <a:rPr lang="en-US" sz="1700" dirty="0">
                 <a:solidFill>
-                  <a:srgbClr val="5B7386"/>
-                </a:solidFill>
-                <a:latin typeface="Calibri" pitchFamily="34" charset="0"/>
-                <a:ea typeface="Calibri" pitchFamily="34" charset="-122"/>
-                <a:cs typeface="Calibri" pitchFamily="34" charset="-120"/>
+                  <a:srgbClr val="9AA3AA"/>
+                </a:solidFill>
+                <a:latin typeface="Telegraf" pitchFamily="34" charset="0"/>
+                <a:ea typeface="Telegraf" pitchFamily="34" charset="-122"/>
+                <a:cs typeface="Telegraf" pitchFamily="34" charset="-120"/>
               </a:rPr>
               <a:t>through 2034, nationally</a:t>
             </a:r>
@@ -9324,11 +9324,11 @@
             <a:r>
               <a:rPr lang="en-US" sz="2000" b="1" dirty="0">
                 <a:solidFill>
-                  <a:srgbClr val="12242E"/>
-                </a:solidFill>
-                <a:latin typeface="Calibri" pitchFamily="34" charset="0"/>
-                <a:ea typeface="Calibri" pitchFamily="34" charset="-122"/>
-                <a:cs typeface="Calibri" pitchFamily="34" charset="-120"/>
+                  <a:srgbClr val="FFFFFF"/>
+                </a:solidFill>
+                <a:latin typeface="Telegraf" pitchFamily="34" charset="0"/>
+                <a:ea typeface="Telegraf" pitchFamily="34" charset="-122"/>
+                <a:cs typeface="Telegraf" pitchFamily="34" charset="-120"/>
               </a:rPr>
               <a:t>Meanwhile, the engineers you can actually hire grew up with version control, containers, and Python — not with a proprietary IDE and a ladder-logic printout in a binder.</a:t>
             </a:r>
@@ -9363,11 +9363,11 @@
             <a:r>
               <a:rPr lang="en-US" sz="1100" dirty="0">
                 <a:solidFill>
-                  <a:srgbClr val="5B7386"/>
-                </a:solidFill>
-                <a:latin typeface="Calibri" pitchFamily="34" charset="0"/>
-                <a:ea typeface="Calibri" pitchFamily="34" charset="-122"/>
-                <a:cs typeface="Calibri" pitchFamily="34" charset="-120"/>
+                  <a:srgbClr val="9AA3AA"/>
+                </a:solidFill>
+                <a:latin typeface="Telegraf" pitchFamily="34" charset="0"/>
+                <a:ea typeface="Telegraf" pitchFamily="34" charset="-122"/>
+                <a:cs typeface="Telegraf" pitchFamily="34" charset="-120"/>
               </a:rPr>
               <a:t>Sources: AWWA 2025 Utility Benchmarking Survey; U.S. Bureau of Labor Statistics projections through 2034</a:t>
             </a:r>
@@ -9402,11 +9402,11 @@
             <a:r>
               <a:rPr lang="en-US" sz="1100" dirty="0">
                 <a:solidFill>
-                  <a:srgbClr val="AEC1CC"/>
-                </a:solidFill>
-                <a:latin typeface="Calibri" pitchFamily="34" charset="0"/>
-                <a:ea typeface="Calibri" pitchFamily="34" charset="-122"/>
-                <a:cs typeface="Calibri" pitchFamily="34" charset="-120"/>
+                  <a:srgbClr val="3A3A3A"/>
+                </a:solidFill>
+                <a:latin typeface="Telegraf" pitchFamily="34" charset="0"/>
+                <a:ea typeface="Telegraf" pitchFamily="34" charset="-122"/>
+                <a:cs typeface="Telegraf" pitchFamily="34" charset="-120"/>
               </a:rPr>
               <a:t>18</a:t>
             </a:r>
@@ -9428,7 +9428,7 @@
     <p:bg>
       <p:bgPr>
         <a:solidFill>
-          <a:srgbClr val="0E2A38"/>
+          <a:srgbClr val="000000"/>
         </a:solidFill>
       </p:bgPr>
     </p:bg>
@@ -9463,11 +9463,11 @@
             </a:avLst>
           </a:prstGeom>
           <a:solidFill>
-            <a:srgbClr val="E8A33D"/>
+            <a:srgbClr val="3DCD58"/>
           </a:solidFill>
           <a:ln w="12700">
             <a:solidFill>
-              <a:srgbClr val="E8A33D"/>
+              <a:srgbClr val="3DCD58"/>
             </a:solidFill>
             <a:prstDash val="solid"/>
           </a:ln>
@@ -9500,11 +9500,11 @@
             <a:r>
               <a:rPr lang="en-US" sz="1500" b="1" spc="110" kern="0" dirty="0">
                 <a:solidFill>
-                  <a:srgbClr val="0E2A38"/>
-                </a:solidFill>
-                <a:latin typeface="Calibri" pitchFamily="34" charset="0"/>
-                <a:ea typeface="Calibri" pitchFamily="34" charset="-122"/>
-                <a:cs typeface="Calibri" pitchFamily="34" charset="-120"/>
+                  <a:srgbClr val="000000"/>
+                </a:solidFill>
+                <a:latin typeface="Telegraf" pitchFamily="34" charset="0"/>
+                <a:ea typeface="Telegraf" pitchFamily="34" charset="-122"/>
+                <a:cs typeface="Telegraf" pitchFamily="34" charset="-120"/>
               </a:rPr>
               <a:t>A QUESTION FOR YOU</a:t>
             </a:r>
@@ -9544,9 +9544,9 @@
                 <a:solidFill>
                   <a:srgbClr val="FFFFFF"/>
                 </a:solidFill>
-                <a:latin typeface="Cambria" pitchFamily="34" charset="0"/>
-                <a:ea typeface="Cambria" pitchFamily="34" charset="-122"/>
-                <a:cs typeface="Cambria" pitchFamily="34" charset="-120"/>
+                <a:latin typeface="Telegraf" pitchFamily="34" charset="0"/>
+                <a:ea typeface="Telegraf" pitchFamily="34" charset="-122"/>
+                <a:cs typeface="Telegraf" pitchFamily="34" charset="-120"/>
               </a:rPr>
               <a:t>If your control logic could outlive</a:t>
             </a:r>
@@ -9564,9 +9564,9 @@
                 <a:solidFill>
                   <a:srgbClr val="FFFFFF"/>
                 </a:solidFill>
-                <a:latin typeface="Cambria" pitchFamily="34" charset="0"/>
-                <a:ea typeface="Cambria" pitchFamily="34" charset="-122"/>
-                <a:cs typeface="Cambria" pitchFamily="34" charset="-120"/>
+                <a:latin typeface="Telegraf" pitchFamily="34" charset="0"/>
+                <a:ea typeface="Telegraf" pitchFamily="34" charset="-122"/>
+                <a:cs typeface="Telegraf" pitchFamily="34" charset="-120"/>
               </a:rPr>
               <a:t>three generations of hardware —</a:t>
             </a:r>
@@ -9604,11 +9604,11 @@
             <a:r>
               <a:rPr lang="en-US" sz="4000" b="1" dirty="0">
                 <a:solidFill>
-                  <a:srgbClr val="E8A33D"/>
-                </a:solidFill>
-                <a:latin typeface="Cambria" pitchFamily="34" charset="0"/>
-                <a:ea typeface="Cambria" pitchFamily="34" charset="-122"/>
-                <a:cs typeface="Cambria" pitchFamily="34" charset="-120"/>
+                  <a:srgbClr val="3DCD58"/>
+                </a:solidFill>
+                <a:latin typeface="Telegraf" pitchFamily="34" charset="0"/>
+                <a:ea typeface="Telegraf" pitchFamily="34" charset="-122"/>
+                <a:cs typeface="Telegraf" pitchFamily="34" charset="-120"/>
               </a:rPr>
               <a:t>what would change about how you plan a capital project?</a:t>
             </a:r>
@@ -9643,11 +9643,11 @@
             <a:r>
               <a:rPr lang="en-US" sz="2200" i="1" dirty="0">
                 <a:solidFill>
-                  <a:srgbClr val="7FB1C6"/>
-                </a:solidFill>
-                <a:latin typeface="Calibri" pitchFamily="34" charset="0"/>
-                <a:ea typeface="Calibri" pitchFamily="34" charset="-122"/>
-                <a:cs typeface="Calibri" pitchFamily="34" charset="-120"/>
+                  <a:srgbClr val="6FD9D4"/>
+                </a:solidFill>
+                <a:latin typeface="Telegraf" pitchFamily="34" charset="0"/>
+                <a:ea typeface="Telegraf" pitchFamily="34" charset="-122"/>
+                <a:cs typeface="Telegraf" pitchFamily="34" charset="-120"/>
               </a:rPr>
               <a:t>Hold that. We'll come back to it.</a:t>
             </a:r>
@@ -9682,11 +9682,11 @@
             <a:r>
               <a:rPr lang="en-US" sz="1100" dirty="0">
                 <a:solidFill>
-                  <a:srgbClr val="3E6072"/>
-                </a:solidFill>
-                <a:latin typeface="Calibri" pitchFamily="34" charset="0"/>
-                <a:ea typeface="Calibri" pitchFamily="34" charset="-122"/>
-                <a:cs typeface="Calibri" pitchFamily="34" charset="-120"/>
+                  <a:srgbClr val="3A3A3A"/>
+                </a:solidFill>
+                <a:latin typeface="Telegraf" pitchFamily="34" charset="0"/>
+                <a:ea typeface="Telegraf" pitchFamily="34" charset="-122"/>
+                <a:cs typeface="Telegraf" pitchFamily="34" charset="-120"/>
               </a:rPr>
               <a:t>19</a:t>
             </a:r>
@@ -9743,11 +9743,11 @@
             </a:avLst>
           </a:prstGeom>
           <a:solidFill>
-            <a:srgbClr val="1C7293"/>
+            <a:srgbClr val="00A19C"/>
           </a:solidFill>
           <a:ln w="12700">
             <a:solidFill>
-              <a:srgbClr val="1C7293"/>
+              <a:srgbClr val="00A19C"/>
             </a:solidFill>
             <a:prstDash val="solid"/>
           </a:ln>
@@ -9782,9 +9782,9 @@
                 <a:solidFill>
                   <a:srgbClr val="FFFFFF"/>
                 </a:solidFill>
-                <a:latin typeface="Calibri" pitchFamily="34" charset="0"/>
-                <a:ea typeface="Calibri" pitchFamily="34" charset="-122"/>
-                <a:cs typeface="Calibri" pitchFamily="34" charset="-120"/>
+                <a:latin typeface="Telegraf" pitchFamily="34" charset="0"/>
+                <a:ea typeface="Telegraf" pitchFamily="34" charset="-122"/>
+                <a:cs typeface="Telegraf" pitchFamily="34" charset="-120"/>
               </a:rPr>
               <a:t>WHO'S TALKING</a:t>
             </a:r>
@@ -9819,11 +9819,11 @@
             <a:r>
               <a:rPr lang="en-US" sz="3800" b="1" dirty="0">
                 <a:solidFill>
-                  <a:srgbClr val="12242E"/>
-                </a:solidFill>
-                <a:latin typeface="Cambria" pitchFamily="34" charset="0"/>
-                <a:ea typeface="Cambria" pitchFamily="34" charset="-122"/>
-                <a:cs typeface="Cambria" pitchFamily="34" charset="-120"/>
+                  <a:srgbClr val="FFFFFF"/>
+                </a:solidFill>
+                <a:latin typeface="Telegraf" pitchFamily="34" charset="0"/>
+                <a:ea typeface="Telegraf" pitchFamily="34" charset="-122"/>
+                <a:cs typeface="Telegraf" pitchFamily="34" charset="-120"/>
               </a:rPr>
               <a:t>Why I'm the one telling you this</a:t>
             </a:r>
@@ -9848,11 +9848,11 @@
             </a:avLst>
           </a:prstGeom>
           <a:solidFill>
-            <a:srgbClr val="EDF3F6"/>
+            <a:srgbClr val="161616"/>
           </a:solidFill>
           <a:ln w="12700">
             <a:solidFill>
-              <a:srgbClr val="EDF3F6"/>
+              <a:srgbClr val="161616"/>
             </a:solidFill>
             <a:prstDash val="solid"/>
           </a:ln>
@@ -9885,11 +9885,11 @@
             <a:r>
               <a:rPr lang="en-US" sz="2500" b="1" dirty="0">
                 <a:solidFill>
-                  <a:srgbClr val="12242E"/>
-                </a:solidFill>
-                <a:latin typeface="Cambria" pitchFamily="34" charset="0"/>
-                <a:ea typeface="Cambria" pitchFamily="34" charset="-122"/>
-                <a:cs typeface="Cambria" pitchFamily="34" charset="-120"/>
+                  <a:srgbClr val="FFFFFF"/>
+                </a:solidFill>
+                <a:latin typeface="Telegraf" pitchFamily="34" charset="0"/>
+                <a:ea typeface="Telegraf" pitchFamily="34" charset="-122"/>
+                <a:cs typeface="Telegraf" pitchFamily="34" charset="-120"/>
               </a:rPr>
               <a:t>Kyle Sanders
 </a:t>
@@ -9903,11 +9903,11 @@
             <a:r>
               <a:rPr lang="en-US" sz="1900" dirty="0">
                 <a:solidFill>
-                  <a:srgbClr val="5B7386"/>
-                </a:solidFill>
-                <a:latin typeface="Calibri" pitchFamily="34" charset="0"/>
-                <a:ea typeface="Calibri" pitchFamily="34" charset="-122"/>
-                <a:cs typeface="Calibri" pitchFamily="34" charset="-120"/>
+                  <a:srgbClr val="9AA3AA"/>
+                </a:solidFill>
+                <a:latin typeface="Telegraf" pitchFamily="34" charset="0"/>
+                <a:ea typeface="Telegraf" pitchFamily="34" charset="-122"/>
+                <a:cs typeface="Telegraf" pitchFamily="34" charset="-120"/>
               </a:rPr>
               <a:t>Business Development Manager
 Schneider Electric — Western U.S.
@@ -9922,11 +9922,11 @@
             <a:r>
               <a:rPr lang="en-US" sz="1900" dirty="0">
                 <a:solidFill>
-                  <a:srgbClr val="12242E"/>
-                </a:solidFill>
-                <a:latin typeface="Calibri" pitchFamily="34" charset="0"/>
-                <a:ea typeface="Calibri" pitchFamily="34" charset="-122"/>
-                <a:cs typeface="Calibri" pitchFamily="34" charset="-120"/>
+                  <a:srgbClr val="FFFFFF"/>
+                </a:solidFill>
+                <a:latin typeface="Telegraf" pitchFamily="34" charset="0"/>
+                <a:ea typeface="Telegraf" pitchFamily="34" charset="-122"/>
+                <a:cs typeface="Telegraf" pitchFamily="34" charset="-120"/>
               </a:rPr>
               <a:t>I spend my week with utilities and integrators talking about what happens to a control system after the ribbon-cutting.</a:t>
             </a:r>
@@ -9951,11 +9951,11 @@
             </a:avLst>
           </a:prstGeom>
           <a:solidFill>
-            <a:srgbClr val="EDF3F6"/>
+            <a:srgbClr val="161616"/>
           </a:solidFill>
           <a:ln w="12700">
             <a:solidFill>
-              <a:srgbClr val="EDF3F6"/>
+              <a:srgbClr val="161616"/>
             </a:solidFill>
             <a:prstDash val="solid"/>
           </a:ln>
@@ -9988,11 +9988,11 @@
             <a:r>
               <a:rPr lang="en-US" sz="2500" b="1" dirty="0">
                 <a:solidFill>
-                  <a:srgbClr val="1C7293"/>
-                </a:solidFill>
-                <a:latin typeface="Cambria" pitchFamily="34" charset="0"/>
-                <a:ea typeface="Cambria" pitchFamily="34" charset="-122"/>
-                <a:cs typeface="Cambria" pitchFamily="34" charset="-120"/>
+                  <a:srgbClr val="00A19C"/>
+                </a:solidFill>
+                <a:latin typeface="Telegraf" pitchFamily="34" charset="0"/>
+                <a:ea typeface="Telegraf" pitchFamily="34" charset="-122"/>
+                <a:cs typeface="Telegraf" pitchFamily="34" charset="-120"/>
               </a:rPr>
               <a:t>A disclosure, up front</a:t>
             </a:r>
@@ -10030,11 +10030,11 @@
             <a:r>
               <a:rPr lang="en-US" sz="1900" dirty="0">
                 <a:solidFill>
-                  <a:srgbClr val="12242E"/>
-                </a:solidFill>
-                <a:latin typeface="Calibri" pitchFamily="34" charset="0"/>
-                <a:ea typeface="Calibri" pitchFamily="34" charset="-122"/>
-                <a:cs typeface="Calibri" pitchFamily="34" charset="-120"/>
+                  <a:srgbClr val="FFFFFF"/>
+                </a:solidFill>
+                <a:latin typeface="Telegraf" pitchFamily="34" charset="0"/>
+                <a:ea typeface="Telegraf" pitchFamily="34" charset="-122"/>
+                <a:cs typeface="Telegraf" pitchFamily="34" charset="-120"/>
               </a:rPr>
               <a:t>I work for one of the companies that built the problem I'm about to describe.</a:t>
             </a:r>
@@ -10059,11 +10059,11 @@
             <a:r>
               <a:rPr lang="en-US" sz="1900" dirty="0">
                 <a:solidFill>
-                  <a:srgbClr val="12242E"/>
-                </a:solidFill>
-                <a:latin typeface="Calibri" pitchFamily="34" charset="0"/>
-                <a:ea typeface="Calibri" pitchFamily="34" charset="-122"/>
-                <a:cs typeface="Calibri" pitchFamily="34" charset="-120"/>
+                  <a:srgbClr val="FFFFFF"/>
+                </a:solidFill>
+                <a:latin typeface="Telegraf" pitchFamily="34" charset="0"/>
+                <a:ea typeface="Telegraf" pitchFamily="34" charset="-122"/>
+                <a:cs typeface="Telegraf" pitchFamily="34" charset="-120"/>
               </a:rPr>
               <a:t>So does the vendor on your panel. This is not a talk about who to blame — it's a talk about an architecture all of us chose, and what it's now costing you.</a:t>
             </a:r>
@@ -10098,11 +10098,11 @@
             <a:r>
               <a:rPr lang="en-US" sz="1100" dirty="0">
                 <a:solidFill>
-                  <a:srgbClr val="AEC1CC"/>
-                </a:solidFill>
-                <a:latin typeface="Calibri" pitchFamily="34" charset="0"/>
-                <a:ea typeface="Calibri" pitchFamily="34" charset="-122"/>
-                <a:cs typeface="Calibri" pitchFamily="34" charset="-120"/>
+                  <a:srgbClr val="3A3A3A"/>
+                </a:solidFill>
+                <a:latin typeface="Telegraf" pitchFamily="34" charset="0"/>
+                <a:ea typeface="Telegraf" pitchFamily="34" charset="-122"/>
+                <a:cs typeface="Telegraf" pitchFamily="34" charset="-120"/>
               </a:rPr>
               <a:t>2</a:t>
             </a:r>
@@ -10124,7 +10124,7 @@
     <p:bg>
       <p:bgPr>
         <a:solidFill>
-          <a:srgbClr val="0E2A38"/>
+          <a:srgbClr val="000000"/>
         </a:solidFill>
       </p:bgPr>
     </p:bg>
@@ -10159,11 +10159,11 @@
             </a:avLst>
           </a:prstGeom>
           <a:solidFill>
-            <a:srgbClr val="E8A33D"/>
+            <a:srgbClr val="3DCD58"/>
           </a:solidFill>
           <a:ln w="12700">
             <a:solidFill>
-              <a:srgbClr val="E8A33D"/>
+              <a:srgbClr val="3DCD58"/>
             </a:solidFill>
             <a:prstDash val="solid"/>
           </a:ln>
@@ -10196,11 +10196,11 @@
             <a:r>
               <a:rPr lang="en-US" sz="1500" b="1" spc="110" kern="0" dirty="0">
                 <a:solidFill>
-                  <a:srgbClr val="0E2A38"/>
-                </a:solidFill>
-                <a:latin typeface="Calibri" pitchFamily="34" charset="0"/>
-                <a:ea typeface="Calibri" pitchFamily="34" charset="-122"/>
-                <a:cs typeface="Calibri" pitchFamily="34" charset="-120"/>
+                  <a:srgbClr val="000000"/>
+                </a:solidFill>
+                <a:latin typeface="Telegraf" pitchFamily="34" charset="0"/>
+                <a:ea typeface="Telegraf" pitchFamily="34" charset="-122"/>
+                <a:cs typeface="Telegraf" pitchFamily="34" charset="-120"/>
               </a:rPr>
               <a:t>ACT III</a:t>
             </a:r>
@@ -10237,9 +10237,9 @@
                 <a:solidFill>
                   <a:srgbClr val="FFFFFF"/>
                 </a:solidFill>
-                <a:latin typeface="Cambria" pitchFamily="34" charset="0"/>
-                <a:ea typeface="Cambria" pitchFamily="34" charset="-122"/>
-                <a:cs typeface="Cambria" pitchFamily="34" charset="-120"/>
+                <a:latin typeface="Telegraf" pitchFamily="34" charset="0"/>
+                <a:ea typeface="Telegraf" pitchFamily="34" charset="-122"/>
+                <a:cs typeface="Telegraf" pitchFamily="34" charset="-120"/>
               </a:rPr>
               <a:t>What actually changes</a:t>
             </a:r>
@@ -10277,11 +10277,11 @@
             <a:r>
               <a:rPr lang="en-US" sz="2300" dirty="0">
                 <a:solidFill>
-                  <a:srgbClr val="7FB1C6"/>
-                </a:solidFill>
-                <a:latin typeface="Calibri" pitchFamily="34" charset="0"/>
-                <a:ea typeface="Calibri" pitchFamily="34" charset="-122"/>
-                <a:cs typeface="Calibri" pitchFamily="34" charset="-120"/>
+                  <a:srgbClr val="6FD9D4"/>
+                </a:solidFill>
+                <a:latin typeface="Telegraf" pitchFamily="34" charset="0"/>
+                <a:ea typeface="Telegraf" pitchFamily="34" charset="-122"/>
+                <a:cs typeface="Telegraf" pitchFamily="34" charset="-120"/>
               </a:rPr>
               <a:t>Software-defined automation is the third act of a story that started in 1968.</a:t>
             </a:r>
@@ -10297,11 +10297,11 @@
             <a:r>
               <a:rPr lang="en-US" sz="2300" dirty="0">
                 <a:solidFill>
-                  <a:srgbClr val="7FB1C6"/>
-                </a:solidFill>
-                <a:latin typeface="Calibri" pitchFamily="34" charset="0"/>
-                <a:ea typeface="Calibri" pitchFamily="34" charset="-122"/>
-                <a:cs typeface="Calibri" pitchFamily="34" charset="-120"/>
+                  <a:srgbClr val="6FD9D4"/>
+                </a:solidFill>
+                <a:latin typeface="Telegraf" pitchFamily="34" charset="0"/>
+                <a:ea typeface="Telegraf" pitchFamily="34" charset="-122"/>
+                <a:cs typeface="Telegraf" pitchFamily="34" charset="-120"/>
               </a:rPr>
               <a:t>It finishes the job the PLC started.</a:t>
             </a:r>
@@ -10336,11 +10336,11 @@
             <a:r>
               <a:rPr lang="en-US" sz="1100" dirty="0">
                 <a:solidFill>
-                  <a:srgbClr val="3E6072"/>
-                </a:solidFill>
-                <a:latin typeface="Calibri" pitchFamily="34" charset="0"/>
-                <a:ea typeface="Calibri" pitchFamily="34" charset="-122"/>
-                <a:cs typeface="Calibri" pitchFamily="34" charset="-120"/>
+                  <a:srgbClr val="3A3A3A"/>
+                </a:solidFill>
+                <a:latin typeface="Telegraf" pitchFamily="34" charset="0"/>
+                <a:ea typeface="Telegraf" pitchFamily="34" charset="-122"/>
+                <a:cs typeface="Telegraf" pitchFamily="34" charset="-120"/>
               </a:rPr>
               <a:t>20</a:t>
             </a:r>
@@ -10397,11 +10397,11 @@
             </a:avLst>
           </a:prstGeom>
           <a:solidFill>
-            <a:srgbClr val="1C7293"/>
+            <a:srgbClr val="00A19C"/>
           </a:solidFill>
           <a:ln w="12700">
             <a:solidFill>
-              <a:srgbClr val="1C7293"/>
+              <a:srgbClr val="00A19C"/>
             </a:solidFill>
             <a:prstDash val="solid"/>
           </a:ln>
@@ -10436,9 +10436,9 @@
                 <a:solidFill>
                   <a:srgbClr val="FFFFFF"/>
                 </a:solidFill>
-                <a:latin typeface="Calibri" pitchFamily="34" charset="0"/>
-                <a:ea typeface="Calibri" pitchFamily="34" charset="-122"/>
-                <a:cs typeface="Calibri" pitchFamily="34" charset="-120"/>
+                <a:latin typeface="Telegraf" pitchFamily="34" charset="0"/>
+                <a:ea typeface="Telegraf" pitchFamily="34" charset="-122"/>
+                <a:cs typeface="Telegraf" pitchFamily="34" charset="-120"/>
               </a:rPr>
               <a:t>THE IDEA</a:t>
             </a:r>
@@ -10473,11 +10473,11 @@
             <a:r>
               <a:rPr lang="en-US" sz="3800" b="1" dirty="0">
                 <a:solidFill>
-                  <a:srgbClr val="12242E"/>
-                </a:solidFill>
-                <a:latin typeface="Cambria" pitchFamily="34" charset="0"/>
-                <a:ea typeface="Cambria" pitchFamily="34" charset="-122"/>
-                <a:cs typeface="Cambria" pitchFamily="34" charset="-120"/>
+                  <a:srgbClr val="FFFFFF"/>
+                </a:solidFill>
+                <a:latin typeface="Telegraf" pitchFamily="34" charset="0"/>
+                <a:ea typeface="Telegraf" pitchFamily="34" charset="-122"/>
+                <a:cs typeface="Telegraf" pitchFamily="34" charset="-120"/>
               </a:rPr>
               <a:t>Cut the seam between logic and hardware</a:t>
             </a:r>
@@ -10502,11 +10502,11 @@
             </a:avLst>
           </a:prstGeom>
           <a:solidFill>
-            <a:srgbClr val="EDF3F6"/>
+            <a:srgbClr val="161616"/>
           </a:solidFill>
           <a:ln w="12700">
             <a:solidFill>
-              <a:srgbClr val="EDF3F6"/>
+              <a:srgbClr val="161616"/>
             </a:solidFill>
             <a:prstDash val="solid"/>
           </a:ln>
@@ -10529,11 +10529,11 @@
             </a:avLst>
           </a:prstGeom>
           <a:solidFill>
-            <a:srgbClr val="9BB4C1"/>
+            <a:srgbClr val="E2231A"/>
           </a:solidFill>
           <a:ln w="12700">
             <a:solidFill>
-              <a:srgbClr val="9BB4C1"/>
+              <a:srgbClr val="E2231A"/>
             </a:solidFill>
             <a:prstDash val="solid"/>
           </a:ln>
@@ -10566,11 +10566,11 @@
             <a:r>
               <a:rPr lang="en-US" sz="1500" b="1" spc="110" kern="0" dirty="0">
                 <a:solidFill>
-                  <a:srgbClr val="12242E"/>
-                </a:solidFill>
-                <a:latin typeface="Calibri" pitchFamily="34" charset="0"/>
-                <a:ea typeface="Calibri" pitchFamily="34" charset="-122"/>
-                <a:cs typeface="Calibri" pitchFamily="34" charset="-120"/>
+                  <a:srgbClr val="FFFFFF"/>
+                </a:solidFill>
+                <a:latin typeface="Telegraf" pitchFamily="34" charset="0"/>
+                <a:ea typeface="Telegraf" pitchFamily="34" charset="-122"/>
+                <a:cs typeface="Telegraf" pitchFamily="34" charset="-120"/>
               </a:rPr>
               <a:t>TODAY</a:t>
             </a:r>
@@ -10608,11 +10608,11 @@
             <a:r>
               <a:rPr lang="en-US" sz="2400" b="1" dirty="0">
                 <a:solidFill>
-                  <a:srgbClr val="12242E"/>
-                </a:solidFill>
-                <a:latin typeface="Cambria" pitchFamily="34" charset="0"/>
-                <a:ea typeface="Cambria" pitchFamily="34" charset="-122"/>
-                <a:cs typeface="Cambria" pitchFamily="34" charset="-120"/>
+                  <a:srgbClr val="FFFFFF"/>
+                </a:solidFill>
+                <a:latin typeface="Telegraf" pitchFamily="34" charset="0"/>
+                <a:ea typeface="Telegraf" pitchFamily="34" charset="-122"/>
+                <a:cs typeface="Telegraf" pitchFamily="34" charset="-120"/>
               </a:rPr>
               <a:t>The logic lives inside the controller.</a:t>
             </a:r>
@@ -10650,11 +10650,11 @@
             <a:r>
               <a:rPr lang="en-US" sz="1900" dirty="0">
                 <a:solidFill>
-                  <a:srgbClr val="12242E"/>
-                </a:solidFill>
-                <a:latin typeface="Calibri" pitchFamily="34" charset="0"/>
-                <a:ea typeface="Calibri" pitchFamily="34" charset="-122"/>
-                <a:cs typeface="Calibri" pitchFamily="34" charset="-120"/>
+                  <a:srgbClr val="FFFFFF"/>
+                </a:solidFill>
+                <a:latin typeface="Telegraf" pitchFamily="34" charset="0"/>
+                <a:ea typeface="Telegraf" pitchFamily="34" charset="-122"/>
+                <a:cs typeface="Telegraf" pitchFamily="34" charset="-120"/>
               </a:rPr>
               <a:t>Replace the controller and you rewrite the logic. Change vendors and you start over. The hardware decision is the software decision.</a:t>
             </a:r>
@@ -10679,11 +10679,11 @@
             </a:avLst>
           </a:prstGeom>
           <a:solidFill>
-            <a:srgbClr val="EDF3F6"/>
+            <a:srgbClr val="161616"/>
           </a:solidFill>
           <a:ln w="12700">
             <a:solidFill>
-              <a:srgbClr val="EDF3F6"/>
+              <a:srgbClr val="161616"/>
             </a:solidFill>
             <a:prstDash val="solid"/>
           </a:ln>
@@ -10706,11 +10706,11 @@
             </a:avLst>
           </a:prstGeom>
           <a:solidFill>
-            <a:srgbClr val="1C7293"/>
+            <a:srgbClr val="00A19C"/>
           </a:solidFill>
           <a:ln w="12700">
             <a:solidFill>
-              <a:srgbClr val="1C7293"/>
+              <a:srgbClr val="00A19C"/>
             </a:solidFill>
             <a:prstDash val="solid"/>
           </a:ln>
@@ -10745,9 +10745,9 @@
                 <a:solidFill>
                   <a:srgbClr val="FFFFFF"/>
                 </a:solidFill>
-                <a:latin typeface="Calibri" pitchFamily="34" charset="0"/>
-                <a:ea typeface="Calibri" pitchFamily="34" charset="-122"/>
-                <a:cs typeface="Calibri" pitchFamily="34" charset="-120"/>
+                <a:latin typeface="Telegraf" pitchFamily="34" charset="0"/>
+                <a:ea typeface="Telegraf" pitchFamily="34" charset="-122"/>
+                <a:cs typeface="Telegraf" pitchFamily="34" charset="-120"/>
               </a:rPr>
               <a:t>SOFTWARE-DEFINED</a:t>
             </a:r>
@@ -10785,11 +10785,11 @@
             <a:r>
               <a:rPr lang="en-US" sz="2400" b="1" dirty="0">
                 <a:solidFill>
-                  <a:srgbClr val="1C7293"/>
-                </a:solidFill>
-                <a:latin typeface="Cambria" pitchFamily="34" charset="0"/>
-                <a:ea typeface="Cambria" pitchFamily="34" charset="-122"/>
-                <a:cs typeface="Cambria" pitchFamily="34" charset="-120"/>
+                  <a:srgbClr val="00A19C"/>
+                </a:solidFill>
+                <a:latin typeface="Telegraf" pitchFamily="34" charset="0"/>
+                <a:ea typeface="Telegraf" pitchFamily="34" charset="-122"/>
+                <a:cs typeface="Telegraf" pitchFamily="34" charset="-120"/>
               </a:rPr>
               <a:t>The logic is a portable application.</a:t>
             </a:r>
@@ -10827,11 +10827,11 @@
             <a:r>
               <a:rPr lang="en-US" sz="1900" dirty="0">
                 <a:solidFill>
-                  <a:srgbClr val="12242E"/>
-                </a:solidFill>
-                <a:latin typeface="Calibri" pitchFamily="34" charset="0"/>
-                <a:ea typeface="Calibri" pitchFamily="34" charset="-122"/>
-                <a:cs typeface="Calibri" pitchFamily="34" charset="-120"/>
+                  <a:srgbClr val="FFFFFF"/>
+                </a:solidFill>
+                <a:latin typeface="Telegraf" pitchFamily="34" charset="0"/>
+                <a:ea typeface="Telegraf" pitchFamily="34" charset="-122"/>
+                <a:cs typeface="Telegraf" pitchFamily="34" charset="-120"/>
               </a:rPr>
               <a:t>It runs on the hardware you choose, and it keeps running when you choose different hardware. The two decisions come apart.</a:t>
             </a:r>
@@ -10866,11 +10866,11 @@
             <a:r>
               <a:rPr lang="en-US" sz="2000" i="1" dirty="0">
                 <a:solidFill>
-                  <a:srgbClr val="E8A33D"/>
-                </a:solidFill>
-                <a:latin typeface="Calibri" pitchFamily="34" charset="0"/>
-                <a:ea typeface="Calibri" pitchFamily="34" charset="-122"/>
-                <a:cs typeface="Calibri" pitchFamily="34" charset="-120"/>
+                  <a:srgbClr val="3DCD58"/>
+                </a:solidFill>
+                <a:latin typeface="Telegraf" pitchFamily="34" charset="0"/>
+                <a:ea typeface="Telegraf" pitchFamily="34" charset="-122"/>
+                <a:cs typeface="Telegraf" pitchFamily="34" charset="-120"/>
               </a:rPr>
               <a:t>That's it. That's the whole technical idea in this talk.</a:t>
             </a:r>
@@ -10905,11 +10905,11 @@
             <a:r>
               <a:rPr lang="en-US" sz="1100" dirty="0">
                 <a:solidFill>
-                  <a:srgbClr val="AEC1CC"/>
-                </a:solidFill>
-                <a:latin typeface="Calibri" pitchFamily="34" charset="0"/>
-                <a:ea typeface="Calibri" pitchFamily="34" charset="-122"/>
-                <a:cs typeface="Calibri" pitchFamily="34" charset="-120"/>
+                  <a:srgbClr val="3A3A3A"/>
+                </a:solidFill>
+                <a:latin typeface="Telegraf" pitchFamily="34" charset="0"/>
+                <a:ea typeface="Telegraf" pitchFamily="34" charset="-122"/>
+                <a:cs typeface="Telegraf" pitchFamily="34" charset="-120"/>
               </a:rPr>
               <a:t>21</a:t>
             </a:r>
@@ -10966,11 +10966,11 @@
             </a:avLst>
           </a:prstGeom>
           <a:solidFill>
-            <a:srgbClr val="1C7293"/>
+            <a:srgbClr val="00A19C"/>
           </a:solidFill>
           <a:ln w="12700">
             <a:solidFill>
-              <a:srgbClr val="1C7293"/>
+              <a:srgbClr val="00A19C"/>
             </a:solidFill>
             <a:prstDash val="solid"/>
           </a:ln>
@@ -11005,9 +11005,9 @@
                 <a:solidFill>
                   <a:srgbClr val="FFFFFF"/>
                 </a:solidFill>
-                <a:latin typeface="Calibri" pitchFamily="34" charset="0"/>
-                <a:ea typeface="Calibri" pitchFamily="34" charset="-122"/>
-                <a:cs typeface="Calibri" pitchFamily="34" charset="-120"/>
+                <a:latin typeface="Telegraf" pitchFamily="34" charset="0"/>
+                <a:ea typeface="Telegraf" pitchFamily="34" charset="-122"/>
+                <a:cs typeface="Telegraf" pitchFamily="34" charset="-120"/>
               </a:rPr>
               <a:t>WHAT IT FEELS LIKE</a:t>
             </a:r>
@@ -11042,11 +11042,11 @@
             <a:r>
               <a:rPr lang="en-US" sz="3800" b="1" dirty="0">
                 <a:solidFill>
-                  <a:srgbClr val="12242E"/>
-                </a:solidFill>
-                <a:latin typeface="Cambria" pitchFamily="34" charset="0"/>
-                <a:ea typeface="Cambria" pitchFamily="34" charset="-122"/>
-                <a:cs typeface="Cambria" pitchFamily="34" charset="-120"/>
+                  <a:srgbClr val="FFFFFF"/>
+                </a:solidFill>
+                <a:latin typeface="Telegraf" pitchFamily="34" charset="0"/>
+                <a:ea typeface="Telegraf" pitchFamily="34" charset="-122"/>
+                <a:cs typeface="Telegraf" pitchFamily="34" charset="-120"/>
               </a:rPr>
               <a:t>You already live this way</a:t>
             </a:r>
@@ -11084,11 +11084,11 @@
             <a:r>
               <a:rPr lang="en-US" sz="2200" dirty="0">
                 <a:solidFill>
-                  <a:srgbClr val="12242E"/>
-                </a:solidFill>
-                <a:latin typeface="Calibri" pitchFamily="34" charset="0"/>
-                <a:ea typeface="Calibri" pitchFamily="34" charset="-122"/>
-                <a:cs typeface="Calibri" pitchFamily="34" charset="-120"/>
+                  <a:srgbClr val="FFFFFF"/>
+                </a:solidFill>
+                <a:latin typeface="Telegraf" pitchFamily="34" charset="0"/>
+                <a:ea typeface="Telegraf" pitchFamily="34" charset="-122"/>
+                <a:cs typeface="Telegraf" pitchFamily="34" charset="-120"/>
               </a:rPr>
               <a:t>You get in a rental car you've never driven. You plug in your phone. Your maps, your music, your contacts, your layout — on somebody else's dashboard, instantly.</a:t>
             </a:r>
@@ -11123,11 +11123,11 @@
             <a:r>
               <a:rPr lang="en-US" sz="2200" b="1" dirty="0">
                 <a:solidFill>
-                  <a:srgbClr val="12242E"/>
-                </a:solidFill>
-                <a:latin typeface="Calibri" pitchFamily="34" charset="0"/>
-                <a:ea typeface="Calibri" pitchFamily="34" charset="-122"/>
-                <a:cs typeface="Calibri" pitchFamily="34" charset="-120"/>
+                  <a:srgbClr val="FFFFFF"/>
+                </a:solidFill>
+                <a:latin typeface="Telegraf" pitchFamily="34" charset="0"/>
+                <a:ea typeface="Telegraf" pitchFamily="34" charset="-122"/>
+                <a:cs typeface="Telegraf" pitchFamily="34" charset="-120"/>
               </a:rPr>
               <a:t>Nobody re-teaches the car. The experience is yours; the hardware is rented.</a:t>
             </a:r>
@@ -11152,11 +11152,11 @@
             </a:avLst>
           </a:prstGeom>
           <a:solidFill>
-            <a:srgbClr val="EDF3F6"/>
+            <a:srgbClr val="161616"/>
           </a:solidFill>
           <a:ln w="12700">
             <a:solidFill>
-              <a:srgbClr val="EDF3F6"/>
+              <a:srgbClr val="161616"/>
             </a:solidFill>
             <a:prstDash val="solid"/>
           </a:ln>
@@ -11192,11 +11192,11 @@
             <a:r>
               <a:rPr lang="en-US" sz="1800" b="1" dirty="0">
                 <a:solidFill>
-                  <a:srgbClr val="5B7386"/>
-                </a:solidFill>
-                <a:latin typeface="Calibri" pitchFamily="34" charset="0"/>
-                <a:ea typeface="Calibri" pitchFamily="34" charset="-122"/>
-                <a:cs typeface="Calibri" pitchFamily="34" charset="-120"/>
+                  <a:srgbClr val="9AA3AA"/>
+                </a:solidFill>
+                <a:latin typeface="Telegraf" pitchFamily="34" charset="0"/>
+                <a:ea typeface="Telegraf" pitchFamily="34" charset="-122"/>
+                <a:cs typeface="Telegraf" pitchFamily="34" charset="-120"/>
               </a:rPr>
               <a:t>Before CarPlay
 </a:t>
@@ -11213,11 +11213,11 @@
             <a:r>
               <a:rPr lang="en-US" sz="1800" dirty="0">
                 <a:solidFill>
-                  <a:srgbClr val="12242E"/>
-                </a:solidFill>
-                <a:latin typeface="Calibri" pitchFamily="34" charset="0"/>
-                <a:ea typeface="Calibri" pitchFamily="34" charset="-122"/>
-                <a:cs typeface="Calibri" pitchFamily="34" charset="-120"/>
+                  <a:srgbClr val="FFFFFF"/>
+                </a:solidFill>
+                <a:latin typeface="Telegraf" pitchFamily="34" charset="0"/>
+                <a:ea typeface="Telegraf" pitchFamily="34" charset="-122"/>
+                <a:cs typeface="Telegraf" pitchFamily="34" charset="-120"/>
               </a:rPr>
               <a:t>Your navigation was a feature of the car. Buy a different car, learn a different system, lose your saved places.</a:t>
             </a:r>
@@ -11242,11 +11242,11 @@
             </a:avLst>
           </a:prstGeom>
           <a:solidFill>
-            <a:srgbClr val="EDF3F6"/>
+            <a:srgbClr val="161616"/>
           </a:solidFill>
           <a:ln w="12700">
             <a:solidFill>
-              <a:srgbClr val="EDF3F6"/>
+              <a:srgbClr val="161616"/>
             </a:solidFill>
             <a:prstDash val="solid"/>
           </a:ln>
@@ -11282,11 +11282,11 @@
             <a:r>
               <a:rPr lang="en-US" sz="1800" b="1" dirty="0">
                 <a:solidFill>
-                  <a:srgbClr val="E8A33D"/>
-                </a:solidFill>
-                <a:latin typeface="Calibri" pitchFamily="34" charset="0"/>
-                <a:ea typeface="Calibri" pitchFamily="34" charset="-122"/>
-                <a:cs typeface="Calibri" pitchFamily="34" charset="-120"/>
+                  <a:srgbClr val="3DCD58"/>
+                </a:solidFill>
+                <a:latin typeface="Telegraf" pitchFamily="34" charset="0"/>
+                <a:ea typeface="Telegraf" pitchFamily="34" charset="-122"/>
+                <a:cs typeface="Telegraf" pitchFamily="34" charset="-120"/>
               </a:rPr>
               <a:t>Your plant, today
 </a:t>
@@ -11303,11 +11303,11 @@
             <a:r>
               <a:rPr lang="en-US" sz="1800" dirty="0">
                 <a:solidFill>
-                  <a:srgbClr val="12242E"/>
-                </a:solidFill>
-                <a:latin typeface="Calibri" pitchFamily="34" charset="0"/>
-                <a:ea typeface="Calibri" pitchFamily="34" charset="-122"/>
-                <a:cs typeface="Calibri" pitchFamily="34" charset="-120"/>
+                  <a:srgbClr val="FFFFFF"/>
+                </a:solidFill>
+                <a:latin typeface="Telegraf" pitchFamily="34" charset="0"/>
+                <a:ea typeface="Telegraf" pitchFamily="34" charset="-122"/>
+                <a:cs typeface="Telegraf" pitchFamily="34" charset="-120"/>
               </a:rPr>
               <a:t>Your control logic is a feature of the controller. Buy a different controller, rebuild the logic, retrain the staff.</a:t>
             </a:r>
@@ -11342,11 +11342,11 @@
             <a:r>
               <a:rPr lang="en-US" sz="1100" dirty="0">
                 <a:solidFill>
-                  <a:srgbClr val="AEC1CC"/>
-                </a:solidFill>
-                <a:latin typeface="Calibri" pitchFamily="34" charset="0"/>
-                <a:ea typeface="Calibri" pitchFamily="34" charset="-122"/>
-                <a:cs typeface="Calibri" pitchFamily="34" charset="-120"/>
+                  <a:srgbClr val="3A3A3A"/>
+                </a:solidFill>
+                <a:latin typeface="Telegraf" pitchFamily="34" charset="0"/>
+                <a:ea typeface="Telegraf" pitchFamily="34" charset="-122"/>
+                <a:cs typeface="Telegraf" pitchFamily="34" charset="-120"/>
               </a:rPr>
               <a:t>22</a:t>
             </a:r>
@@ -11368,7 +11368,7 @@
     <p:bg>
       <p:bgPr>
         <a:solidFill>
-          <a:srgbClr val="0E2A38"/>
+          <a:srgbClr val="000000"/>
         </a:solidFill>
       </p:bgPr>
     </p:bg>
@@ -11403,11 +11403,11 @@
             </a:avLst>
           </a:prstGeom>
           <a:solidFill>
-            <a:srgbClr val="E8A33D"/>
+            <a:srgbClr val="3DCD58"/>
           </a:solidFill>
           <a:ln w="12700">
             <a:solidFill>
-              <a:srgbClr val="E8A33D"/>
+              <a:srgbClr val="3DCD58"/>
             </a:solidFill>
             <a:prstDash val="solid"/>
           </a:ln>
@@ -11440,11 +11440,11 @@
             <a:r>
               <a:rPr lang="en-US" sz="1500" b="1" spc="110" kern="0" dirty="0">
                 <a:solidFill>
-                  <a:srgbClr val="0E2A38"/>
-                </a:solidFill>
-                <a:latin typeface="Calibri" pitchFamily="34" charset="0"/>
-                <a:ea typeface="Calibri" pitchFamily="34" charset="-122"/>
-                <a:cs typeface="Calibri" pitchFamily="34" charset="-120"/>
+                  <a:srgbClr val="000000"/>
+                </a:solidFill>
+                <a:latin typeface="Telegraf" pitchFamily="34" charset="0"/>
+                <a:ea typeface="Telegraf" pitchFamily="34" charset="-122"/>
+                <a:cs typeface="Telegraf" pitchFamily="34" charset="-120"/>
               </a:rPr>
               <a:t>WHY IT MATTERS</a:t>
             </a:r>
@@ -11481,9 +11481,9 @@
                 <a:solidFill>
                   <a:srgbClr val="FFFFFF"/>
                 </a:solidFill>
-                <a:latin typeface="Cambria" pitchFamily="34" charset="0"/>
-                <a:ea typeface="Cambria" pitchFamily="34" charset="-122"/>
-                <a:cs typeface="Cambria" pitchFamily="34" charset="-120"/>
+                <a:latin typeface="Telegraf" pitchFamily="34" charset="0"/>
+                <a:ea typeface="Telegraf" pitchFamily="34" charset="-122"/>
+                <a:cs typeface="Telegraf" pitchFamily="34" charset="-120"/>
               </a:rPr>
               <a:t>A better analogy — this one's about ownership</a:t>
             </a:r>
@@ -11521,11 +11521,11 @@
             <a:r>
               <a:rPr lang="en-US" sz="2200" dirty="0">
                 <a:solidFill>
-                  <a:srgbClr val="7FB1C6"/>
-                </a:solidFill>
-                <a:latin typeface="Calibri" pitchFamily="34" charset="0"/>
-                <a:ea typeface="Calibri" pitchFamily="34" charset="-122"/>
-                <a:cs typeface="Calibri" pitchFamily="34" charset="-120"/>
+                  <a:srgbClr val="6FD9D4"/>
+                </a:solidFill>
+                <a:latin typeface="Telegraf" pitchFamily="34" charset="0"/>
+                <a:ea typeface="Telegraf" pitchFamily="34" charset="-122"/>
+                <a:cs typeface="Telegraf" pitchFamily="34" charset="-120"/>
               </a:rPr>
               <a:t>Before 1996, your phone number belonged to your carrier. Switching meant giving it up — so almost nobody switched. Not because the service was good.</a:t>
             </a:r>
@@ -11565,9 +11565,9 @@
                 <a:solidFill>
                   <a:srgbClr val="FFFFFF"/>
                 </a:solidFill>
-                <a:latin typeface="Calibri" pitchFamily="34" charset="0"/>
-                <a:ea typeface="Calibri" pitchFamily="34" charset="-122"/>
-                <a:cs typeface="Calibri" pitchFamily="34" charset="-120"/>
+                <a:latin typeface="Telegraf" pitchFamily="34" charset="0"/>
+                <a:ea typeface="Telegraf" pitchFamily="34" charset="-122"/>
+                <a:cs typeface="Telegraf" pitchFamily="34" charset="-120"/>
               </a:rPr>
               <a:t>Number portability didn't invent a single new phone. It moved one asset — the number — from the carrier's balance sheet to yours.</a:t>
             </a:r>
@@ -11592,11 +11592,11 @@
             </a:avLst>
           </a:prstGeom>
           <a:solidFill>
-            <a:srgbClr val="163B4D"/>
+            <a:srgbClr val="1B1B1B"/>
           </a:solidFill>
           <a:ln w="12700">
             <a:solidFill>
-              <a:srgbClr val="163B4D"/>
+              <a:srgbClr val="1B1B1B"/>
             </a:solidFill>
             <a:prstDash val="solid"/>
           </a:ln>
@@ -11632,11 +11632,11 @@
             <a:r>
               <a:rPr lang="en-US" sz="2200" b="1" dirty="0">
                 <a:solidFill>
-                  <a:srgbClr val="E8A33D"/>
-                </a:solidFill>
-                <a:latin typeface="Calibri" pitchFamily="34" charset="0"/>
-                <a:ea typeface="Calibri" pitchFamily="34" charset="-122"/>
-                <a:cs typeface="Calibri" pitchFamily="34" charset="-120"/>
+                  <a:srgbClr val="3DCD58"/>
+                </a:solidFill>
+                <a:latin typeface="Telegraf" pitchFamily="34" charset="0"/>
+                <a:ea typeface="Telegraf" pitchFamily="34" charset="-122"/>
+                <a:cs typeface="Telegraf" pitchFamily="34" charset="-120"/>
               </a:rPr>
               <a:t>Software-defined automation does that for control logic. Same plant, same pumps, same people — the thing that changes hands is who owns the application.</a:t>
             </a:r>
@@ -11671,11 +11671,11 @@
             <a:r>
               <a:rPr lang="en-US" sz="1100" dirty="0">
                 <a:solidFill>
-                  <a:srgbClr val="3E6072"/>
-                </a:solidFill>
-                <a:latin typeface="Calibri" pitchFamily="34" charset="0"/>
-                <a:ea typeface="Calibri" pitchFamily="34" charset="-122"/>
-                <a:cs typeface="Calibri" pitchFamily="34" charset="-120"/>
+                  <a:srgbClr val="3A3A3A"/>
+                </a:solidFill>
+                <a:latin typeface="Telegraf" pitchFamily="34" charset="0"/>
+                <a:ea typeface="Telegraf" pitchFamily="34" charset="-122"/>
+                <a:cs typeface="Telegraf" pitchFamily="34" charset="-120"/>
               </a:rPr>
               <a:t>23</a:t>
             </a:r>
@@ -11732,11 +11732,11 @@
             </a:avLst>
           </a:prstGeom>
           <a:solidFill>
-            <a:srgbClr val="1C7293"/>
+            <a:srgbClr val="00A19C"/>
           </a:solidFill>
           <a:ln w="12700">
             <a:solidFill>
-              <a:srgbClr val="1C7293"/>
+              <a:srgbClr val="00A19C"/>
             </a:solidFill>
             <a:prstDash val="solid"/>
           </a:ln>
@@ -11771,9 +11771,9 @@
                 <a:solidFill>
                   <a:srgbClr val="FFFFFF"/>
                 </a:solidFill>
-                <a:latin typeface="Calibri" pitchFamily="34" charset="0"/>
-                <a:ea typeface="Calibri" pitchFamily="34" charset="-122"/>
-                <a:cs typeface="Calibri" pitchFamily="34" charset="-120"/>
+                <a:latin typeface="Telegraf" pitchFamily="34" charset="0"/>
+                <a:ea typeface="Telegraf" pitchFamily="34" charset="-122"/>
+                <a:cs typeface="Telegraf" pitchFamily="34" charset="-120"/>
               </a:rPr>
               <a:t>IN PRACTICE</a:t>
             </a:r>
@@ -11808,11 +11808,11 @@
             <a:r>
               <a:rPr lang="en-US" sz="3800" b="1" dirty="0">
                 <a:solidFill>
-                  <a:srgbClr val="12242E"/>
-                </a:solidFill>
-                <a:latin typeface="Cambria" pitchFamily="34" charset="0"/>
-                <a:ea typeface="Cambria" pitchFamily="34" charset="-122"/>
-                <a:cs typeface="Cambria" pitchFamily="34" charset="-120"/>
+                  <a:srgbClr val="FFFFFF"/>
+                </a:solidFill>
+                <a:latin typeface="Telegraf" pitchFamily="34" charset="0"/>
+                <a:ea typeface="Telegraf" pitchFamily="34" charset="-122"/>
+                <a:cs typeface="Telegraf" pitchFamily="34" charset="-120"/>
               </a:rPr>
               <a:t>What that buys an operations team</a:t>
             </a:r>
@@ -11837,11 +11837,11 @@
             </a:avLst>
           </a:prstGeom>
           <a:solidFill>
-            <a:srgbClr val="EDF3F6"/>
+            <a:srgbClr val="161616"/>
           </a:solidFill>
           <a:ln w="12700">
             <a:solidFill>
-              <a:srgbClr val="EDF3F6"/>
+              <a:srgbClr val="161616"/>
             </a:solidFill>
             <a:prstDash val="solid"/>
           </a:ln>
@@ -11874,11 +11874,11 @@
             <a:r>
               <a:rPr lang="en-US" sz="2000" b="1" dirty="0">
                 <a:solidFill>
-                  <a:srgbClr val="1C7293"/>
-                </a:solidFill>
-                <a:latin typeface="Cambria" pitchFamily="34" charset="0"/>
-                <a:ea typeface="Cambria" pitchFamily="34" charset="-122"/>
-                <a:cs typeface="Cambria" pitchFamily="34" charset="-120"/>
+                  <a:srgbClr val="00A19C"/>
+                </a:solidFill>
+                <a:latin typeface="Telegraf" pitchFamily="34" charset="0"/>
+                <a:ea typeface="Telegraf" pitchFamily="34" charset="-122"/>
+                <a:cs typeface="Telegraf" pitchFamily="34" charset="-120"/>
               </a:rPr>
               <a:t>Test before you touch</a:t>
             </a:r>
@@ -11916,11 +11916,11 @@
             <a:r>
               <a:rPr lang="en-US" sz="1700" dirty="0">
                 <a:solidFill>
-                  <a:srgbClr val="12242E"/>
-                </a:solidFill>
-                <a:latin typeface="Calibri" pitchFamily="34" charset="0"/>
-                <a:ea typeface="Calibri" pitchFamily="34" charset="-122"/>
-                <a:cs typeface="Calibri" pitchFamily="34" charset="-120"/>
+                  <a:srgbClr val="FFFFFF"/>
+                </a:solidFill>
+                <a:latin typeface="Telegraf" pitchFamily="34" charset="0"/>
+                <a:ea typeface="Telegraf" pitchFamily="34" charset="-122"/>
+                <a:cs typeface="Telegraf" pitchFamily="34" charset="-120"/>
               </a:rPr>
               <a:t>Run the logic against a simulated plant on a laptop. Prove the change works before it goes near a live process.</a:t>
             </a:r>
@@ -11945,11 +11945,11 @@
             </a:avLst>
           </a:prstGeom>
           <a:solidFill>
-            <a:srgbClr val="EDF3F6"/>
+            <a:srgbClr val="161616"/>
           </a:solidFill>
           <a:ln w="12700">
             <a:solidFill>
-              <a:srgbClr val="EDF3F6"/>
+              <a:srgbClr val="161616"/>
             </a:solidFill>
             <a:prstDash val="solid"/>
           </a:ln>
@@ -11982,11 +11982,11 @@
             <a:r>
               <a:rPr lang="en-US" sz="2000" b="1" dirty="0">
                 <a:solidFill>
-                  <a:srgbClr val="1C7293"/>
-                </a:solidFill>
-                <a:latin typeface="Cambria" pitchFamily="34" charset="0"/>
-                <a:ea typeface="Cambria" pitchFamily="34" charset="-122"/>
-                <a:cs typeface="Cambria" pitchFamily="34" charset="-120"/>
+                  <a:srgbClr val="00A19C"/>
+                </a:solidFill>
+                <a:latin typeface="Telegraf" pitchFamily="34" charset="0"/>
+                <a:ea typeface="Telegraf" pitchFamily="34" charset="-122"/>
+                <a:cs typeface="Telegraf" pitchFamily="34" charset="-120"/>
               </a:rPr>
               <a:t>Recover by redeploy</a:t>
             </a:r>
@@ -12024,11 +12024,11 @@
             <a:r>
               <a:rPr lang="en-US" sz="1700" dirty="0">
                 <a:solidFill>
-                  <a:srgbClr val="12242E"/>
-                </a:solidFill>
-                <a:latin typeface="Calibri" pitchFamily="34" charset="0"/>
-                <a:ea typeface="Calibri" pitchFamily="34" charset="-122"/>
-                <a:cs typeface="Calibri" pitchFamily="34" charset="-120"/>
+                  <a:srgbClr val="FFFFFF"/>
+                </a:solidFill>
+                <a:latin typeface="Telegraf" pitchFamily="34" charset="0"/>
+                <a:ea typeface="Telegraf" pitchFamily="34" charset="-122"/>
+                <a:cs typeface="Telegraf" pitchFamily="34" charset="-120"/>
               </a:rPr>
               <a:t>A failed node isn't a hunt for a discontinued card. The application redeploys onto working hardware.</a:t>
             </a:r>
@@ -12053,11 +12053,11 @@
             </a:avLst>
           </a:prstGeom>
           <a:solidFill>
-            <a:srgbClr val="EDF3F6"/>
+            <a:srgbClr val="161616"/>
           </a:solidFill>
           <a:ln w="12700">
             <a:solidFill>
-              <a:srgbClr val="EDF3F6"/>
+              <a:srgbClr val="161616"/>
             </a:solidFill>
             <a:prstDash val="solid"/>
           </a:ln>
@@ -12090,11 +12090,11 @@
             <a:r>
               <a:rPr lang="en-US" sz="2000" b="1" dirty="0">
                 <a:solidFill>
-                  <a:srgbClr val="1C7293"/>
-                </a:solidFill>
-                <a:latin typeface="Cambria" pitchFamily="34" charset="0"/>
-                <a:ea typeface="Cambria" pitchFamily="34" charset="-122"/>
-                <a:cs typeface="Cambria" pitchFamily="34" charset="-120"/>
+                  <a:srgbClr val="00A19C"/>
+                </a:solidFill>
+                <a:latin typeface="Telegraf" pitchFamily="34" charset="0"/>
+                <a:ea typeface="Telegraf" pitchFamily="34" charset="-122"/>
+                <a:cs typeface="Telegraf" pitchFamily="34" charset="-120"/>
               </a:rPr>
               <a:t>Write once, deploy everywhere</a:t>
             </a:r>
@@ -12132,11 +12132,11 @@
             <a:r>
               <a:rPr lang="en-US" sz="1700" dirty="0">
                 <a:solidFill>
-                  <a:srgbClr val="12242E"/>
-                </a:solidFill>
-                <a:latin typeface="Calibri" pitchFamily="34" charset="0"/>
-                <a:ea typeface="Calibri" pitchFamily="34" charset="-122"/>
-                <a:cs typeface="Calibri" pitchFamily="34" charset="-120"/>
+                  <a:srgbClr val="FFFFFF"/>
+                </a:solidFill>
+                <a:latin typeface="Telegraf" pitchFamily="34" charset="0"/>
+                <a:ea typeface="Telegraf" pitchFamily="34" charset="-122"/>
+                <a:cs typeface="Telegraf" pitchFamily="34" charset="-120"/>
               </a:rPr>
               <a:t>One lift-station sequence, written once, deployed to forty sites instead of re-engineered forty times.</a:t>
             </a:r>
@@ -12161,11 +12161,11 @@
             </a:avLst>
           </a:prstGeom>
           <a:solidFill>
-            <a:srgbClr val="EDF3F6"/>
+            <a:srgbClr val="161616"/>
           </a:solidFill>
           <a:ln w="12700">
             <a:solidFill>
-              <a:srgbClr val="EDF3F6"/>
+              <a:srgbClr val="161616"/>
             </a:solidFill>
             <a:prstDash val="solid"/>
           </a:ln>
@@ -12198,11 +12198,11 @@
             <a:r>
               <a:rPr lang="en-US" sz="2000" b="1" dirty="0">
                 <a:solidFill>
-                  <a:srgbClr val="1C7293"/>
-                </a:solidFill>
-                <a:latin typeface="Cambria" pitchFamily="34" charset="0"/>
-                <a:ea typeface="Cambria" pitchFamily="34" charset="-122"/>
-                <a:cs typeface="Cambria" pitchFamily="34" charset="-120"/>
+                  <a:srgbClr val="00A19C"/>
+                </a:solidFill>
+                <a:latin typeface="Telegraf" pitchFamily="34" charset="0"/>
+                <a:ea typeface="Telegraf" pitchFamily="34" charset="-122"/>
+                <a:cs typeface="Telegraf" pitchFamily="34" charset="-120"/>
               </a:rPr>
               <a:t>Get data out without a new box</a:t>
             </a:r>
@@ -12240,11 +12240,11 @@
             <a:r>
               <a:rPr lang="en-US" sz="1700" dirty="0">
                 <a:solidFill>
-                  <a:srgbClr val="12242E"/>
-                </a:solidFill>
-                <a:latin typeface="Calibri" pitchFamily="34" charset="0"/>
-                <a:ea typeface="Calibri" pitchFamily="34" charset="-122"/>
-                <a:cs typeface="Calibri" pitchFamily="34" charset="-120"/>
+                  <a:srgbClr val="FFFFFF"/>
+                </a:solidFill>
+                <a:latin typeface="Telegraf" pitchFamily="34" charset="0"/>
+                <a:ea typeface="Telegraf" pitchFamily="34" charset="-122"/>
+                <a:cs typeface="Telegraf" pitchFamily="34" charset="-120"/>
               </a:rPr>
               <a:t>Data access stops being a bolt-on middleware project and becomes part of the control application itself.</a:t>
             </a:r>
@@ -12279,11 +12279,11 @@
             <a:r>
               <a:rPr lang="en-US" sz="2000" i="1" dirty="0">
                 <a:solidFill>
-                  <a:srgbClr val="E8A33D"/>
-                </a:solidFill>
-                <a:latin typeface="Calibri" pitchFamily="34" charset="0"/>
-                <a:ea typeface="Calibri" pitchFamily="34" charset="-122"/>
-                <a:cs typeface="Calibri" pitchFamily="34" charset="-120"/>
+                  <a:srgbClr val="3DCD58"/>
+                </a:solidFill>
+                <a:latin typeface="Telegraf" pitchFamily="34" charset="0"/>
+                <a:ea typeface="Telegraf" pitchFamily="34" charset="-122"/>
+                <a:cs typeface="Telegraf" pitchFamily="34" charset="-120"/>
               </a:rPr>
               <a:t>Notice none of these are features. They're all consequences of one decision.</a:t>
             </a:r>
@@ -12318,11 +12318,11 @@
             <a:r>
               <a:rPr lang="en-US" sz="1100" dirty="0">
                 <a:solidFill>
-                  <a:srgbClr val="AEC1CC"/>
-                </a:solidFill>
-                <a:latin typeface="Calibri" pitchFamily="34" charset="0"/>
-                <a:ea typeface="Calibri" pitchFamily="34" charset="-122"/>
-                <a:cs typeface="Calibri" pitchFamily="34" charset="-120"/>
+                  <a:srgbClr val="3A3A3A"/>
+                </a:solidFill>
+                <a:latin typeface="Telegraf" pitchFamily="34" charset="0"/>
+                <a:ea typeface="Telegraf" pitchFamily="34" charset="-122"/>
+                <a:cs typeface="Telegraf" pitchFamily="34" charset="-120"/>
               </a:rPr>
               <a:t>24</a:t>
             </a:r>
@@ -12344,7 +12344,7 @@
     <p:bg>
       <p:bgPr>
         <a:solidFill>
-          <a:srgbClr val="0E2A38"/>
+          <a:srgbClr val="000000"/>
         </a:solidFill>
       </p:bgPr>
     </p:bg>
@@ -12379,11 +12379,11 @@
             </a:avLst>
           </a:prstGeom>
           <a:solidFill>
-            <a:srgbClr val="E8A33D"/>
+            <a:srgbClr val="3DCD58"/>
           </a:solidFill>
           <a:ln w="12700">
             <a:solidFill>
-              <a:srgbClr val="E8A33D"/>
+              <a:srgbClr val="3DCD58"/>
             </a:solidFill>
             <a:prstDash val="solid"/>
           </a:ln>
@@ -12416,11 +12416,11 @@
             <a:r>
               <a:rPr lang="en-US" sz="1500" b="1" spc="110" kern="0" dirty="0">
                 <a:solidFill>
-                  <a:srgbClr val="0E2A38"/>
-                </a:solidFill>
-                <a:latin typeface="Calibri" pitchFamily="34" charset="0"/>
-                <a:ea typeface="Calibri" pitchFamily="34" charset="-122"/>
-                <a:cs typeface="Calibri" pitchFamily="34" charset="-120"/>
+                  <a:srgbClr val="000000"/>
+                </a:solidFill>
+                <a:latin typeface="Telegraf" pitchFamily="34" charset="0"/>
+                <a:ea typeface="Telegraf" pitchFamily="34" charset="-122"/>
+                <a:cs typeface="Telegraf" pitchFamily="34" charset="-120"/>
               </a:rPr>
               <a:t>THE FINE PRINT</a:t>
             </a:r>
@@ -12457,9 +12457,9 @@
                 <a:solidFill>
                   <a:srgbClr val="FFFFFF"/>
                 </a:solidFill>
-                <a:latin typeface="Cambria" pitchFamily="34" charset="0"/>
-                <a:ea typeface="Cambria" pitchFamily="34" charset="-122"/>
-                <a:cs typeface="Cambria" pitchFamily="34" charset="-120"/>
+                <a:latin typeface="Telegraf" pitchFamily="34" charset="0"/>
+                <a:ea typeface="Telegraf" pitchFamily="34" charset="-122"/>
+                <a:cs typeface="Telegraf" pitchFamily="34" charset="-120"/>
               </a:rPr>
               <a:t>"Software-defined" is not the same as "open"</a:t>
             </a:r>
@@ -12494,11 +12494,11 @@
             <a:r>
               <a:rPr lang="en-US" sz="2100" dirty="0">
                 <a:solidFill>
-                  <a:srgbClr val="7FB1C6"/>
-                </a:solidFill>
-                <a:latin typeface="Calibri" pitchFamily="34" charset="0"/>
-                <a:ea typeface="Calibri" pitchFamily="34" charset="-122"/>
-                <a:cs typeface="Calibri" pitchFamily="34" charset="-120"/>
+                  <a:srgbClr val="6FD9D4"/>
+                </a:solidFill>
+                <a:latin typeface="Telegraf" pitchFamily="34" charset="0"/>
+                <a:ea typeface="Telegraf" pitchFamily="34" charset="-122"/>
+                <a:cs typeface="Telegraf" pitchFamily="34" charset="-120"/>
               </a:rPr>
               <a:t>This is the question to ask every vendor who shows up at your plant with this pitch — including mine.</a:t>
             </a:r>
@@ -12523,11 +12523,11 @@
             </a:avLst>
           </a:prstGeom>
           <a:solidFill>
-            <a:srgbClr val="163B4D"/>
+            <a:srgbClr val="1B1B1B"/>
           </a:solidFill>
           <a:ln w="12700">
             <a:solidFill>
-              <a:srgbClr val="163B4D"/>
+              <a:srgbClr val="1B1B1B"/>
             </a:solidFill>
             <a:prstDash val="solid"/>
           </a:ln>
@@ -12560,11 +12560,11 @@
             <a:r>
               <a:rPr lang="en-US" sz="2500" b="1" dirty="0">
                 <a:solidFill>
-                  <a:srgbClr val="FFFFFF"/>
-                </a:solidFill>
-                <a:latin typeface="Cambria" pitchFamily="34" charset="0"/>
-                <a:ea typeface="Cambria" pitchFamily="34" charset="-122"/>
-                <a:cs typeface="Cambria" pitchFamily="34" charset="-120"/>
+                  <a:srgbClr val="00A19C"/>
+                </a:solidFill>
+                <a:latin typeface="Telegraf" pitchFamily="34" charset="0"/>
+                <a:ea typeface="Telegraf" pitchFamily="34" charset="-122"/>
+                <a:cs typeface="Telegraf" pitchFamily="34" charset="-120"/>
               </a:rPr>
               <a:t>Software-defined</a:t>
             </a:r>
@@ -12602,11 +12602,11 @@
             <a:r>
               <a:rPr lang="en-US" sz="1800" dirty="0">
                 <a:solidFill>
-                  <a:srgbClr val="7FB1C6"/>
-                </a:solidFill>
-                <a:latin typeface="Calibri" pitchFamily="34" charset="0"/>
-                <a:ea typeface="Calibri" pitchFamily="34" charset="-122"/>
-                <a:cs typeface="Calibri" pitchFamily="34" charset="-120"/>
+                  <a:srgbClr val="6FD9D4"/>
+                </a:solidFill>
+                <a:latin typeface="Telegraf" pitchFamily="34" charset="0"/>
+                <a:ea typeface="Telegraf" pitchFamily="34" charset="-122"/>
+                <a:cs typeface="Telegraf" pitchFamily="34" charset="-120"/>
               </a:rPr>
               <a:t>The vendor's stack, virtualized. It runs in a container now — but it's still their runtime, their tools, their hardware roadmap.</a:t>
             </a:r>
@@ -12644,11 +12644,11 @@
             <a:r>
               <a:rPr lang="en-US" sz="1800" b="1" i="1" dirty="0">
                 <a:solidFill>
-                  <a:srgbClr val="FFFFFF"/>
-                </a:solidFill>
-                <a:latin typeface="Calibri" pitchFamily="34" charset="0"/>
-                <a:ea typeface="Calibri" pitchFamily="34" charset="-122"/>
-                <a:cs typeface="Calibri" pitchFamily="34" charset="-120"/>
+                  <a:srgbClr val="E2231A"/>
+                </a:solidFill>
+                <a:latin typeface="Telegraf" pitchFamily="34" charset="0"/>
+                <a:ea typeface="Telegraf" pitchFamily="34" charset="-122"/>
+                <a:cs typeface="Telegraf" pitchFamily="34" charset="-120"/>
               </a:rPr>
               <a:t>You changed where the lock-in lives. You didn't remove it.</a:t>
             </a:r>
@@ -12673,11 +12673,11 @@
             </a:avLst>
           </a:prstGeom>
           <a:solidFill>
-            <a:srgbClr val="163B4D"/>
+            <a:srgbClr val="1B1B1B"/>
           </a:solidFill>
           <a:ln w="12700">
             <a:solidFill>
-              <a:srgbClr val="163B4D"/>
+              <a:srgbClr val="1B1B1B"/>
             </a:solidFill>
             <a:prstDash val="solid"/>
           </a:ln>
@@ -12710,11 +12710,11 @@
             <a:r>
               <a:rPr lang="en-US" sz="2500" b="1" dirty="0">
                 <a:solidFill>
-                  <a:srgbClr val="E8A33D"/>
-                </a:solidFill>
-                <a:latin typeface="Cambria" pitchFamily="34" charset="0"/>
-                <a:ea typeface="Cambria" pitchFamily="34" charset="-122"/>
-                <a:cs typeface="Cambria" pitchFamily="34" charset="-120"/>
+                  <a:srgbClr val="3DCD58"/>
+                </a:solidFill>
+                <a:latin typeface="Telegraf" pitchFamily="34" charset="0"/>
+                <a:ea typeface="Telegraf" pitchFamily="34" charset="-122"/>
+                <a:cs typeface="Telegraf" pitchFamily="34" charset="-120"/>
               </a:rPr>
               <a:t>Open software-defined</a:t>
             </a:r>
@@ -12752,11 +12752,11 @@
             <a:r>
               <a:rPr lang="en-US" sz="1800" dirty="0">
                 <a:solidFill>
-                  <a:srgbClr val="7FB1C6"/>
-                </a:solidFill>
-                <a:latin typeface="Calibri" pitchFamily="34" charset="0"/>
-                <a:ea typeface="Calibri" pitchFamily="34" charset="-122"/>
-                <a:cs typeface="Calibri" pitchFamily="34" charset="-120"/>
+                  <a:srgbClr val="6FD9D4"/>
+                </a:solidFill>
+                <a:latin typeface="Telegraf" pitchFamily="34" charset="0"/>
+                <a:ea typeface="Telegraf" pitchFamily="34" charset="-122"/>
+                <a:cs typeface="Telegraf" pitchFamily="34" charset="-120"/>
               </a:rPr>
               <a:t>A shared runtime any vendor can implement, built on a public standard. Your application is portable across manufacturers.</a:t>
             </a:r>
@@ -12794,11 +12794,11 @@
             <a:r>
               <a:rPr lang="en-US" sz="1800" b="1" i="1" dirty="0">
                 <a:solidFill>
-                  <a:srgbClr val="E8A33D"/>
-                </a:solidFill>
-                <a:latin typeface="Calibri" pitchFamily="34" charset="0"/>
-                <a:ea typeface="Calibri" pitchFamily="34" charset="-122"/>
-                <a:cs typeface="Calibri" pitchFamily="34" charset="-120"/>
+                  <a:srgbClr val="3DCD58"/>
+                </a:solidFill>
+                <a:latin typeface="Telegraf" pitchFamily="34" charset="0"/>
+                <a:ea typeface="Telegraf" pitchFamily="34" charset="-122"/>
+                <a:cs typeface="Telegraf" pitchFamily="34" charset="-120"/>
               </a:rPr>
               <a:t>The lock-in is actually gone — including ours.</a:t>
             </a:r>
@@ -12833,11 +12833,11 @@
             <a:r>
               <a:rPr lang="en-US" sz="1100" dirty="0">
                 <a:solidFill>
-                  <a:srgbClr val="3E6072"/>
-                </a:solidFill>
-                <a:latin typeface="Calibri" pitchFamily="34" charset="0"/>
-                <a:ea typeface="Calibri" pitchFamily="34" charset="-122"/>
-                <a:cs typeface="Calibri" pitchFamily="34" charset="-120"/>
+                  <a:srgbClr val="3A3A3A"/>
+                </a:solidFill>
+                <a:latin typeface="Telegraf" pitchFamily="34" charset="0"/>
+                <a:ea typeface="Telegraf" pitchFamily="34" charset="-122"/>
+                <a:cs typeface="Telegraf" pitchFamily="34" charset="-120"/>
               </a:rPr>
               <a:t>25</a:t>
             </a:r>
@@ -12894,11 +12894,11 @@
             </a:avLst>
           </a:prstGeom>
           <a:solidFill>
-            <a:srgbClr val="1C7293"/>
+            <a:srgbClr val="00A19C"/>
           </a:solidFill>
           <a:ln w="12700">
             <a:solidFill>
-              <a:srgbClr val="1C7293"/>
+              <a:srgbClr val="00A19C"/>
             </a:solidFill>
             <a:prstDash val="solid"/>
           </a:ln>
@@ -12933,9 +12933,9 @@
                 <a:solidFill>
                   <a:srgbClr val="FFFFFF"/>
                 </a:solidFill>
-                <a:latin typeface="Calibri" pitchFamily="34" charset="0"/>
-                <a:ea typeface="Calibri" pitchFamily="34" charset="-122"/>
-                <a:cs typeface="Calibri" pitchFamily="34" charset="-120"/>
+                <a:latin typeface="Telegraf" pitchFamily="34" charset="0"/>
+                <a:ea typeface="Telegraf" pitchFamily="34" charset="-122"/>
+                <a:cs typeface="Telegraf" pitchFamily="34" charset="-120"/>
               </a:rPr>
               <a:t>OPEN, SPECIFICALLY</a:t>
             </a:r>
@@ -12970,11 +12970,11 @@
             <a:r>
               <a:rPr lang="en-US" sz="3800" b="1" dirty="0">
                 <a:solidFill>
-                  <a:srgbClr val="12242E"/>
-                </a:solidFill>
-                <a:latin typeface="Cambria" pitchFamily="34" charset="0"/>
-                <a:ea typeface="Cambria" pitchFamily="34" charset="-122"/>
-                <a:cs typeface="Cambria" pitchFamily="34" charset="-120"/>
+                  <a:srgbClr val="FFFFFF"/>
+                </a:solidFill>
+                <a:latin typeface="Telegraf" pitchFamily="34" charset="0"/>
+                <a:ea typeface="Telegraf" pitchFamily="34" charset="-122"/>
+                <a:cs typeface="Telegraf" pitchFamily="34" charset="-120"/>
               </a:rPr>
               <a:t>There is an actual standard behind this</a:t>
             </a:r>
@@ -12999,11 +12999,11 @@
             </a:avLst>
           </a:prstGeom>
           <a:solidFill>
-            <a:srgbClr val="EDF3F6"/>
+            <a:srgbClr val="161616"/>
           </a:solidFill>
           <a:ln w="12700">
             <a:solidFill>
-              <a:srgbClr val="EDF3F6"/>
+              <a:srgbClr val="161616"/>
             </a:solidFill>
             <a:prstDash val="solid"/>
           </a:ln>
@@ -13036,11 +13036,11 @@
             <a:r>
               <a:rPr lang="en-US" sz="2600" b="1" dirty="0">
                 <a:solidFill>
-                  <a:srgbClr val="1C7293"/>
-                </a:solidFill>
-                <a:latin typeface="Cambria" pitchFamily="34" charset="0"/>
-                <a:ea typeface="Cambria" pitchFamily="34" charset="-122"/>
-                <a:cs typeface="Cambria" pitchFamily="34" charset="-120"/>
+                  <a:srgbClr val="00A19C"/>
+                </a:solidFill>
+                <a:latin typeface="Telegraf" pitchFamily="34" charset="0"/>
+                <a:ea typeface="Telegraf" pitchFamily="34" charset="-122"/>
+                <a:cs typeface="Telegraf" pitchFamily="34" charset="-120"/>
               </a:rPr>
               <a:t>IEC 61499</a:t>
             </a:r>
@@ -13078,11 +13078,11 @@
             <a:r>
               <a:rPr lang="en-US" sz="1700" dirty="0">
                 <a:solidFill>
-                  <a:srgbClr val="12242E"/>
-                </a:solidFill>
-                <a:latin typeface="Calibri" pitchFamily="34" charset="0"/>
-                <a:ea typeface="Calibri" pitchFamily="34" charset="-122"/>
-                <a:cs typeface="Calibri" pitchFamily="34" charset="-120"/>
+                  <a:srgbClr val="FFFFFF"/>
+                </a:solidFill>
+                <a:latin typeface="Telegraf" pitchFamily="34" charset="0"/>
+                <a:ea typeface="Telegraf" pitchFamily="34" charset="-122"/>
+                <a:cs typeface="Telegraf" pitchFamily="34" charset="-120"/>
               </a:rPr>
               <a:t>An international standard for portable, distributed control applications — the successor thinking to the IEC 61131-3 languages you already use.</a:t>
             </a:r>
@@ -13107,11 +13107,11 @@
             </a:avLst>
           </a:prstGeom>
           <a:solidFill>
-            <a:srgbClr val="EDF3F6"/>
+            <a:srgbClr val="161616"/>
           </a:solidFill>
           <a:ln w="12700">
             <a:solidFill>
-              <a:srgbClr val="EDF3F6"/>
+              <a:srgbClr val="161616"/>
             </a:solidFill>
             <a:prstDash val="solid"/>
           </a:ln>
@@ -13144,11 +13144,11 @@
             <a:r>
               <a:rPr lang="en-US" sz="2600" b="1" dirty="0">
                 <a:solidFill>
-                  <a:srgbClr val="1C7293"/>
-                </a:solidFill>
-                <a:latin typeface="Cambria" pitchFamily="34" charset="0"/>
-                <a:ea typeface="Cambria" pitchFamily="34" charset="-122"/>
-                <a:cs typeface="Cambria" pitchFamily="34" charset="-120"/>
+                  <a:srgbClr val="00A19C"/>
+                </a:solidFill>
+                <a:latin typeface="Telegraf" pitchFamily="34" charset="0"/>
+                <a:ea typeface="Telegraf" pitchFamily="34" charset="-122"/>
+                <a:cs typeface="Telegraf" pitchFamily="34" charset="-120"/>
               </a:rPr>
               <a:t>UniversalAutomation.org</a:t>
             </a:r>
@@ -13186,11 +13186,11 @@
             <a:r>
               <a:rPr lang="en-US" sz="1700" dirty="0">
                 <a:solidFill>
-                  <a:srgbClr val="12242E"/>
-                </a:solidFill>
-                <a:latin typeface="Calibri" pitchFamily="34" charset="0"/>
-                <a:ea typeface="Calibri" pitchFamily="34" charset="-122"/>
-                <a:cs typeface="Calibri" pitchFamily="34" charset="-120"/>
+                  <a:srgbClr val="FFFFFF"/>
+                </a:solidFill>
+                <a:latin typeface="Telegraf" pitchFamily="34" charset="0"/>
+                <a:ea typeface="Telegraf" pitchFamily="34" charset="-122"/>
+                <a:cs typeface="Telegraf" pitchFamily="34" charset="-120"/>
               </a:rPr>
               <a:t>A non-profit, founded November 2021, that stewards a shared implementation of that runtime. Any vendor can license and ship it.</a:t>
             </a:r>
@@ -13225,11 +13225,11 @@
             <a:r>
               <a:rPr lang="en-US" sz="2400" b="1" dirty="0">
                 <a:solidFill>
-                  <a:srgbClr val="12242E"/>
-                </a:solidFill>
-                <a:latin typeface="Cambria" pitchFamily="34" charset="0"/>
-                <a:ea typeface="Cambria" pitchFamily="34" charset="-122"/>
-                <a:cs typeface="Cambria" pitchFamily="34" charset="-120"/>
+                  <a:srgbClr val="FFFFFF"/>
+                </a:solidFill>
+                <a:latin typeface="Telegraf" pitchFamily="34" charset="0"/>
+                <a:ea typeface="Telegraf" pitchFamily="34" charset="-122"/>
+                <a:cs typeface="Telegraf" pitchFamily="34" charset="-120"/>
               </a:rPr>
               <a:t>Who's actually in it</a:t>
             </a:r>
@@ -13267,11 +13267,11 @@
             <a:r>
               <a:rPr lang="en-US" sz="2000" dirty="0">
                 <a:solidFill>
-                  <a:srgbClr val="12242E"/>
-                </a:solidFill>
-                <a:latin typeface="Calibri" pitchFamily="34" charset="0"/>
-                <a:ea typeface="Calibri" pitchFamily="34" charset="-122"/>
-                <a:cs typeface="Calibri" pitchFamily="34" charset="-120"/>
+                  <a:srgbClr val="FFFFFF"/>
+                </a:solidFill>
+                <a:latin typeface="Telegraf" pitchFamily="34" charset="0"/>
+                <a:ea typeface="Telegraf" pitchFamily="34" charset="-122"/>
+                <a:cs typeface="Telegraf" pitchFamily="34" charset="-120"/>
               </a:rPr>
               <a:t>90+ members. Board seats held by ExxonMobil, Yokogawa, Intel, Kongsberg Maritime, Novo Nordisk, Schneider Electric and others — end users and competitors sitting at the same table.</a:t>
             </a:r>
@@ -13306,11 +13306,11 @@
             <a:r>
               <a:rPr lang="en-US" sz="1900" i="1" dirty="0">
                 <a:solidFill>
-                  <a:srgbClr val="E8A33D"/>
-                </a:solidFill>
-                <a:latin typeface="Calibri" pitchFamily="34" charset="0"/>
-                <a:ea typeface="Calibri" pitchFamily="34" charset="-122"/>
-                <a:cs typeface="Calibri" pitchFamily="34" charset="-120"/>
+                  <a:srgbClr val="3DCD58"/>
+                </a:solidFill>
+                <a:latin typeface="Telegraf" pitchFamily="34" charset="0"/>
+                <a:ea typeface="Telegraf" pitchFamily="34" charset="-122"/>
+                <a:cs typeface="Telegraf" pitchFamily="34" charset="-120"/>
               </a:rPr>
               <a:t>That matters more than any vendor's roadmap: when the buyers write the standard, portability stops being a favor.</a:t>
             </a:r>
@@ -13345,11 +13345,11 @@
             <a:r>
               <a:rPr lang="en-US" sz="1100" dirty="0">
                 <a:solidFill>
-                  <a:srgbClr val="AEC1CC"/>
-                </a:solidFill>
-                <a:latin typeface="Calibri" pitchFamily="34" charset="0"/>
-                <a:ea typeface="Calibri" pitchFamily="34" charset="-122"/>
-                <a:cs typeface="Calibri" pitchFamily="34" charset="-120"/>
+                  <a:srgbClr val="3A3A3A"/>
+                </a:solidFill>
+                <a:latin typeface="Telegraf" pitchFamily="34" charset="0"/>
+                <a:ea typeface="Telegraf" pitchFamily="34" charset="-122"/>
+                <a:cs typeface="Telegraf" pitchFamily="34" charset="-120"/>
               </a:rPr>
               <a:t>26</a:t>
             </a:r>
@@ -13371,7 +13371,7 @@
     <p:bg>
       <p:bgPr>
         <a:solidFill>
-          <a:srgbClr val="0E2A38"/>
+          <a:srgbClr val="000000"/>
         </a:solidFill>
       </p:bgPr>
     </p:bg>
@@ -13406,11 +13406,11 @@
             </a:avLst>
           </a:prstGeom>
           <a:solidFill>
-            <a:srgbClr val="E8A33D"/>
+            <a:srgbClr val="3DCD58"/>
           </a:solidFill>
           <a:ln w="12700">
             <a:solidFill>
-              <a:srgbClr val="E8A33D"/>
+              <a:srgbClr val="3DCD58"/>
             </a:solidFill>
             <a:prstDash val="solid"/>
           </a:ln>
@@ -13443,11 +13443,11 @@
             <a:r>
               <a:rPr lang="en-US" sz="1500" b="1" spc="110" kern="0" dirty="0">
                 <a:solidFill>
-                  <a:srgbClr val="0E2A38"/>
-                </a:solidFill>
-                <a:latin typeface="Calibri" pitchFamily="34" charset="0"/>
-                <a:ea typeface="Calibri" pitchFamily="34" charset="-122"/>
-                <a:cs typeface="Calibri" pitchFamily="34" charset="-120"/>
+                  <a:srgbClr val="000000"/>
+                </a:solidFill>
+                <a:latin typeface="Telegraf" pitchFamily="34" charset="0"/>
+                <a:ea typeface="Telegraf" pitchFamily="34" charset="-122"/>
+                <a:cs typeface="Telegraf" pitchFamily="34" charset="-120"/>
               </a:rPr>
               <a:t>PROOF</a:t>
             </a:r>
@@ -13484,9 +13484,9 @@
                 <a:solidFill>
                   <a:srgbClr val="FFFFFF"/>
                 </a:solidFill>
-                <a:latin typeface="Cambria" pitchFamily="34" charset="0"/>
-                <a:ea typeface="Cambria" pitchFamily="34" charset="-122"/>
-                <a:cs typeface="Cambria" pitchFamily="34" charset="-120"/>
+                <a:latin typeface="Telegraf" pitchFamily="34" charset="0"/>
+                <a:ea typeface="Telegraf" pitchFamily="34" charset="-122"/>
+                <a:cs typeface="Telegraf" pitchFamily="34" charset="-120"/>
               </a:rPr>
               <a:t>Conroe, Texas — 19 facilities</a:t>
             </a:r>
@@ -13524,11 +13524,11 @@
             <a:r>
               <a:rPr lang="en-US" sz="2100" dirty="0">
                 <a:solidFill>
-                  <a:srgbClr val="7FB1C6"/>
-                </a:solidFill>
-                <a:latin typeface="Calibri" pitchFamily="34" charset="0"/>
-                <a:ea typeface="Calibri" pitchFamily="34" charset="-122"/>
-                <a:cs typeface="Calibri" pitchFamily="34" charset="-120"/>
+                  <a:srgbClr val="6FD9D4"/>
+                </a:solidFill>
+                <a:latin typeface="Telegraf" pitchFamily="34" charset="0"/>
+                <a:ea typeface="Telegraf" pitchFamily="34" charset="-122"/>
+                <a:cs typeface="Telegraf" pitchFamily="34" charset="-120"/>
               </a:rPr>
               <a:t>A fast-growing city north of Houston, modernizing water and wastewater across a $50 million infrastructure program — with open software-defined automation as the control layer.</a:t>
             </a:r>
@@ -13563,11 +13563,11 @@
             <a:r>
               <a:rPr lang="en-US" sz="6000" b="1" dirty="0">
                 <a:solidFill>
-                  <a:srgbClr val="E8A33D"/>
-                </a:solidFill>
-                <a:latin typeface="Cambria" pitchFamily="34" charset="0"/>
-                <a:ea typeface="Cambria" pitchFamily="34" charset="-122"/>
-                <a:cs typeface="Cambria" pitchFamily="34" charset="-120"/>
+                  <a:srgbClr val="3DCD58"/>
+                </a:solidFill>
+                <a:latin typeface="Telegraf" pitchFamily="34" charset="0"/>
+                <a:ea typeface="Telegraf" pitchFamily="34" charset="-122"/>
+                <a:cs typeface="Telegraf" pitchFamily="34" charset="-120"/>
               </a:rPr>
               <a:t>70%</a:t>
             </a:r>
@@ -13602,11 +13602,11 @@
             <a:r>
               <a:rPr lang="en-US" sz="1700" dirty="0">
                 <a:solidFill>
-                  <a:srgbClr val="7FB1C6"/>
-                </a:solidFill>
-                <a:latin typeface="Calibri" pitchFamily="34" charset="0"/>
-                <a:ea typeface="Calibri" pitchFamily="34" charset="-122"/>
-                <a:cs typeface="Calibri" pitchFamily="34" charset="-120"/>
+                  <a:srgbClr val="6FD9D4"/>
+                </a:solidFill>
+                <a:latin typeface="Telegraf" pitchFamily="34" charset="0"/>
+                <a:ea typeface="Telegraf" pitchFamily="34" charset="-122"/>
+                <a:cs typeface="Telegraf" pitchFamily="34" charset="-120"/>
               </a:rPr>
               <a:t>gain in engineering</a:t>
             </a:r>
@@ -13619,11 +13619,11 @@
             <a:r>
               <a:rPr lang="en-US" sz="1700" dirty="0">
                 <a:solidFill>
-                  <a:srgbClr val="7FB1C6"/>
-                </a:solidFill>
-                <a:latin typeface="Calibri" pitchFamily="34" charset="0"/>
-                <a:ea typeface="Calibri" pitchFamily="34" charset="-122"/>
-                <a:cs typeface="Calibri" pitchFamily="34" charset="-120"/>
+                  <a:srgbClr val="6FD9D4"/>
+                </a:solidFill>
+                <a:latin typeface="Telegraf" pitchFamily="34" charset="0"/>
+                <a:ea typeface="Telegraf" pitchFamily="34" charset="-122"/>
+                <a:cs typeface="Telegraf" pitchFamily="34" charset="-120"/>
               </a:rPr>
               <a:t>efficiency</a:t>
             </a:r>
@@ -13658,11 +13658,11 @@
             <a:r>
               <a:rPr lang="en-US" sz="6000" b="1" dirty="0">
                 <a:solidFill>
-                  <a:srgbClr val="E8A33D"/>
-                </a:solidFill>
-                <a:latin typeface="Cambria" pitchFamily="34" charset="0"/>
-                <a:ea typeface="Cambria" pitchFamily="34" charset="-122"/>
-                <a:cs typeface="Cambria" pitchFamily="34" charset="-120"/>
+                  <a:srgbClr val="3DCD58"/>
+                </a:solidFill>
+                <a:latin typeface="Telegraf" pitchFamily="34" charset="0"/>
+                <a:ea typeface="Telegraf" pitchFamily="34" charset="-122"/>
+                <a:cs typeface="Telegraf" pitchFamily="34" charset="-120"/>
               </a:rPr>
               <a:t>80%</a:t>
             </a:r>
@@ -13697,11 +13697,11 @@
             <a:r>
               <a:rPr lang="en-US" sz="1700" dirty="0">
                 <a:solidFill>
-                  <a:srgbClr val="7FB1C6"/>
-                </a:solidFill>
-                <a:latin typeface="Calibri" pitchFamily="34" charset="0"/>
-                <a:ea typeface="Calibri" pitchFamily="34" charset="-122"/>
-                <a:cs typeface="Calibri" pitchFamily="34" charset="-120"/>
+                  <a:srgbClr val="6FD9D4"/>
+                </a:solidFill>
+                <a:latin typeface="Telegraf" pitchFamily="34" charset="0"/>
+                <a:ea typeface="Telegraf" pitchFamily="34" charset="-122"/>
+                <a:cs typeface="Telegraf" pitchFamily="34" charset="-120"/>
               </a:rPr>
               <a:t>faster recovery when</a:t>
             </a:r>
@@ -13714,11 +13714,11 @@
             <a:r>
               <a:rPr lang="en-US" sz="1700" dirty="0">
                 <a:solidFill>
-                  <a:srgbClr val="7FB1C6"/>
-                </a:solidFill>
-                <a:latin typeface="Calibri" pitchFamily="34" charset="0"/>
-                <a:ea typeface="Calibri" pitchFamily="34" charset="-122"/>
-                <a:cs typeface="Calibri" pitchFamily="34" charset="-120"/>
+                  <a:srgbClr val="6FD9D4"/>
+                </a:solidFill>
+                <a:latin typeface="Telegraf" pitchFamily="34" charset="0"/>
+                <a:ea typeface="Telegraf" pitchFamily="34" charset="-122"/>
+                <a:cs typeface="Telegraf" pitchFamily="34" charset="-120"/>
               </a:rPr>
               <a:t>something goes down</a:t>
             </a:r>
@@ -13753,11 +13753,11 @@
             <a:r>
               <a:rPr lang="en-US" sz="6000" b="1" dirty="0">
                 <a:solidFill>
-                  <a:srgbClr val="E8A33D"/>
-                </a:solidFill>
-                <a:latin typeface="Cambria" pitchFamily="34" charset="0"/>
-                <a:ea typeface="Cambria" pitchFamily="34" charset="-122"/>
-                <a:cs typeface="Cambria" pitchFamily="34" charset="-120"/>
+                  <a:srgbClr val="3DCD58"/>
+                </a:solidFill>
+                <a:latin typeface="Telegraf" pitchFamily="34" charset="0"/>
+                <a:ea typeface="Telegraf" pitchFamily="34" charset="-122"/>
+                <a:cs typeface="Telegraf" pitchFamily="34" charset="-120"/>
               </a:rPr>
               <a:t>5 hrs</a:t>
             </a:r>
@@ -13792,11 +13792,11 @@
             <a:r>
               <a:rPr lang="en-US" sz="1700" dirty="0">
                 <a:solidFill>
-                  <a:srgbClr val="7FB1C6"/>
-                </a:solidFill>
-                <a:latin typeface="Calibri" pitchFamily="34" charset="0"/>
-                <a:ea typeface="Calibri" pitchFamily="34" charset="-122"/>
-                <a:cs typeface="Calibri" pitchFamily="34" charset="-120"/>
+                  <a:srgbClr val="6FD9D4"/>
+                </a:solidFill>
+                <a:latin typeface="Telegraf" pitchFamily="34" charset="0"/>
+                <a:ea typeface="Telegraf" pitchFamily="34" charset="-122"/>
+                <a:cs typeface="Telegraf" pitchFamily="34" charset="-120"/>
               </a:rPr>
               <a:t>of daily manual data</a:t>
             </a:r>
@@ -13809,11 +13809,11 @@
             <a:r>
               <a:rPr lang="en-US" sz="1700" dirty="0">
                 <a:solidFill>
-                  <a:srgbClr val="7FB1C6"/>
-                </a:solidFill>
-                <a:latin typeface="Calibri" pitchFamily="34" charset="0"/>
-                <a:ea typeface="Calibri" pitchFamily="34" charset="-122"/>
-                <a:cs typeface="Calibri" pitchFamily="34" charset="-120"/>
+                  <a:srgbClr val="6FD9D4"/>
+                </a:solidFill>
+                <a:latin typeface="Telegraf" pitchFamily="34" charset="0"/>
+                <a:ea typeface="Telegraf" pitchFamily="34" charset="-122"/>
+                <a:cs typeface="Telegraf" pitchFamily="34" charset="-120"/>
               </a:rPr>
               <a:t>collection → minutes</a:t>
             </a:r>
@@ -13850,9 +13850,9 @@
                 <a:solidFill>
                   <a:srgbClr val="FFFFFF"/>
                 </a:solidFill>
-                <a:latin typeface="Calibri" pitchFamily="34" charset="0"/>
-                <a:ea typeface="Calibri" pitchFamily="34" charset="-122"/>
-                <a:cs typeface="Calibri" pitchFamily="34" charset="-120"/>
+                <a:latin typeface="Telegraf" pitchFamily="34" charset="0"/>
+                <a:ea typeface="Telegraf" pitchFamily="34" charset="-122"/>
+                <a:cs typeface="Telegraf" pitchFamily="34" charset="-120"/>
               </a:rPr>
               <a:t>Post-Harvey, the recovery number is the one Conroe talks about. Note that none of these required replacing the plant.</a:t>
             </a:r>
@@ -13887,11 +13887,11 @@
             <a:r>
               <a:rPr lang="en-US" sz="1100" dirty="0">
                 <a:solidFill>
-                  <a:srgbClr val="3E6072"/>
-                </a:solidFill>
-                <a:latin typeface="Calibri" pitchFamily="34" charset="0"/>
-                <a:ea typeface="Calibri" pitchFamily="34" charset="-122"/>
-                <a:cs typeface="Calibri" pitchFamily="34" charset="-120"/>
+                  <a:srgbClr val="3A3A3A"/>
+                </a:solidFill>
+                <a:latin typeface="Telegraf" pitchFamily="34" charset="0"/>
+                <a:ea typeface="Telegraf" pitchFamily="34" charset="-122"/>
+                <a:cs typeface="Telegraf" pitchFamily="34" charset="-120"/>
               </a:rPr>
               <a:t>Source: City of Conroe / Schneider Electric, announced WEFTEC 2025</a:t>
             </a:r>
@@ -13926,11 +13926,11 @@
             <a:r>
               <a:rPr lang="en-US" sz="1100" dirty="0">
                 <a:solidFill>
-                  <a:srgbClr val="3E6072"/>
-                </a:solidFill>
-                <a:latin typeface="Calibri" pitchFamily="34" charset="0"/>
-                <a:ea typeface="Calibri" pitchFamily="34" charset="-122"/>
-                <a:cs typeface="Calibri" pitchFamily="34" charset="-120"/>
+                  <a:srgbClr val="3A3A3A"/>
+                </a:solidFill>
+                <a:latin typeface="Telegraf" pitchFamily="34" charset="0"/>
+                <a:ea typeface="Telegraf" pitchFamily="34" charset="-122"/>
+                <a:cs typeface="Telegraf" pitchFamily="34" charset="-120"/>
               </a:rPr>
               <a:t>27</a:t>
             </a:r>
@@ -13987,11 +13987,11 @@
             </a:avLst>
           </a:prstGeom>
           <a:solidFill>
-            <a:srgbClr val="1C7293"/>
+            <a:srgbClr val="00A19C"/>
           </a:solidFill>
           <a:ln w="12700">
             <a:solidFill>
-              <a:srgbClr val="1C7293"/>
+              <a:srgbClr val="00A19C"/>
             </a:solidFill>
             <a:prstDash val="solid"/>
           </a:ln>
@@ -14026,9 +14026,9 @@
                 <a:solidFill>
                   <a:srgbClr val="FFFFFF"/>
                 </a:solidFill>
-                <a:latin typeface="Calibri" pitchFamily="34" charset="0"/>
-                <a:ea typeface="Calibri" pitchFamily="34" charset="-122"/>
-                <a:cs typeface="Calibri" pitchFamily="34" charset="-120"/>
+                <a:latin typeface="Telegraf" pitchFamily="34" charset="0"/>
+                <a:ea typeface="Telegraf" pitchFamily="34" charset="-122"/>
+                <a:cs typeface="Telegraf" pitchFamily="34" charset="-120"/>
               </a:rPr>
               <a:t>PROOF</a:t>
             </a:r>
@@ -14063,11 +14063,11 @@
             <a:r>
               <a:rPr lang="en-US" sz="3800" b="1" dirty="0">
                 <a:solidFill>
-                  <a:srgbClr val="12242E"/>
-                </a:solidFill>
-                <a:latin typeface="Cambria" pitchFamily="34" charset="0"/>
-                <a:ea typeface="Cambria" pitchFamily="34" charset="-122"/>
-                <a:cs typeface="Cambria" pitchFamily="34" charset="-120"/>
+                  <a:srgbClr val="FFFFFF"/>
+                </a:solidFill>
+                <a:latin typeface="Telegraf" pitchFamily="34" charset="0"/>
+                <a:ea typeface="Telegraf" pitchFamily="34" charset="-122"/>
+                <a:cs typeface="Telegraf" pitchFamily="34" charset="-120"/>
               </a:rPr>
               <a:t>And it isn't one city in Texas</a:t>
             </a:r>
@@ -14092,11 +14092,11 @@
             </a:avLst>
           </a:prstGeom>
           <a:solidFill>
-            <a:srgbClr val="EDF3F6"/>
+            <a:srgbClr val="161616"/>
           </a:solidFill>
           <a:ln w="12700">
             <a:solidFill>
-              <a:srgbClr val="EDF3F6"/>
+              <a:srgbClr val="161616"/>
             </a:solidFill>
             <a:prstDash val="solid"/>
           </a:ln>
@@ -14129,11 +14129,11 @@
             <a:r>
               <a:rPr lang="en-US" sz="2100" b="1" dirty="0">
                 <a:solidFill>
-                  <a:srgbClr val="1C7293"/>
-                </a:solidFill>
-                <a:latin typeface="Cambria" pitchFamily="34" charset="0"/>
-                <a:ea typeface="Cambria" pitchFamily="34" charset="-122"/>
-                <a:cs typeface="Cambria" pitchFamily="34" charset="-120"/>
+                  <a:srgbClr val="00A19C"/>
+                </a:solidFill>
+                <a:latin typeface="Telegraf" pitchFamily="34" charset="0"/>
+                <a:ea typeface="Telegraf" pitchFamily="34" charset="-122"/>
+                <a:cs typeface="Telegraf" pitchFamily="34" charset="-120"/>
               </a:rPr>
               <a:t>İZSU — İzmir, Turkey</a:t>
             </a:r>
@@ -14168,11 +14168,11 @@
             <a:r>
               <a:rPr lang="en-US" sz="1600" dirty="0">
                 <a:solidFill>
-                  <a:srgbClr val="5B7386"/>
-                </a:solidFill>
-                <a:latin typeface="Calibri" pitchFamily="34" charset="0"/>
-                <a:ea typeface="Calibri" pitchFamily="34" charset="-122"/>
-                <a:cs typeface="Calibri" pitchFamily="34" charset="-120"/>
+                  <a:srgbClr val="9AA3AA"/>
+                </a:solidFill>
+                <a:latin typeface="Telegraf" pitchFamily="34" charset="0"/>
+                <a:ea typeface="Telegraf" pitchFamily="34" charset="-122"/>
+                <a:cs typeface="Telegraf" pitchFamily="34" charset="-120"/>
               </a:rPr>
               <a:t>Water reuse for Turkey's 3rd city</a:t>
             </a:r>
@@ -14210,11 +14210,11 @@
             <a:r>
               <a:rPr lang="en-US" sz="1800" dirty="0">
                 <a:solidFill>
-                  <a:srgbClr val="12242E"/>
-                </a:solidFill>
-                <a:latin typeface="Calibri" pitchFamily="34" charset="0"/>
-                <a:ea typeface="Calibri" pitchFamily="34" charset="-122"/>
-                <a:cs typeface="Calibri" pitchFamily="34" charset="-120"/>
+                  <a:srgbClr val="FFFFFF"/>
+                </a:solidFill>
+                <a:latin typeface="Telegraf" pitchFamily="34" charset="0"/>
+                <a:ea typeface="Telegraf" pitchFamily="34" charset="-122"/>
+                <a:cs typeface="Telegraf" pitchFamily="34" charset="-120"/>
               </a:rPr>
               <a:t>2,000–3,000 m³/day recovered for agriculture · 20% less engineering time</a:t>
             </a:r>
@@ -14239,11 +14239,11 @@
             </a:avLst>
           </a:prstGeom>
           <a:solidFill>
-            <a:srgbClr val="EDF3F6"/>
+            <a:srgbClr val="161616"/>
           </a:solidFill>
           <a:ln w="12700">
             <a:solidFill>
-              <a:srgbClr val="EDF3F6"/>
+              <a:srgbClr val="161616"/>
             </a:solidFill>
             <a:prstDash val="solid"/>
           </a:ln>
@@ -14276,11 +14276,11 @@
             <a:r>
               <a:rPr lang="en-US" sz="2100" b="1" dirty="0">
                 <a:solidFill>
-                  <a:srgbClr val="1C7293"/>
-                </a:solidFill>
-                <a:latin typeface="Cambria" pitchFamily="34" charset="0"/>
-                <a:ea typeface="Cambria" pitchFamily="34" charset="-122"/>
-                <a:cs typeface="Cambria" pitchFamily="34" charset="-120"/>
+                  <a:srgbClr val="00A19C"/>
+                </a:solidFill>
+                <a:latin typeface="Telegraf" pitchFamily="34" charset="0"/>
+                <a:ea typeface="Telegraf" pitchFamily="34" charset="-122"/>
+                <a:cs typeface="Telegraf" pitchFamily="34" charset="-120"/>
               </a:rPr>
               <a:t>Anglian Water — U.K.</a:t>
             </a:r>
@@ -14315,11 +14315,11 @@
             <a:r>
               <a:rPr lang="en-US" sz="1600" dirty="0">
                 <a:solidFill>
-                  <a:srgbClr val="5B7386"/>
-                </a:solidFill>
-                <a:latin typeface="Calibri" pitchFamily="34" charset="0"/>
-                <a:ea typeface="Calibri" pitchFamily="34" charset="-122"/>
-                <a:cs typeface="Calibri" pitchFamily="34" charset="-120"/>
+                  <a:srgbClr val="9AA3AA"/>
+                </a:solidFill>
+                <a:latin typeface="Telegraf" pitchFamily="34" charset="0"/>
+                <a:ea typeface="Telegraf" pitchFamily="34" charset="-122"/>
+                <a:cs typeface="Telegraf" pitchFamily="34" charset="-120"/>
               </a:rPr>
               <a:t>Largest water recycling co. by area</a:t>
             </a:r>
@@ -14357,11 +14357,11 @@
             <a:r>
               <a:rPr lang="en-US" sz="1800" dirty="0">
                 <a:solidFill>
-                  <a:srgbClr val="12242E"/>
-                </a:solidFill>
-                <a:latin typeface="Calibri" pitchFamily="34" charset="0"/>
-                <a:ea typeface="Calibri" pitchFamily="34" charset="-122"/>
-                <a:cs typeface="Calibri" pitchFamily="34" charset="-120"/>
+                  <a:srgbClr val="FFFFFF"/>
+                </a:solidFill>
+                <a:latin typeface="Telegraf" pitchFamily="34" charset="0"/>
+                <a:ea typeface="Telegraf" pitchFamily="34" charset="-122"/>
+                <a:cs typeface="Telegraf" pitchFamily="34" charset="-120"/>
               </a:rPr>
               <a:t>Leakage cut 10% — among the lowest in the U.K. · 10% operational efficiency gain</a:t>
             </a:r>
@@ -14386,11 +14386,11 @@
             </a:avLst>
           </a:prstGeom>
           <a:solidFill>
-            <a:srgbClr val="EDF3F6"/>
+            <a:srgbClr val="161616"/>
           </a:solidFill>
           <a:ln w="12700">
             <a:solidFill>
-              <a:srgbClr val="EDF3F6"/>
+              <a:srgbClr val="161616"/>
             </a:solidFill>
             <a:prstDash val="solid"/>
           </a:ln>
@@ -14423,11 +14423,11 @@
             <a:r>
               <a:rPr lang="en-US" sz="2100" b="1" dirty="0">
                 <a:solidFill>
-                  <a:srgbClr val="1C7293"/>
-                </a:solidFill>
-                <a:latin typeface="Cambria" pitchFamily="34" charset="0"/>
-                <a:ea typeface="Cambria" pitchFamily="34" charset="-122"/>
-                <a:cs typeface="Cambria" pitchFamily="34" charset="-120"/>
+                  <a:srgbClr val="00A19C"/>
+                </a:solidFill>
+                <a:latin typeface="Telegraf" pitchFamily="34" charset="0"/>
+                <a:ea typeface="Telegraf" pitchFamily="34" charset="-122"/>
+                <a:cs typeface="Telegraf" pitchFamily="34" charset="-120"/>
               </a:rPr>
               <a:t>Acqua Novara.VCO — Italy</a:t>
             </a:r>
@@ -14462,11 +14462,11 @@
             <a:r>
               <a:rPr lang="en-US" sz="1600" dirty="0">
                 <a:solidFill>
-                  <a:srgbClr val="5B7386"/>
-                </a:solidFill>
-                <a:latin typeface="Calibri" pitchFamily="34" charset="0"/>
-                <a:ea typeface="Calibri" pitchFamily="34" charset="-122"/>
-                <a:cs typeface="Calibri" pitchFamily="34" charset="-120"/>
+                  <a:srgbClr val="9AA3AA"/>
+                </a:solidFill>
+                <a:latin typeface="Telegraf" pitchFamily="34" charset="0"/>
+                <a:ea typeface="Telegraf" pitchFamily="34" charset="-122"/>
+                <a:cs typeface="Telegraf" pitchFamily="34" charset="-120"/>
               </a:rPr>
               <a:t>139 municipalities, 450,000 people</a:t>
             </a:r>
@@ -14504,11 +14504,11 @@
             <a:r>
               <a:rPr lang="en-US" sz="1800" dirty="0">
                 <a:solidFill>
-                  <a:srgbClr val="12242E"/>
-                </a:solidFill>
-                <a:latin typeface="Calibri" pitchFamily="34" charset="0"/>
-                <a:ea typeface="Calibri" pitchFamily="34" charset="-122"/>
-                <a:cs typeface="Calibri" pitchFamily="34" charset="-120"/>
+                  <a:srgbClr val="FFFFFF"/>
+                </a:solidFill>
+                <a:latin typeface="Telegraf" pitchFamily="34" charset="0"/>
+                <a:ea typeface="Telegraf" pitchFamily="34" charset="-122"/>
+                <a:cs typeface="Telegraf" pitchFamily="34" charset="-120"/>
               </a:rPr>
               <a:t>10% less water loss · 15% less energy used</a:t>
             </a:r>
@@ -14543,11 +14543,11 @@
             <a:r>
               <a:rPr lang="en-US" sz="1700" i="1" dirty="0">
                 <a:solidFill>
-                  <a:srgbClr val="E8A33D"/>
-                </a:solidFill>
-                <a:latin typeface="Calibri" pitchFamily="34" charset="0"/>
-                <a:ea typeface="Calibri" pitchFamily="34" charset="-122"/>
-                <a:cs typeface="Calibri" pitchFamily="34" charset="-120"/>
+                  <a:srgbClr val="3DCD58"/>
+                </a:solidFill>
+                <a:latin typeface="Telegraf" pitchFamily="34" charset="0"/>
+                <a:ea typeface="Telegraf" pitchFamily="34" charset="-122"/>
+                <a:cs typeface="Telegraf" pitchFamily="34" charset="-120"/>
               </a:rPr>
               <a:t>Different regulators, different climates, different vendors on site. Same architectural move.</a:t>
             </a:r>
@@ -14582,11 +14582,11 @@
             <a:r>
               <a:rPr lang="en-US" sz="1100" dirty="0">
                 <a:solidFill>
-                  <a:srgbClr val="5B7386"/>
-                </a:solidFill>
-                <a:latin typeface="Calibri" pitchFamily="34" charset="0"/>
-                <a:ea typeface="Calibri" pitchFamily="34" charset="-122"/>
-                <a:cs typeface="Calibri" pitchFamily="34" charset="-120"/>
+                  <a:srgbClr val="9AA3AA"/>
+                </a:solidFill>
+                <a:latin typeface="Telegraf" pitchFamily="34" charset="0"/>
+                <a:ea typeface="Telegraf" pitchFamily="34" charset="-122"/>
+                <a:cs typeface="Telegraf" pitchFamily="34" charset="-120"/>
               </a:rPr>
               <a:t>Source: Frost &amp; Sullivan, Modernising Water and Wastewater Operations, 2025</a:t>
             </a:r>
@@ -14621,11 +14621,11 @@
             <a:r>
               <a:rPr lang="en-US" sz="1100" dirty="0">
                 <a:solidFill>
-                  <a:srgbClr val="AEC1CC"/>
-                </a:solidFill>
-                <a:latin typeface="Calibri" pitchFamily="34" charset="0"/>
-                <a:ea typeface="Calibri" pitchFamily="34" charset="-122"/>
-                <a:cs typeface="Calibri" pitchFamily="34" charset="-120"/>
+                  <a:srgbClr val="3A3A3A"/>
+                </a:solidFill>
+                <a:latin typeface="Telegraf" pitchFamily="34" charset="0"/>
+                <a:ea typeface="Telegraf" pitchFamily="34" charset="-122"/>
+                <a:cs typeface="Telegraf" pitchFamily="34" charset="-120"/>
               </a:rPr>
               <a:t>28</a:t>
             </a:r>
@@ -14682,11 +14682,11 @@
             </a:avLst>
           </a:prstGeom>
           <a:solidFill>
-            <a:srgbClr val="1C7293"/>
+            <a:srgbClr val="00A19C"/>
           </a:solidFill>
           <a:ln w="12700">
             <a:solidFill>
-              <a:srgbClr val="1C7293"/>
+              <a:srgbClr val="00A19C"/>
             </a:solidFill>
             <a:prstDash val="solid"/>
           </a:ln>
@@ -14721,9 +14721,9 @@
                 <a:solidFill>
                   <a:srgbClr val="FFFFFF"/>
                 </a:solidFill>
-                <a:latin typeface="Calibri" pitchFamily="34" charset="0"/>
-                <a:ea typeface="Calibri" pitchFamily="34" charset="-122"/>
-                <a:cs typeface="Calibri" pitchFamily="34" charset="-120"/>
+                <a:latin typeface="Telegraf" pitchFamily="34" charset="0"/>
+                <a:ea typeface="Telegraf" pitchFamily="34" charset="-122"/>
+                <a:cs typeface="Telegraf" pitchFamily="34" charset="-120"/>
               </a:rPr>
               <a:t>PICTURE IT</a:t>
             </a:r>
@@ -14758,11 +14758,11 @@
             <a:r>
               <a:rPr lang="en-US" sz="3800" b="1" dirty="0">
                 <a:solidFill>
-                  <a:srgbClr val="12242E"/>
-                </a:solidFill>
-                <a:latin typeface="Cambria" pitchFamily="34" charset="0"/>
-                <a:ea typeface="Cambria" pitchFamily="34" charset="-122"/>
-                <a:cs typeface="Cambria" pitchFamily="34" charset="-120"/>
+                  <a:srgbClr val="FFFFFF"/>
+                </a:solidFill>
+                <a:latin typeface="Telegraf" pitchFamily="34" charset="0"/>
+                <a:ea typeface="Telegraf" pitchFamily="34" charset="-122"/>
+                <a:cs typeface="Telegraf" pitchFamily="34" charset="-120"/>
               </a:rPr>
               <a:t>A Tuesday, five years from now</a:t>
             </a:r>
@@ -14787,11 +14787,11 @@
             </a:avLst>
           </a:prstGeom>
           <a:solidFill>
-            <a:srgbClr val="1C7293"/>
+            <a:srgbClr val="00A19C"/>
           </a:solidFill>
           <a:ln w="12700">
             <a:solidFill>
-              <a:srgbClr val="1C7293"/>
+              <a:srgbClr val="00A19C"/>
             </a:solidFill>
             <a:prstDash val="solid"/>
           </a:ln>
@@ -14826,9 +14826,9 @@
                 <a:solidFill>
                   <a:srgbClr val="FFFFFF"/>
                 </a:solidFill>
-                <a:latin typeface="Calibri" pitchFamily="34" charset="0"/>
-                <a:ea typeface="Calibri" pitchFamily="34" charset="-122"/>
-                <a:cs typeface="Calibri" pitchFamily="34" charset="-120"/>
+                <a:latin typeface="Telegraf" pitchFamily="34" charset="0"/>
+                <a:ea typeface="Telegraf" pitchFamily="34" charset="-122"/>
+                <a:cs typeface="Telegraf" pitchFamily="34" charset="-120"/>
               </a:rPr>
               <a:t>7:10 AM</a:t>
             </a:r>
@@ -14866,11 +14866,11 @@
             <a:r>
               <a:rPr lang="en-US" sz="1800" dirty="0">
                 <a:solidFill>
-                  <a:srgbClr val="12242E"/>
-                </a:solidFill>
-                <a:latin typeface="Calibri" pitchFamily="34" charset="0"/>
-                <a:ea typeface="Calibri" pitchFamily="34" charset="-122"/>
-                <a:cs typeface="Calibri" pitchFamily="34" charset="-120"/>
+                  <a:srgbClr val="FFFFFF"/>
+                </a:solidFill>
+                <a:latin typeface="Telegraf" pitchFamily="34" charset="0"/>
+                <a:ea typeface="Telegraf" pitchFamily="34" charset="-122"/>
+                <a:cs typeface="Telegraf" pitchFamily="34" charset="-120"/>
               </a:rPr>
               <a:t>A lift station controller fails overnight. The on-call tech doesn't hunt for a discontinued card — the application has already restarted on a spare node. Nobody got called out at 2 AM.</a:t>
             </a:r>
@@ -14895,11 +14895,11 @@
             </a:avLst>
           </a:prstGeom>
           <a:solidFill>
-            <a:srgbClr val="1C7293"/>
+            <a:srgbClr val="00A19C"/>
           </a:solidFill>
           <a:ln w="12700">
             <a:solidFill>
-              <a:srgbClr val="1C7293"/>
+              <a:srgbClr val="00A19C"/>
             </a:solidFill>
             <a:prstDash val="solid"/>
           </a:ln>
@@ -14934,9 +14934,9 @@
                 <a:solidFill>
                   <a:srgbClr val="FFFFFF"/>
                 </a:solidFill>
-                <a:latin typeface="Calibri" pitchFamily="34" charset="0"/>
-                <a:ea typeface="Calibri" pitchFamily="34" charset="-122"/>
-                <a:cs typeface="Calibri" pitchFamily="34" charset="-120"/>
+                <a:latin typeface="Telegraf" pitchFamily="34" charset="0"/>
+                <a:ea typeface="Telegraf" pitchFamily="34" charset="-122"/>
+                <a:cs typeface="Telegraf" pitchFamily="34" charset="-120"/>
               </a:rPr>
               <a:t>10:30 AM</a:t>
             </a:r>
@@ -14974,11 +14974,11 @@
             <a:r>
               <a:rPr lang="en-US" sz="1800" dirty="0">
                 <a:solidFill>
-                  <a:srgbClr val="12242E"/>
-                </a:solidFill>
-                <a:latin typeface="Calibri" pitchFamily="34" charset="0"/>
-                <a:ea typeface="Calibri" pitchFamily="34" charset="-122"/>
-                <a:cs typeface="Calibri" pitchFamily="34" charset="-120"/>
+                  <a:srgbClr val="FFFFFF"/>
+                </a:solidFill>
+                <a:latin typeface="Telegraf" pitchFamily="34" charset="0"/>
+                <a:ea typeface="Telegraf" pitchFamily="34" charset="-122"/>
+                <a:cs typeface="Telegraf" pitchFamily="34" charset="-120"/>
               </a:rPr>
               <a:t>An engineer changes a chemical dosing sequence, tests it against a simulated plant on her laptop, and sends it for review the way she'd send code — with a record of what changed and why.</a:t>
             </a:r>
@@ -15003,11 +15003,11 @@
             </a:avLst>
           </a:prstGeom>
           <a:solidFill>
-            <a:srgbClr val="1C7293"/>
+            <a:srgbClr val="00A19C"/>
           </a:solidFill>
           <a:ln w="12700">
             <a:solidFill>
-              <a:srgbClr val="1C7293"/>
+              <a:srgbClr val="00A19C"/>
             </a:solidFill>
             <a:prstDash val="solid"/>
           </a:ln>
@@ -15042,9 +15042,9 @@
                 <a:solidFill>
                   <a:srgbClr val="FFFFFF"/>
                 </a:solidFill>
-                <a:latin typeface="Calibri" pitchFamily="34" charset="0"/>
-                <a:ea typeface="Calibri" pitchFamily="34" charset="-122"/>
-                <a:cs typeface="Calibri" pitchFamily="34" charset="-120"/>
+                <a:latin typeface="Telegraf" pitchFamily="34" charset="0"/>
+                <a:ea typeface="Telegraf" pitchFamily="34" charset="-122"/>
+                <a:cs typeface="Telegraf" pitchFamily="34" charset="-120"/>
               </a:rPr>
               <a:t>2:00 PM</a:t>
             </a:r>
@@ -15082,11 +15082,11 @@
             <a:r>
               <a:rPr lang="en-US" sz="1800" dirty="0">
                 <a:solidFill>
-                  <a:srgbClr val="12242E"/>
-                </a:solidFill>
-                <a:latin typeface="Calibri" pitchFamily="34" charset="0"/>
-                <a:ea typeface="Calibri" pitchFamily="34" charset="-122"/>
-                <a:cs typeface="Calibri" pitchFamily="34" charset="-120"/>
+                  <a:srgbClr val="FFFFFF"/>
+                </a:solidFill>
+                <a:latin typeface="Telegraf" pitchFamily="34" charset="0"/>
+                <a:ea typeface="Telegraf" pitchFamily="34" charset="-122"/>
+                <a:cs typeface="Telegraf" pitchFamily="34" charset="-120"/>
               </a:rPr>
               <a:t>The utility's asset team pulls pump vibration trends straight from the control application. No new gateway, no integration project, no purchase order.</a:t>
             </a:r>
@@ -15111,11 +15111,11 @@
             </a:avLst>
           </a:prstGeom>
           <a:solidFill>
-            <a:srgbClr val="1C7293"/>
+            <a:srgbClr val="00A19C"/>
           </a:solidFill>
           <a:ln w="12700">
             <a:solidFill>
-              <a:srgbClr val="1C7293"/>
+              <a:srgbClr val="00A19C"/>
             </a:solidFill>
             <a:prstDash val="solid"/>
           </a:ln>
@@ -15150,9 +15150,9 @@
                 <a:solidFill>
                   <a:srgbClr val="FFFFFF"/>
                 </a:solidFill>
-                <a:latin typeface="Calibri" pitchFamily="34" charset="0"/>
-                <a:ea typeface="Calibri" pitchFamily="34" charset="-122"/>
-                <a:cs typeface="Calibri" pitchFamily="34" charset="-120"/>
+                <a:latin typeface="Telegraf" pitchFamily="34" charset="0"/>
+                <a:ea typeface="Telegraf" pitchFamily="34" charset="-122"/>
+                <a:cs typeface="Telegraf" pitchFamily="34" charset="-120"/>
               </a:rPr>
               <a:t>4:45 PM</a:t>
             </a:r>
@@ -15190,11 +15190,11 @@
             <a:r>
               <a:rPr lang="en-US" sz="1800" dirty="0">
                 <a:solidFill>
-                  <a:srgbClr val="12242E"/>
-                </a:solidFill>
-                <a:latin typeface="Calibri" pitchFamily="34" charset="0"/>
-                <a:ea typeface="Calibri" pitchFamily="34" charset="-122"/>
-                <a:cs typeface="Calibri" pitchFamily="34" charset="-120"/>
+                  <a:srgbClr val="FFFFFF"/>
+                </a:solidFill>
+                <a:latin typeface="Telegraf" pitchFamily="34" charset="0"/>
+                <a:ea typeface="Telegraf" pitchFamily="34" charset="-122"/>
+                <a:cs typeface="Telegraf" pitchFamily="34" charset="-120"/>
               </a:rPr>
               <a:t>Procurement issues an RFP for the next expansion without specifying a controller brand — because the logic they already own will run on whoever wins.</a:t>
             </a:r>
@@ -15229,11 +15229,11 @@
             <a:r>
               <a:rPr lang="en-US" sz="1900" i="1" dirty="0">
                 <a:solidFill>
-                  <a:srgbClr val="E8A33D"/>
-                </a:solidFill>
-                <a:latin typeface="Calibri" pitchFamily="34" charset="0"/>
-                <a:ea typeface="Calibri" pitchFamily="34" charset="-122"/>
-                <a:cs typeface="Calibri" pitchFamily="34" charset="-120"/>
+                  <a:srgbClr val="3DCD58"/>
+                </a:solidFill>
+                <a:latin typeface="Telegraf" pitchFamily="34" charset="0"/>
+                <a:ea typeface="Telegraf" pitchFamily="34" charset="-122"/>
+                <a:cs typeface="Telegraf" pitchFamily="34" charset="-120"/>
               </a:rPr>
               <a:t>Nothing on this slide is science fiction. All four are happening somewhere today.</a:t>
             </a:r>
@@ -15268,11 +15268,11 @@
             <a:r>
               <a:rPr lang="en-US" sz="1100" dirty="0">
                 <a:solidFill>
-                  <a:srgbClr val="AEC1CC"/>
-                </a:solidFill>
-                <a:latin typeface="Calibri" pitchFamily="34" charset="0"/>
-                <a:ea typeface="Calibri" pitchFamily="34" charset="-122"/>
-                <a:cs typeface="Calibri" pitchFamily="34" charset="-120"/>
+                  <a:srgbClr val="3A3A3A"/>
+                </a:solidFill>
+                <a:latin typeface="Telegraf" pitchFamily="34" charset="0"/>
+                <a:ea typeface="Telegraf" pitchFamily="34" charset="-122"/>
+                <a:cs typeface="Telegraf" pitchFamily="34" charset="-120"/>
               </a:rPr>
               <a:t>29</a:t>
             </a:r>
@@ -15294,7 +15294,7 @@
     <p:bg>
       <p:bgPr>
         <a:solidFill>
-          <a:srgbClr val="0E2A38"/>
+          <a:srgbClr val="000000"/>
         </a:solidFill>
       </p:bgPr>
     </p:bg>
@@ -15339,11 +15339,11 @@
             <a:r>
               <a:rPr lang="en-US" sz="2600" dirty="0">
                 <a:solidFill>
-                  <a:srgbClr val="7FB1C6"/>
-                </a:solidFill>
-                <a:latin typeface="Calibri" pitchFamily="34" charset="0"/>
-                <a:ea typeface="Calibri" pitchFamily="34" charset="-122"/>
-                <a:cs typeface="Calibri" pitchFamily="34" charset="-120"/>
+                  <a:srgbClr val="6FD9D4"/>
+                </a:solidFill>
+                <a:latin typeface="Telegraf" pitchFamily="34" charset="0"/>
+                <a:ea typeface="Telegraf" pitchFamily="34" charset="-122"/>
+                <a:cs typeface="Telegraf" pitchFamily="34" charset="-120"/>
               </a:rPr>
               <a:t>One question,</a:t>
             </a:r>
@@ -15383,9 +15383,9 @@
                 <a:solidFill>
                   <a:srgbClr val="FFFFFF"/>
                 </a:solidFill>
-                <a:latin typeface="Cambria" pitchFamily="34" charset="0"/>
-                <a:ea typeface="Cambria" pitchFamily="34" charset="-122"/>
-                <a:cs typeface="Cambria" pitchFamily="34" charset="-120"/>
+                <a:latin typeface="Telegraf" pitchFamily="34" charset="0"/>
+                <a:ea typeface="Telegraf" pitchFamily="34" charset="-122"/>
+                <a:cs typeface="Telegraf" pitchFamily="34" charset="-120"/>
               </a:rPr>
               <a:t>Who owns the control logic</a:t>
             </a:r>
@@ -15403,9 +15403,9 @@
                 <a:solidFill>
                   <a:srgbClr val="FFFFFF"/>
                 </a:solidFill>
-                <a:latin typeface="Cambria" pitchFamily="34" charset="0"/>
-                <a:ea typeface="Cambria" pitchFamily="34" charset="-122"/>
-                <a:cs typeface="Cambria" pitchFamily="34" charset="-120"/>
+                <a:latin typeface="Telegraf" pitchFamily="34" charset="0"/>
+                <a:ea typeface="Telegraf" pitchFamily="34" charset="-122"/>
+                <a:cs typeface="Telegraf" pitchFamily="34" charset="-120"/>
               </a:rPr>
               <a:t>running your plant?</a:t>
             </a:r>
@@ -15440,11 +15440,11 @@
             <a:r>
               <a:rPr lang="en-US" sz="2500" i="1" dirty="0">
                 <a:solidFill>
-                  <a:srgbClr val="E8A33D"/>
-                </a:solidFill>
-                <a:latin typeface="Calibri" pitchFamily="34" charset="0"/>
-                <a:ea typeface="Calibri" pitchFamily="34" charset="-122"/>
-                <a:cs typeface="Calibri" pitchFamily="34" charset="-120"/>
+                  <a:srgbClr val="3DCD58"/>
+                </a:solidFill>
+                <a:latin typeface="Telegraf" pitchFamily="34" charset="0"/>
+                <a:ea typeface="Telegraf" pitchFamily="34" charset="-122"/>
+                <a:cs typeface="Telegraf" pitchFamily="34" charset="-120"/>
               </a:rPr>
               <a:t>Not who wrote it. Not who paid for it. Who can move it.</a:t>
             </a:r>
@@ -15479,11 +15479,11 @@
             <a:r>
               <a:rPr lang="en-US" sz="1100" dirty="0">
                 <a:solidFill>
-                  <a:srgbClr val="3E6072"/>
-                </a:solidFill>
-                <a:latin typeface="Calibri" pitchFamily="34" charset="0"/>
-                <a:ea typeface="Calibri" pitchFamily="34" charset="-122"/>
-                <a:cs typeface="Calibri" pitchFamily="34" charset="-120"/>
+                  <a:srgbClr val="3A3A3A"/>
+                </a:solidFill>
+                <a:latin typeface="Telegraf" pitchFamily="34" charset="0"/>
+                <a:ea typeface="Telegraf" pitchFamily="34" charset="-122"/>
+                <a:cs typeface="Telegraf" pitchFamily="34" charset="-120"/>
               </a:rPr>
               <a:t>3</a:t>
             </a:r>
@@ -15540,11 +15540,11 @@
             </a:avLst>
           </a:prstGeom>
           <a:solidFill>
-            <a:srgbClr val="1C7293"/>
+            <a:srgbClr val="00A19C"/>
           </a:solidFill>
           <a:ln w="12700">
             <a:solidFill>
-              <a:srgbClr val="1C7293"/>
+              <a:srgbClr val="00A19C"/>
             </a:solidFill>
             <a:prstDash val="solid"/>
           </a:ln>
@@ -15579,9 +15579,9 @@
                 <a:solidFill>
                   <a:srgbClr val="FFFFFF"/>
                 </a:solidFill>
-                <a:latin typeface="Calibri" pitchFamily="34" charset="0"/>
-                <a:ea typeface="Calibri" pitchFamily="34" charset="-122"/>
-                <a:cs typeface="Calibri" pitchFamily="34" charset="-120"/>
+                <a:latin typeface="Telegraf" pitchFamily="34" charset="0"/>
+                <a:ea typeface="Telegraf" pitchFamily="34" charset="-122"/>
+                <a:cs typeface="Telegraf" pitchFamily="34" charset="-120"/>
               </a:rPr>
               <a:t>FULL DISCLOSURE, AGAIN</a:t>
             </a:r>
@@ -15616,11 +15616,11 @@
             <a:r>
               <a:rPr lang="en-US" sz="3800" b="1" dirty="0">
                 <a:solidFill>
-                  <a:srgbClr val="12242E"/>
-                </a:solidFill>
-                <a:latin typeface="Cambria" pitchFamily="34" charset="0"/>
-                <a:ea typeface="Cambria" pitchFamily="34" charset="-122"/>
-                <a:cs typeface="Cambria" pitchFamily="34" charset="-120"/>
+                  <a:srgbClr val="FFFFFF"/>
+                </a:solidFill>
+                <a:latin typeface="Telegraf" pitchFamily="34" charset="0"/>
+                <a:ea typeface="Telegraf" pitchFamily="34" charset="-122"/>
+                <a:cs typeface="Telegraf" pitchFamily="34" charset="-120"/>
               </a:rPr>
               <a:t>Where my employer sits in this</a:t>
             </a:r>
@@ -15658,11 +15658,11 @@
             <a:r>
               <a:rPr lang="en-US" sz="2100" dirty="0">
                 <a:solidFill>
-                  <a:srgbClr val="12242E"/>
-                </a:solidFill>
-                <a:latin typeface="Calibri" pitchFamily="34" charset="0"/>
-                <a:ea typeface="Calibri" pitchFamily="34" charset="-122"/>
-                <a:cs typeface="Calibri" pitchFamily="34" charset="-120"/>
+                  <a:srgbClr val="FFFFFF"/>
+                </a:solidFill>
+                <a:latin typeface="Telegraf" pitchFamily="34" charset="0"/>
+                <a:ea typeface="Telegraf" pitchFamily="34" charset="-122"/>
+                <a:cs typeface="Telegraf" pitchFamily="34" charset="-120"/>
               </a:rPr>
               <a:t>I've spent forty minutes arguing against the business model my industry built. Here's what my company actually did about it, so you can judge it for yourself.</a:t>
             </a:r>
@@ -15687,11 +15687,11 @@
             </a:avLst>
           </a:prstGeom>
           <a:solidFill>
-            <a:srgbClr val="1C7293"/>
+            <a:srgbClr val="00A19C"/>
           </a:solidFill>
           <a:ln w="12700">
             <a:solidFill>
-              <a:srgbClr val="1C7293"/>
+              <a:srgbClr val="00A19C"/>
             </a:solidFill>
             <a:prstDash val="solid"/>
           </a:ln>
@@ -15726,9 +15726,9 @@
                 <a:solidFill>
                   <a:srgbClr val="FFFFFF"/>
                 </a:solidFill>
-                <a:latin typeface="Cambria" pitchFamily="34" charset="0"/>
-                <a:ea typeface="Cambria" pitchFamily="34" charset="-122"/>
-                <a:cs typeface="Cambria" pitchFamily="34" charset="-120"/>
+                <a:latin typeface="Telegraf" pitchFamily="34" charset="0"/>
+                <a:ea typeface="Telegraf" pitchFamily="34" charset="-122"/>
+                <a:cs typeface="Telegraf" pitchFamily="34" charset="-120"/>
               </a:rPr>
               <a:t>1</a:t>
             </a:r>
@@ -15763,11 +15763,11 @@
             <a:r>
               <a:rPr lang="en-US" sz="2100" b="1" dirty="0">
                 <a:solidFill>
-                  <a:srgbClr val="12242E"/>
-                </a:solidFill>
-                <a:latin typeface="Cambria" pitchFamily="34" charset="0"/>
-                <a:ea typeface="Cambria" pitchFamily="34" charset="-122"/>
-                <a:cs typeface="Cambria" pitchFamily="34" charset="-120"/>
+                  <a:srgbClr val="FFFFFF"/>
+                </a:solidFill>
+                <a:latin typeface="Telegraf" pitchFamily="34" charset="0"/>
+                <a:ea typeface="Telegraf" pitchFamily="34" charset="-122"/>
+                <a:cs typeface="Telegraf" pitchFamily="34" charset="-120"/>
               </a:rPr>
               <a:t>Founding member of UniversalAutomation.org</a:t>
             </a:r>
@@ -15805,11 +15805,11 @@
             <a:r>
               <a:rPr lang="en-US" sz="1700" dirty="0">
                 <a:solidFill>
-                  <a:srgbClr val="5B7386"/>
-                </a:solidFill>
-                <a:latin typeface="Calibri" pitchFamily="34" charset="0"/>
-                <a:ea typeface="Calibri" pitchFamily="34" charset="-122"/>
-                <a:cs typeface="Calibri" pitchFamily="34" charset="-120"/>
+                  <a:srgbClr val="9AA3AA"/>
+                </a:solidFill>
+                <a:latin typeface="Telegraf" pitchFamily="34" charset="0"/>
+                <a:ea typeface="Telegraf" pitchFamily="34" charset="-122"/>
+                <a:cs typeface="Telegraf" pitchFamily="34" charset="-120"/>
               </a:rPr>
               <a:t>One of nine founders in 2021 — alongside competitors and end users.</a:t>
             </a:r>
@@ -15834,11 +15834,11 @@
             </a:avLst>
           </a:prstGeom>
           <a:solidFill>
-            <a:srgbClr val="1C7293"/>
+            <a:srgbClr val="00A19C"/>
           </a:solidFill>
           <a:ln w="12700">
             <a:solidFill>
-              <a:srgbClr val="1C7293"/>
+              <a:srgbClr val="00A19C"/>
             </a:solidFill>
             <a:prstDash val="solid"/>
           </a:ln>
@@ -15873,9 +15873,9 @@
                 <a:solidFill>
                   <a:srgbClr val="FFFFFF"/>
                 </a:solidFill>
-                <a:latin typeface="Cambria" pitchFamily="34" charset="0"/>
-                <a:ea typeface="Cambria" pitchFamily="34" charset="-122"/>
-                <a:cs typeface="Cambria" pitchFamily="34" charset="-120"/>
+                <a:latin typeface="Telegraf" pitchFamily="34" charset="0"/>
+                <a:ea typeface="Telegraf" pitchFamily="34" charset="-122"/>
+                <a:cs typeface="Telegraf" pitchFamily="34" charset="-120"/>
               </a:rPr>
               <a:t>2</a:t>
             </a:r>
@@ -15910,11 +15910,11 @@
             <a:r>
               <a:rPr lang="en-US" sz="2100" b="1" dirty="0">
                 <a:solidFill>
-                  <a:srgbClr val="12242E"/>
-                </a:solidFill>
-                <a:latin typeface="Cambria" pitchFamily="34" charset="0"/>
-                <a:ea typeface="Cambria" pitchFamily="34" charset="-122"/>
-                <a:cs typeface="Cambria" pitchFamily="34" charset="-120"/>
+                  <a:srgbClr val="FFFFFF"/>
+                </a:solidFill>
+                <a:latin typeface="Telegraf" pitchFamily="34" charset="0"/>
+                <a:ea typeface="Telegraf" pitchFamily="34" charset="-122"/>
+                <a:cs typeface="Telegraf" pitchFamily="34" charset="-120"/>
               </a:rPr>
               <a:t>Donated the runtime source code</a:t>
             </a:r>
@@ -15952,11 +15952,11 @@
             <a:r>
               <a:rPr lang="en-US" sz="1700" dirty="0">
                 <a:solidFill>
-                  <a:srgbClr val="5B7386"/>
-                </a:solidFill>
-                <a:latin typeface="Calibri" pitchFamily="34" charset="0"/>
-                <a:ea typeface="Calibri" pitchFamily="34" charset="-122"/>
-                <a:cs typeface="Calibri" pitchFamily="34" charset="-120"/>
+                  <a:srgbClr val="9AA3AA"/>
+                </a:solidFill>
+                <a:latin typeface="Telegraf" pitchFamily="34" charset="0"/>
+                <a:ea typeface="Telegraf" pitchFamily="34" charset="-122"/>
+                <a:cs typeface="Telegraf" pitchFamily="34" charset="-120"/>
               </a:rPr>
               <a:t>The shared IEC 61499 runtime UAO stewards came from Schneider Electric. Any vendor, including our competitors, can license and ship it.</a:t>
             </a:r>
@@ -15981,11 +15981,11 @@
             </a:avLst>
           </a:prstGeom>
           <a:solidFill>
-            <a:srgbClr val="1C7293"/>
+            <a:srgbClr val="00A19C"/>
           </a:solidFill>
           <a:ln w="12700">
             <a:solidFill>
-              <a:srgbClr val="1C7293"/>
+              <a:srgbClr val="00A19C"/>
             </a:solidFill>
             <a:prstDash val="solid"/>
           </a:ln>
@@ -16020,9 +16020,9 @@
                 <a:solidFill>
                   <a:srgbClr val="FFFFFF"/>
                 </a:solidFill>
-                <a:latin typeface="Cambria" pitchFamily="34" charset="0"/>
-                <a:ea typeface="Cambria" pitchFamily="34" charset="-122"/>
-                <a:cs typeface="Cambria" pitchFamily="34" charset="-120"/>
+                <a:latin typeface="Telegraf" pitchFamily="34" charset="0"/>
+                <a:ea typeface="Telegraf" pitchFamily="34" charset="-122"/>
+                <a:cs typeface="Telegraf" pitchFamily="34" charset="-120"/>
               </a:rPr>
               <a:t>3</a:t>
             </a:r>
@@ -16057,11 +16057,11 @@
             <a:r>
               <a:rPr lang="en-US" sz="2100" b="1" dirty="0">
                 <a:solidFill>
-                  <a:srgbClr val="12242E"/>
-                </a:solidFill>
-                <a:latin typeface="Cambria" pitchFamily="34" charset="0"/>
-                <a:ea typeface="Cambria" pitchFamily="34" charset="-122"/>
-                <a:cs typeface="Cambria" pitchFamily="34" charset="-120"/>
+                  <a:srgbClr val="FFFFFF"/>
+                </a:solidFill>
+                <a:latin typeface="Telegraf" pitchFamily="34" charset="0"/>
+                <a:ea typeface="Telegraf" pitchFamily="34" charset="-122"/>
+                <a:cs typeface="Telegraf" pitchFamily="34" charset="-120"/>
               </a:rPr>
               <a:t>EcoStruxure Automation Expert</a:t>
             </a:r>
@@ -16099,11 +16099,11 @@
             <a:r>
               <a:rPr lang="en-US" sz="1700" dirty="0">
                 <a:solidFill>
-                  <a:srgbClr val="5B7386"/>
-                </a:solidFill>
-                <a:latin typeface="Calibri" pitchFamily="34" charset="0"/>
-                <a:ea typeface="Calibri" pitchFamily="34" charset="-122"/>
-                <a:cs typeface="Calibri" pitchFamily="34" charset="-120"/>
+                  <a:srgbClr val="9AA3AA"/>
+                </a:solidFill>
+                <a:latin typeface="Telegraf" pitchFamily="34" charset="0"/>
+                <a:ea typeface="Telegraf" pitchFamily="34" charset="-122"/>
+                <a:cs typeface="Telegraf" pitchFamily="34" charset="-120"/>
               </a:rPr>
               <a:t>Our implementation of it. 530+ active projects globally. It is one option, not the only one — and that's the point of a standard.</a:t>
             </a:r>
@@ -16138,11 +16138,11 @@
             <a:r>
               <a:rPr lang="en-US" sz="1800" i="1" dirty="0">
                 <a:solidFill>
-                  <a:srgbClr val="E8A33D"/>
-                </a:solidFill>
-                <a:latin typeface="Calibri" pitchFamily="34" charset="0"/>
-                <a:ea typeface="Calibri" pitchFamily="34" charset="-122"/>
-                <a:cs typeface="Calibri" pitchFamily="34" charset="-120"/>
+                  <a:srgbClr val="3DCD58"/>
+                </a:solidFill>
+                <a:latin typeface="Telegraf" pitchFamily="34" charset="0"/>
+                <a:ea typeface="Telegraf" pitchFamily="34" charset="-122"/>
+                <a:cs typeface="Telegraf" pitchFamily="34" charset="-120"/>
               </a:rPr>
               <a:t>If this leads you to a competitor's open platform, the talk still worked.</a:t>
             </a:r>
@@ -16177,11 +16177,11 @@
             <a:r>
               <a:rPr lang="en-US" sz="1100" dirty="0">
                 <a:solidFill>
-                  <a:srgbClr val="AEC1CC"/>
-                </a:solidFill>
-                <a:latin typeface="Calibri" pitchFamily="34" charset="0"/>
-                <a:ea typeface="Calibri" pitchFamily="34" charset="-122"/>
-                <a:cs typeface="Calibri" pitchFamily="34" charset="-120"/>
+                  <a:srgbClr val="3A3A3A"/>
+                </a:solidFill>
+                <a:latin typeface="Telegraf" pitchFamily="34" charset="0"/>
+                <a:ea typeface="Telegraf" pitchFamily="34" charset="-122"/>
+                <a:cs typeface="Telegraf" pitchFamily="34" charset="-120"/>
               </a:rPr>
               <a:t>30</a:t>
             </a:r>
@@ -16238,11 +16238,11 @@
             </a:avLst>
           </a:prstGeom>
           <a:solidFill>
-            <a:srgbClr val="1C7293"/>
+            <a:srgbClr val="00A19C"/>
           </a:solidFill>
           <a:ln w="12700">
             <a:solidFill>
-              <a:srgbClr val="1C7293"/>
+              <a:srgbClr val="00A19C"/>
             </a:solidFill>
             <a:prstDash val="solid"/>
           </a:ln>
@@ -16277,9 +16277,9 @@
                 <a:solidFill>
                   <a:srgbClr val="FFFFFF"/>
                 </a:solidFill>
-                <a:latin typeface="Calibri" pitchFamily="34" charset="0"/>
-                <a:ea typeface="Calibri" pitchFamily="34" charset="-122"/>
-                <a:cs typeface="Calibri" pitchFamily="34" charset="-120"/>
+                <a:latin typeface="Telegraf" pitchFamily="34" charset="0"/>
+                <a:ea typeface="Telegraf" pitchFamily="34" charset="-122"/>
+                <a:cs typeface="Telegraf" pitchFamily="34" charset="-120"/>
               </a:rPr>
               <a:t>HOW IT STARTS</a:t>
             </a:r>
@@ -16314,11 +16314,11 @@
             <a:r>
               <a:rPr lang="en-US" sz="3800" b="1" dirty="0">
                 <a:solidFill>
-                  <a:srgbClr val="12242E"/>
-                </a:solidFill>
-                <a:latin typeface="Cambria" pitchFamily="34" charset="0"/>
-                <a:ea typeface="Cambria" pitchFamily="34" charset="-122"/>
-                <a:cs typeface="Cambria" pitchFamily="34" charset="-120"/>
+                  <a:srgbClr val="FFFFFF"/>
+                </a:solidFill>
+                <a:latin typeface="Telegraf" pitchFamily="34" charset="0"/>
+                <a:ea typeface="Telegraf" pitchFamily="34" charset="-122"/>
+                <a:cs typeface="Telegraf" pitchFamily="34" charset="-120"/>
               </a:rPr>
               <a:t>Nobody is asking you to rip anything out</a:t>
             </a:r>
@@ -16343,11 +16343,11 @@
             </a:avLst>
           </a:prstGeom>
           <a:solidFill>
-            <a:srgbClr val="EDF3F6"/>
+            <a:srgbClr val="161616"/>
           </a:solidFill>
           <a:ln w="12700">
             <a:solidFill>
-              <a:srgbClr val="EDF3F6"/>
+              <a:srgbClr val="161616"/>
             </a:solidFill>
             <a:prstDash val="solid"/>
           </a:ln>
@@ -16370,11 +16370,11 @@
             </a:avLst>
           </a:prstGeom>
           <a:solidFill>
-            <a:srgbClr val="E8A33D"/>
+            <a:srgbClr val="3DCD58"/>
           </a:solidFill>
           <a:ln w="12700">
             <a:solidFill>
-              <a:srgbClr val="E8A33D"/>
+              <a:srgbClr val="3DCD58"/>
             </a:solidFill>
             <a:prstDash val="solid"/>
           </a:ln>
@@ -16407,11 +16407,11 @@
             <a:r>
               <a:rPr lang="en-US" sz="2400" b="1" dirty="0">
                 <a:solidFill>
-                  <a:srgbClr val="0E2A38"/>
-                </a:solidFill>
-                <a:latin typeface="Cambria" pitchFamily="34" charset="0"/>
-                <a:ea typeface="Cambria" pitchFamily="34" charset="-122"/>
-                <a:cs typeface="Cambria" pitchFamily="34" charset="-120"/>
+                  <a:srgbClr val="000000"/>
+                </a:solidFill>
+                <a:latin typeface="Telegraf" pitchFamily="34" charset="0"/>
+                <a:ea typeface="Telegraf" pitchFamily="34" charset="-122"/>
+                <a:cs typeface="Telegraf" pitchFamily="34" charset="-120"/>
               </a:rPr>
               <a:t>1</a:t>
             </a:r>
@@ -16446,11 +16446,11 @@
             <a:r>
               <a:rPr lang="en-US" sz="2500" b="1" dirty="0">
                 <a:solidFill>
-                  <a:srgbClr val="1C7293"/>
-                </a:solidFill>
-                <a:latin typeface="Cambria" pitchFamily="34" charset="0"/>
-                <a:ea typeface="Cambria" pitchFamily="34" charset="-122"/>
-                <a:cs typeface="Cambria" pitchFamily="34" charset="-120"/>
+                  <a:srgbClr val="00A19C"/>
+                </a:solidFill>
+                <a:latin typeface="Telegraf" pitchFamily="34" charset="0"/>
+                <a:ea typeface="Telegraf" pitchFamily="34" charset="-122"/>
+                <a:cs typeface="Telegraf" pitchFamily="34" charset="-120"/>
               </a:rPr>
               <a:t>Listen</a:t>
             </a:r>
@@ -16488,11 +16488,11 @@
             <a:r>
               <a:rPr lang="en-US" sz="1600" dirty="0">
                 <a:solidFill>
-                  <a:srgbClr val="12242E"/>
-                </a:solidFill>
-                <a:latin typeface="Calibri" pitchFamily="34" charset="0"/>
-                <a:ea typeface="Calibri" pitchFamily="34" charset="-122"/>
-                <a:cs typeface="Calibri" pitchFamily="34" charset="-120"/>
+                  <a:srgbClr val="FFFFFF"/>
+                </a:solidFill>
+                <a:latin typeface="Telegraf" pitchFamily="34" charset="0"/>
+                <a:ea typeface="Telegraf" pitchFamily="34" charset="-122"/>
+                <a:cs typeface="Telegraf" pitchFamily="34" charset="-120"/>
               </a:rPr>
               <a:t>The new layer goes in alongside your existing PLCs and SCADA with no control authority at all. It reads data, publishes it securely, adds analytics. If it fails, nothing happens to your process.</a:t>
             </a:r>
@@ -16517,11 +16517,11 @@
             </a:avLst>
           </a:prstGeom>
           <a:solidFill>
-            <a:srgbClr val="EDF3F6"/>
+            <a:srgbClr val="161616"/>
           </a:solidFill>
           <a:ln w="12700">
             <a:solidFill>
-              <a:srgbClr val="EDF3F6"/>
+              <a:srgbClr val="161616"/>
             </a:solidFill>
             <a:prstDash val="solid"/>
           </a:ln>
@@ -16544,11 +16544,11 @@
             </a:avLst>
           </a:prstGeom>
           <a:solidFill>
-            <a:srgbClr val="E8A33D"/>
+            <a:srgbClr val="3DCD58"/>
           </a:solidFill>
           <a:ln w="12700">
             <a:solidFill>
-              <a:srgbClr val="E8A33D"/>
+              <a:srgbClr val="3DCD58"/>
             </a:solidFill>
             <a:prstDash val="solid"/>
           </a:ln>
@@ -16581,11 +16581,11 @@
             <a:r>
               <a:rPr lang="en-US" sz="2400" b="1" dirty="0">
                 <a:solidFill>
-                  <a:srgbClr val="0E2A38"/>
-                </a:solidFill>
-                <a:latin typeface="Cambria" pitchFamily="34" charset="0"/>
-                <a:ea typeface="Cambria" pitchFamily="34" charset="-122"/>
-                <a:cs typeface="Cambria" pitchFamily="34" charset="-120"/>
+                  <a:srgbClr val="000000"/>
+                </a:solidFill>
+                <a:latin typeface="Telegraf" pitchFamily="34" charset="0"/>
+                <a:ea typeface="Telegraf" pitchFamily="34" charset="-122"/>
+                <a:cs typeface="Telegraf" pitchFamily="34" charset="-120"/>
               </a:rPr>
               <a:t>2</a:t>
             </a:r>
@@ -16620,11 +16620,11 @@
             <a:r>
               <a:rPr lang="en-US" sz="2500" b="1" dirty="0">
                 <a:solidFill>
-                  <a:srgbClr val="1C7293"/>
-                </a:solidFill>
-                <a:latin typeface="Cambria" pitchFamily="34" charset="0"/>
-                <a:ea typeface="Cambria" pitchFamily="34" charset="-122"/>
-                <a:cs typeface="Cambria" pitchFamily="34" charset="-120"/>
+                  <a:srgbClr val="00A19C"/>
+                </a:solidFill>
+                <a:latin typeface="Telegraf" pitchFamily="34" charset="0"/>
+                <a:ea typeface="Telegraf" pitchFamily="34" charset="-122"/>
+                <a:cs typeface="Telegraf" pitchFamily="34" charset="-120"/>
               </a:rPr>
               <a:t>Rehearse</a:t>
             </a:r>
@@ -16662,11 +16662,11 @@
             <a:r>
               <a:rPr lang="en-US" sz="1600" dirty="0">
                 <a:solidFill>
-                  <a:srgbClr val="12242E"/>
-                </a:solidFill>
-                <a:latin typeface="Calibri" pitchFamily="34" charset="0"/>
-                <a:ea typeface="Calibri" pitchFamily="34" charset="-122"/>
-                <a:cs typeface="Calibri" pitchFamily="34" charset="-120"/>
+                  <a:srgbClr val="FFFFFF"/>
+                </a:solidFill>
+                <a:latin typeface="Telegraf" pitchFamily="34" charset="0"/>
+                <a:ea typeface="Telegraf" pitchFamily="34" charset="-122"/>
+                <a:cs typeface="Telegraf" pitchFamily="34" charset="-120"/>
               </a:rPr>
               <a:t>Build the control logic in parallel. Simulate it. Run it beside the live controller and watch its outputs without letting it act. You are proving it before you trust it.</a:t>
             </a:r>
@@ -16691,11 +16691,11 @@
             </a:avLst>
           </a:prstGeom>
           <a:solidFill>
-            <a:srgbClr val="EDF3F6"/>
+            <a:srgbClr val="161616"/>
           </a:solidFill>
           <a:ln w="12700">
             <a:solidFill>
-              <a:srgbClr val="EDF3F6"/>
+              <a:srgbClr val="161616"/>
             </a:solidFill>
             <a:prstDash val="solid"/>
           </a:ln>
@@ -16718,11 +16718,11 @@
             </a:avLst>
           </a:prstGeom>
           <a:solidFill>
-            <a:srgbClr val="E8A33D"/>
+            <a:srgbClr val="3DCD58"/>
           </a:solidFill>
           <a:ln w="12700">
             <a:solidFill>
-              <a:srgbClr val="E8A33D"/>
+              <a:srgbClr val="3DCD58"/>
             </a:solidFill>
             <a:prstDash val="solid"/>
           </a:ln>
@@ -16755,11 +16755,11 @@
             <a:r>
               <a:rPr lang="en-US" sz="2400" b="1" dirty="0">
                 <a:solidFill>
-                  <a:srgbClr val="0E2A38"/>
-                </a:solidFill>
-                <a:latin typeface="Cambria" pitchFamily="34" charset="0"/>
-                <a:ea typeface="Cambria" pitchFamily="34" charset="-122"/>
-                <a:cs typeface="Cambria" pitchFamily="34" charset="-120"/>
+                  <a:srgbClr val="000000"/>
+                </a:solidFill>
+                <a:latin typeface="Telegraf" pitchFamily="34" charset="0"/>
+                <a:ea typeface="Telegraf" pitchFamily="34" charset="-122"/>
+                <a:cs typeface="Telegraf" pitchFamily="34" charset="-120"/>
               </a:rPr>
               <a:t>3</a:t>
             </a:r>
@@ -16794,11 +16794,11 @@
             <a:r>
               <a:rPr lang="en-US" sz="2500" b="1" dirty="0">
                 <a:solidFill>
-                  <a:srgbClr val="1C7293"/>
-                </a:solidFill>
-                <a:latin typeface="Cambria" pitchFamily="34" charset="0"/>
-                <a:ea typeface="Cambria" pitchFamily="34" charset="-122"/>
-                <a:cs typeface="Cambria" pitchFamily="34" charset="-120"/>
+                  <a:srgbClr val="00A19C"/>
+                </a:solidFill>
+                <a:latin typeface="Telegraf" pitchFamily="34" charset="0"/>
+                <a:ea typeface="Telegraf" pitchFamily="34" charset="-122"/>
+                <a:cs typeface="Telegraf" pitchFamily="34" charset="-120"/>
               </a:rPr>
               <a:t>Hand over</a:t>
             </a:r>
@@ -16836,11 +16836,11 @@
             <a:r>
               <a:rPr lang="en-US" sz="1600" dirty="0">
                 <a:solidFill>
-                  <a:srgbClr val="12242E"/>
-                </a:solidFill>
-                <a:latin typeface="Calibri" pitchFamily="34" charset="0"/>
-                <a:ea typeface="Calibri" pitchFamily="34" charset="-122"/>
-                <a:cs typeface="Calibri" pitchFamily="34" charset="-120"/>
+                  <a:srgbClr val="FFFFFF"/>
+                </a:solidFill>
+                <a:latin typeface="Telegraf" pitchFamily="34" charset="0"/>
+                <a:ea typeface="Telegraf" pitchFamily="34" charset="-122"/>
+                <a:cs typeface="Telegraf" pitchFamily="34" charset="-120"/>
               </a:rPr>
               <a:t>Only when it's proven does control authority move — one asset at a time. The existing I/O, wiring, cabinets and drives stay exactly where they are.</a:t>
             </a:r>
@@ -16875,11 +16875,11 @@
             <a:r>
               <a:rPr lang="en-US" sz="1900" b="1" dirty="0">
                 <a:solidFill>
-                  <a:srgbClr val="12242E"/>
-                </a:solidFill>
-                <a:latin typeface="Calibri" pitchFamily="34" charset="0"/>
-                <a:ea typeface="Calibri" pitchFamily="34" charset="-122"/>
-                <a:cs typeface="Calibri" pitchFamily="34" charset="-120"/>
+                  <a:srgbClr val="FFFFFF"/>
+                </a:solidFill>
+                <a:latin typeface="Telegraf" pitchFamily="34" charset="0"/>
+                <a:ea typeface="Telegraf" pitchFamily="34" charset="-122"/>
+                <a:cs typeface="Telegraf" pitchFamily="34" charset="-120"/>
               </a:rPr>
               <a:t>Phase 1 is a data project with a hardware bill in the low thousands. It is not a control decision, and it is reversible.</a:t>
             </a:r>
@@ -16914,11 +16914,11 @@
             <a:r>
               <a:rPr lang="en-US" sz="1100" dirty="0">
                 <a:solidFill>
-                  <a:srgbClr val="AEC1CC"/>
-                </a:solidFill>
-                <a:latin typeface="Calibri" pitchFamily="34" charset="0"/>
-                <a:ea typeface="Calibri" pitchFamily="34" charset="-122"/>
-                <a:cs typeface="Calibri" pitchFamily="34" charset="-120"/>
+                  <a:srgbClr val="3A3A3A"/>
+                </a:solidFill>
+                <a:latin typeface="Telegraf" pitchFamily="34" charset="0"/>
+                <a:ea typeface="Telegraf" pitchFamily="34" charset="-122"/>
+                <a:cs typeface="Telegraf" pitchFamily="34" charset="-120"/>
               </a:rPr>
               <a:t>31</a:t>
             </a:r>
@@ -16940,7 +16940,7 @@
     <p:bg>
       <p:bgPr>
         <a:solidFill>
-          <a:srgbClr val="0E2A38"/>
+          <a:srgbClr val="000000"/>
         </a:solidFill>
       </p:bgPr>
     </p:bg>
@@ -16975,11 +16975,11 @@
             </a:avLst>
           </a:prstGeom>
           <a:solidFill>
-            <a:srgbClr val="E8A33D"/>
+            <a:srgbClr val="3DCD58"/>
           </a:solidFill>
           <a:ln w="12700">
             <a:solidFill>
-              <a:srgbClr val="E8A33D"/>
+              <a:srgbClr val="3DCD58"/>
             </a:solidFill>
             <a:prstDash val="solid"/>
           </a:ln>
@@ -17012,11 +17012,11 @@
             <a:r>
               <a:rPr lang="en-US" sz="1500" b="1" spc="110" kern="0" dirty="0">
                 <a:solidFill>
-                  <a:srgbClr val="0E2A38"/>
-                </a:solidFill>
-                <a:latin typeface="Calibri" pitchFamily="34" charset="0"/>
-                <a:ea typeface="Calibri" pitchFamily="34" charset="-122"/>
-                <a:cs typeface="Calibri" pitchFamily="34" charset="-120"/>
+                  <a:srgbClr val="000000"/>
+                </a:solidFill>
+                <a:latin typeface="Telegraf" pitchFamily="34" charset="0"/>
+                <a:ea typeface="Telegraf" pitchFamily="34" charset="-122"/>
+                <a:cs typeface="Telegraf" pitchFamily="34" charset="-120"/>
               </a:rPr>
               <a:t>MONDAY MORNING</a:t>
             </a:r>
@@ -17053,9 +17053,9 @@
                 <a:solidFill>
                   <a:srgbClr val="FFFFFF"/>
                 </a:solidFill>
-                <a:latin typeface="Cambria" pitchFamily="34" charset="0"/>
-                <a:ea typeface="Cambria" pitchFamily="34" charset="-122"/>
-                <a:cs typeface="Cambria" pitchFamily="34" charset="-120"/>
+                <a:latin typeface="Telegraf" pitchFamily="34" charset="0"/>
+                <a:ea typeface="Telegraf" pitchFamily="34" charset="-122"/>
+                <a:cs typeface="Telegraf" pitchFamily="34" charset="-120"/>
               </a:rPr>
               <a:t>Three things, none of which cost money</a:t>
             </a:r>
@@ -17080,11 +17080,11 @@
             </a:avLst>
           </a:prstGeom>
           <a:solidFill>
-            <a:srgbClr val="E8A33D"/>
+            <a:srgbClr val="3DCD58"/>
           </a:solidFill>
           <a:ln w="12700">
             <a:solidFill>
-              <a:srgbClr val="E8A33D"/>
+              <a:srgbClr val="3DCD58"/>
             </a:solidFill>
             <a:prstDash val="solid"/>
           </a:ln>
@@ -17117,11 +17117,11 @@
             <a:r>
               <a:rPr lang="en-US" sz="2200" b="1" dirty="0">
                 <a:solidFill>
-                  <a:srgbClr val="0E2A38"/>
-                </a:solidFill>
-                <a:latin typeface="Cambria" pitchFamily="34" charset="0"/>
-                <a:ea typeface="Cambria" pitchFamily="34" charset="-122"/>
-                <a:cs typeface="Cambria" pitchFamily="34" charset="-120"/>
+                  <a:srgbClr val="000000"/>
+                </a:solidFill>
+                <a:latin typeface="Telegraf" pitchFamily="34" charset="0"/>
+                <a:ea typeface="Telegraf" pitchFamily="34" charset="-122"/>
+                <a:cs typeface="Telegraf" pitchFamily="34" charset="-120"/>
               </a:rPr>
               <a:t>1</a:t>
             </a:r>
@@ -17158,9 +17158,9 @@
                 <a:solidFill>
                   <a:srgbClr val="FFFFFF"/>
                 </a:solidFill>
-                <a:latin typeface="Cambria" pitchFamily="34" charset="0"/>
-                <a:ea typeface="Cambria" pitchFamily="34" charset="-122"/>
-                <a:cs typeface="Cambria" pitchFamily="34" charset="-120"/>
+                <a:latin typeface="Telegraf" pitchFamily="34" charset="0"/>
+                <a:ea typeface="Telegraf" pitchFamily="34" charset="-122"/>
+                <a:cs typeface="Telegraf" pitchFamily="34" charset="-120"/>
               </a:rPr>
               <a:t>Find your cliff edge</a:t>
             </a:r>
@@ -17198,11 +17198,11 @@
             <a:r>
               <a:rPr lang="en-US" sz="1800" dirty="0">
                 <a:solidFill>
-                  <a:srgbClr val="7FB1C6"/>
-                </a:solidFill>
-                <a:latin typeface="Calibri" pitchFamily="34" charset="0"/>
-                <a:ea typeface="Calibri" pitchFamily="34" charset="-122"/>
-                <a:cs typeface="Calibri" pitchFamily="34" charset="-120"/>
+                  <a:srgbClr val="6FD9D4"/>
+                </a:solidFill>
+                <a:latin typeface="Telegraf" pitchFamily="34" charset="0"/>
+                <a:ea typeface="Telegraf" pitchFamily="34" charset="-122"/>
+                <a:cs typeface="Telegraf" pitchFamily="34" charset="-120"/>
               </a:rPr>
               <a:t>Pull the list of controllers, drives and operator stations past or nearing end-of-support. Most utilities have never seen that list on one page — and it is usually worse than expected.</a:t>
             </a:r>
@@ -17227,11 +17227,11 @@
             </a:avLst>
           </a:prstGeom>
           <a:solidFill>
-            <a:srgbClr val="E8A33D"/>
+            <a:srgbClr val="3DCD58"/>
           </a:solidFill>
           <a:ln w="12700">
             <a:solidFill>
-              <a:srgbClr val="E8A33D"/>
+              <a:srgbClr val="3DCD58"/>
             </a:solidFill>
             <a:prstDash val="solid"/>
           </a:ln>
@@ -17264,11 +17264,11 @@
             <a:r>
               <a:rPr lang="en-US" sz="2200" b="1" dirty="0">
                 <a:solidFill>
-                  <a:srgbClr val="0E2A38"/>
-                </a:solidFill>
-                <a:latin typeface="Cambria" pitchFamily="34" charset="0"/>
-                <a:ea typeface="Cambria" pitchFamily="34" charset="-122"/>
-                <a:cs typeface="Cambria" pitchFamily="34" charset="-120"/>
+                  <a:srgbClr val="000000"/>
+                </a:solidFill>
+                <a:latin typeface="Telegraf" pitchFamily="34" charset="0"/>
+                <a:ea typeface="Telegraf" pitchFamily="34" charset="-122"/>
+                <a:cs typeface="Telegraf" pitchFamily="34" charset="-120"/>
               </a:rPr>
               <a:t>2</a:t>
             </a:r>
@@ -17305,9 +17305,9 @@
                 <a:solidFill>
                   <a:srgbClr val="FFFFFF"/>
                 </a:solidFill>
-                <a:latin typeface="Cambria" pitchFamily="34" charset="0"/>
-                <a:ea typeface="Cambria" pitchFamily="34" charset="-122"/>
-                <a:cs typeface="Cambria" pitchFamily="34" charset="-120"/>
+                <a:latin typeface="Telegraf" pitchFamily="34" charset="0"/>
+                <a:ea typeface="Telegraf" pitchFamily="34" charset="-122"/>
+                <a:cs typeface="Telegraf" pitchFamily="34" charset="-120"/>
               </a:rPr>
               <a:t>Ask one question in every vendor meeting</a:t>
             </a:r>
@@ -17345,11 +17345,11 @@
             <a:r>
               <a:rPr lang="en-US" sz="1800" dirty="0">
                 <a:solidFill>
-                  <a:srgbClr val="7FB1C6"/>
-                </a:solidFill>
-                <a:latin typeface="Calibri" pitchFamily="34" charset="0"/>
-                <a:ea typeface="Calibri" pitchFamily="34" charset="-122"/>
-                <a:cs typeface="Calibri" pitchFamily="34" charset="-120"/>
+                  <a:srgbClr val="6FD9D4"/>
+                </a:solidFill>
+                <a:latin typeface="Telegraf" pitchFamily="34" charset="0"/>
+                <a:ea typeface="Telegraf" pitchFamily="34" charset="-122"/>
+                <a:cs typeface="Telegraf" pitchFamily="34" charset="-120"/>
               </a:rPr>
               <a:t>"Is your software-defined offering portable to hardware you don't manufacture — yes or no?" Write the answer down. You'll learn a lot from who hesitates.</a:t>
             </a:r>
@@ -17374,11 +17374,11 @@
             </a:avLst>
           </a:prstGeom>
           <a:solidFill>
-            <a:srgbClr val="E8A33D"/>
+            <a:srgbClr val="3DCD58"/>
           </a:solidFill>
           <a:ln w="12700">
             <a:solidFill>
-              <a:srgbClr val="E8A33D"/>
+              <a:srgbClr val="3DCD58"/>
             </a:solidFill>
             <a:prstDash val="solid"/>
           </a:ln>
@@ -17411,11 +17411,11 @@
             <a:r>
               <a:rPr lang="en-US" sz="2200" b="1" dirty="0">
                 <a:solidFill>
-                  <a:srgbClr val="0E2A38"/>
-                </a:solidFill>
-                <a:latin typeface="Cambria" pitchFamily="34" charset="0"/>
-                <a:ea typeface="Cambria" pitchFamily="34" charset="-122"/>
-                <a:cs typeface="Cambria" pitchFamily="34" charset="-120"/>
+                  <a:srgbClr val="000000"/>
+                </a:solidFill>
+                <a:latin typeface="Telegraf" pitchFamily="34" charset="0"/>
+                <a:ea typeface="Telegraf" pitchFamily="34" charset="-122"/>
+                <a:cs typeface="Telegraf" pitchFamily="34" charset="-120"/>
               </a:rPr>
               <a:t>3</a:t>
             </a:r>
@@ -17452,9 +17452,9 @@
                 <a:solidFill>
                   <a:srgbClr val="FFFFFF"/>
                 </a:solidFill>
-                <a:latin typeface="Cambria" pitchFamily="34" charset="0"/>
-                <a:ea typeface="Cambria" pitchFamily="34" charset="-122"/>
-                <a:cs typeface="Cambria" pitchFamily="34" charset="-120"/>
+                <a:latin typeface="Telegraf" pitchFamily="34" charset="0"/>
+                <a:ea typeface="Telegraf" pitchFamily="34" charset="-122"/>
+                <a:cs typeface="Telegraf" pitchFamily="34" charset="-120"/>
               </a:rPr>
               <a:t>Pick one place to prove it</a:t>
             </a:r>
@@ -17492,11 +17492,11 @@
             <a:r>
               <a:rPr lang="en-US" sz="1800" dirty="0">
                 <a:solidFill>
-                  <a:srgbClr val="7FB1C6"/>
-                </a:solidFill>
-                <a:latin typeface="Calibri" pitchFamily="34" charset="0"/>
-                <a:ea typeface="Calibri" pitchFamily="34" charset="-122"/>
-                <a:cs typeface="Calibri" pitchFamily="34" charset="-120"/>
+                  <a:srgbClr val="6FD9D4"/>
+                </a:solidFill>
+                <a:latin typeface="Telegraf" pitchFamily="34" charset="0"/>
+                <a:ea typeface="Telegraf" pitchFamily="34" charset="-122"/>
+                <a:cs typeface="Telegraf" pitchFamily="34" charset="-120"/>
               </a:rPr>
               <a:t>Not the headworks. A remote site, a lift station, a well — somewhere a failure is inconvenient rather than catastrophic. Prove the architecture where the stakes are low.</a:t>
             </a:r>
@@ -17531,11 +17531,11 @@
             <a:r>
               <a:rPr lang="en-US" sz="1900" i="1" dirty="0">
                 <a:solidFill>
-                  <a:srgbClr val="E8A33D"/>
-                </a:solidFill>
-                <a:latin typeface="Calibri" pitchFamily="34" charset="0"/>
-                <a:ea typeface="Calibri" pitchFamily="34" charset="-122"/>
-                <a:cs typeface="Calibri" pitchFamily="34" charset="-120"/>
+                  <a:srgbClr val="3DCD58"/>
+                </a:solidFill>
+                <a:latin typeface="Telegraf" pitchFamily="34" charset="0"/>
+                <a:ea typeface="Telegraf" pitchFamily="34" charset="-122"/>
+                <a:cs typeface="Telegraf" pitchFamily="34" charset="-120"/>
               </a:rPr>
               <a:t>None of this requires a budget cycle. All of it changes the next one.</a:t>
             </a:r>
@@ -17570,11 +17570,11 @@
             <a:r>
               <a:rPr lang="en-US" sz="1100" dirty="0">
                 <a:solidFill>
-                  <a:srgbClr val="3E6072"/>
-                </a:solidFill>
-                <a:latin typeface="Calibri" pitchFamily="34" charset="0"/>
-                <a:ea typeface="Calibri" pitchFamily="34" charset="-122"/>
-                <a:cs typeface="Calibri" pitchFamily="34" charset="-120"/>
+                  <a:srgbClr val="3A3A3A"/>
+                </a:solidFill>
+                <a:latin typeface="Telegraf" pitchFamily="34" charset="0"/>
+                <a:ea typeface="Telegraf" pitchFamily="34" charset="-122"/>
+                <a:cs typeface="Telegraf" pitchFamily="34" charset="-120"/>
               </a:rPr>
               <a:t>32</a:t>
             </a:r>
@@ -17596,7 +17596,7 @@
     <p:bg>
       <p:bgPr>
         <a:solidFill>
-          <a:srgbClr val="0E2A38"/>
+          <a:srgbClr val="000000"/>
         </a:solidFill>
       </p:bgPr>
     </p:bg>
@@ -17629,7 +17629,7 @@
             <a:avLst/>
           </a:prstGeom>
           <a:solidFill>
-            <a:srgbClr val="0B2230"/>
+            <a:srgbClr val="0A0A0A"/>
           </a:solidFill>
           <a:ln w="12700">
             <a:solidFill>
@@ -17669,11 +17669,11 @@
             <a:r>
               <a:rPr lang="en-US" sz="3600" dirty="0">
                 <a:solidFill>
-                  <a:srgbClr val="7FB1C6"/>
-                </a:solidFill>
-                <a:latin typeface="Cambria" pitchFamily="34" charset="0"/>
-                <a:ea typeface="Cambria" pitchFamily="34" charset="-122"/>
-                <a:cs typeface="Cambria" pitchFamily="34" charset="-120"/>
+                  <a:srgbClr val="6FD9D4"/>
+                </a:solidFill>
+                <a:latin typeface="Telegraf" pitchFamily="34" charset="0"/>
+                <a:ea typeface="Telegraf" pitchFamily="34" charset="-122"/>
+                <a:cs typeface="Telegraf" pitchFamily="34" charset="-120"/>
               </a:rPr>
               <a:t>In 1968 we decided logic</a:t>
             </a:r>
@@ -17689,11 +17689,11 @@
             <a:r>
               <a:rPr lang="en-US" sz="3600" dirty="0">
                 <a:solidFill>
-                  <a:srgbClr val="7FB1C6"/>
-                </a:solidFill>
-                <a:latin typeface="Cambria" pitchFamily="34" charset="0"/>
-                <a:ea typeface="Cambria" pitchFamily="34" charset="-122"/>
-                <a:cs typeface="Cambria" pitchFamily="34" charset="-120"/>
+                  <a:srgbClr val="6FD9D4"/>
+                </a:solidFill>
+                <a:latin typeface="Telegraf" pitchFamily="34" charset="0"/>
+                <a:ea typeface="Telegraf" pitchFamily="34" charset="-122"/>
+                <a:cs typeface="Telegraf" pitchFamily="34" charset="-120"/>
               </a:rPr>
               <a:t>shouldn't be welded to copper.</a:t>
             </a:r>
@@ -17731,11 +17731,11 @@
             <a:r>
               <a:rPr lang="en-US" sz="4000" b="1" dirty="0">
                 <a:solidFill>
-                  <a:srgbClr val="E8A33D"/>
-                </a:solidFill>
-                <a:latin typeface="Cambria" pitchFamily="34" charset="0"/>
-                <a:ea typeface="Cambria" pitchFamily="34" charset="-122"/>
-                <a:cs typeface="Cambria" pitchFamily="34" charset="-120"/>
+                  <a:srgbClr val="3DCD58"/>
+                </a:solidFill>
+                <a:latin typeface="Telegraf" pitchFamily="34" charset="0"/>
+                <a:ea typeface="Telegraf" pitchFamily="34" charset="-122"/>
+                <a:cs typeface="Telegraf" pitchFamily="34" charset="-120"/>
               </a:rPr>
               <a:t>We were right. We just stopped halfway.</a:t>
             </a:r>
@@ -17772,9 +17772,9 @@
                 <a:solidFill>
                   <a:srgbClr val="FFFFFF"/>
                 </a:solidFill>
-                <a:latin typeface="Cambria" pitchFamily="34" charset="0"/>
-                <a:ea typeface="Cambria" pitchFamily="34" charset="-122"/>
-                <a:cs typeface="Cambria" pitchFamily="34" charset="-120"/>
+                <a:latin typeface="Telegraf" pitchFamily="34" charset="0"/>
+                <a:ea typeface="Telegraf" pitchFamily="34" charset="-122"/>
+                <a:cs typeface="Telegraf" pitchFamily="34" charset="-120"/>
               </a:rPr>
               <a:t>Questions</a:t>
             </a:r>
@@ -17814,9 +17814,9 @@
                 <a:solidFill>
                   <a:srgbClr val="FFFFFF"/>
                 </a:solidFill>
-                <a:latin typeface="Calibri" pitchFamily="34" charset="0"/>
-                <a:ea typeface="Calibri" pitchFamily="34" charset="-122"/>
-                <a:cs typeface="Calibri" pitchFamily="34" charset="-120"/>
+                <a:latin typeface="Telegraf" pitchFamily="34" charset="0"/>
+                <a:ea typeface="Telegraf" pitchFamily="34" charset="-122"/>
+                <a:cs typeface="Telegraf" pitchFamily="34" charset="-120"/>
               </a:rPr>
               <a:t>Kyle Sanders
 </a:t>
@@ -17833,11 +17833,11 @@
             <a:r>
               <a:rPr lang="en-US" sz="1800" dirty="0">
                 <a:solidFill>
-                  <a:srgbClr val="7FB1C6"/>
-                </a:solidFill>
-                <a:latin typeface="Calibri" pitchFamily="34" charset="0"/>
-                <a:ea typeface="Calibri" pitchFamily="34" charset="-122"/>
-                <a:cs typeface="Calibri" pitchFamily="34" charset="-120"/>
+                  <a:srgbClr val="6FD9D4"/>
+                </a:solidFill>
+                <a:latin typeface="Telegraf" pitchFamily="34" charset="0"/>
+                <a:ea typeface="Telegraf" pitchFamily="34" charset="-122"/>
+                <a:cs typeface="Telegraf" pitchFamily="34" charset="-120"/>
               </a:rPr>
               <a:t>Business Development Manager</a:t>
             </a:r>
@@ -17853,11 +17853,11 @@
             <a:r>
               <a:rPr lang="en-US" sz="1800" dirty="0">
                 <a:solidFill>
-                  <a:srgbClr val="7FB1C6"/>
-                </a:solidFill>
-                <a:latin typeface="Calibri" pitchFamily="34" charset="0"/>
-                <a:ea typeface="Calibri" pitchFamily="34" charset="-122"/>
-                <a:cs typeface="Calibri" pitchFamily="34" charset="-120"/>
+                  <a:srgbClr val="6FD9D4"/>
+                </a:solidFill>
+                <a:latin typeface="Telegraf" pitchFamily="34" charset="0"/>
+                <a:ea typeface="Telegraf" pitchFamily="34" charset="-122"/>
+                <a:cs typeface="Telegraf" pitchFamily="34" charset="-120"/>
               </a:rPr>
               <a:t>Schneider Electric</a:t>
             </a:r>
@@ -17892,11 +17892,11 @@
             <a:r>
               <a:rPr lang="en-US" sz="1100" dirty="0">
                 <a:solidFill>
-                  <a:srgbClr val="3E6072"/>
-                </a:solidFill>
-                <a:latin typeface="Calibri" pitchFamily="34" charset="0"/>
-                <a:ea typeface="Calibri" pitchFamily="34" charset="-122"/>
-                <a:cs typeface="Calibri" pitchFamily="34" charset="-120"/>
+                  <a:srgbClr val="3A3A3A"/>
+                </a:solidFill>
+                <a:latin typeface="Telegraf" pitchFamily="34" charset="0"/>
+                <a:ea typeface="Telegraf" pitchFamily="34" charset="-122"/>
+                <a:cs typeface="Telegraf" pitchFamily="34" charset="-120"/>
               </a:rPr>
               <a:t>33</a:t>
             </a:r>
@@ -17953,11 +17953,11 @@
             </a:avLst>
           </a:prstGeom>
           <a:solidFill>
-            <a:srgbClr val="1C7293"/>
+            <a:srgbClr val="00A19C"/>
           </a:solidFill>
           <a:ln w="12700">
             <a:solidFill>
-              <a:srgbClr val="1C7293"/>
+              <a:srgbClr val="00A19C"/>
             </a:solidFill>
             <a:prstDash val="solid"/>
           </a:ln>
@@ -17992,9 +17992,9 @@
                 <a:solidFill>
                   <a:srgbClr val="FFFFFF"/>
                 </a:solidFill>
-                <a:latin typeface="Calibri" pitchFamily="34" charset="0"/>
-                <a:ea typeface="Calibri" pitchFamily="34" charset="-122"/>
-                <a:cs typeface="Calibri" pitchFamily="34" charset="-120"/>
+                <a:latin typeface="Telegraf" pitchFamily="34" charset="0"/>
+                <a:ea typeface="Telegraf" pitchFamily="34" charset="-122"/>
+                <a:cs typeface="Telegraf" pitchFamily="34" charset="-120"/>
               </a:rPr>
               <a:t>WHERE WE'RE GOING</a:t>
             </a:r>
@@ -18029,11 +18029,11 @@
             <a:r>
               <a:rPr lang="en-US" sz="3800" b="1" dirty="0">
                 <a:solidFill>
-                  <a:srgbClr val="12242E"/>
-                </a:solidFill>
-                <a:latin typeface="Cambria" pitchFamily="34" charset="0"/>
-                <a:ea typeface="Cambria" pitchFamily="34" charset="-122"/>
-                <a:cs typeface="Cambria" pitchFamily="34" charset="-120"/>
+                  <a:srgbClr val="FFFFFF"/>
+                </a:solidFill>
+                <a:latin typeface="Telegraf" pitchFamily="34" charset="0"/>
+                <a:ea typeface="Telegraf" pitchFamily="34" charset="-122"/>
+                <a:cs typeface="Telegraf" pitchFamily="34" charset="-120"/>
               </a:rPr>
               <a:t>Three acts, forty minutes</a:t>
             </a:r>
@@ -18058,11 +18058,11 @@
             </a:avLst>
           </a:prstGeom>
           <a:solidFill>
-            <a:srgbClr val="1C7293"/>
+            <a:srgbClr val="00A19C"/>
           </a:solidFill>
           <a:ln w="12700">
             <a:solidFill>
-              <a:srgbClr val="1C7293"/>
+              <a:srgbClr val="00A19C"/>
             </a:solidFill>
             <a:prstDash val="solid"/>
           </a:ln>
@@ -18097,9 +18097,9 @@
                 <a:solidFill>
                   <a:srgbClr val="FFFFFF"/>
                 </a:solidFill>
-                <a:latin typeface="Cambria" pitchFamily="34" charset="0"/>
-                <a:ea typeface="Cambria" pitchFamily="34" charset="-122"/>
-                <a:cs typeface="Cambria" pitchFamily="34" charset="-120"/>
+                <a:latin typeface="Telegraf" pitchFamily="34" charset="0"/>
+                <a:ea typeface="Telegraf" pitchFamily="34" charset="-122"/>
+                <a:cs typeface="Telegraf" pitchFamily="34" charset="-120"/>
               </a:rPr>
               <a:t>I</a:t>
             </a:r>
@@ -18134,11 +18134,11 @@
             <a:r>
               <a:rPr lang="en-US" sz="2700" b="1" dirty="0">
                 <a:solidFill>
-                  <a:srgbClr val="12242E"/>
-                </a:solidFill>
-                <a:latin typeface="Cambria" pitchFamily="34" charset="0"/>
-                <a:ea typeface="Cambria" pitchFamily="34" charset="-122"/>
-                <a:cs typeface="Cambria" pitchFamily="34" charset="-120"/>
+                  <a:srgbClr val="FFFFFF"/>
+                </a:solidFill>
+                <a:latin typeface="Telegraf" pitchFamily="34" charset="0"/>
+                <a:ea typeface="Telegraf" pitchFamily="34" charset="-122"/>
+                <a:cs typeface="Telegraf" pitchFamily="34" charset="-120"/>
               </a:rPr>
               <a:t>How we got here</a:t>
             </a:r>
@@ -18173,11 +18173,11 @@
             <a:r>
               <a:rPr lang="en-US" sz="1900" dirty="0">
                 <a:solidFill>
-                  <a:srgbClr val="5B7386"/>
-                </a:solidFill>
-                <a:latin typeface="Calibri" pitchFamily="34" charset="0"/>
-                <a:ea typeface="Calibri" pitchFamily="34" charset="-122"/>
-                <a:cs typeface="Calibri" pitchFamily="34" charset="-120"/>
+                  <a:srgbClr val="9AA3AA"/>
+                </a:solidFill>
+                <a:latin typeface="Telegraf" pitchFamily="34" charset="0"/>
+                <a:ea typeface="Telegraf" pitchFamily="34" charset="-122"/>
+                <a:cs typeface="Telegraf" pitchFamily="34" charset="-120"/>
               </a:rPr>
               <a:t>Three generations of automation — and the promise each one made</a:t>
             </a:r>
@@ -18202,11 +18202,11 @@
             </a:avLst>
           </a:prstGeom>
           <a:solidFill>
-            <a:srgbClr val="1C7293"/>
+            <a:srgbClr val="00A19C"/>
           </a:solidFill>
           <a:ln w="12700">
             <a:solidFill>
-              <a:srgbClr val="1C7293"/>
+              <a:srgbClr val="00A19C"/>
             </a:solidFill>
             <a:prstDash val="solid"/>
           </a:ln>
@@ -18241,9 +18241,9 @@
                 <a:solidFill>
                   <a:srgbClr val="FFFFFF"/>
                 </a:solidFill>
-                <a:latin typeface="Cambria" pitchFamily="34" charset="0"/>
-                <a:ea typeface="Cambria" pitchFamily="34" charset="-122"/>
-                <a:cs typeface="Cambria" pitchFamily="34" charset="-120"/>
+                <a:latin typeface="Telegraf" pitchFamily="34" charset="0"/>
+                <a:ea typeface="Telegraf" pitchFamily="34" charset="-122"/>
+                <a:cs typeface="Telegraf" pitchFamily="34" charset="-120"/>
               </a:rPr>
               <a:t>II</a:t>
             </a:r>
@@ -18278,11 +18278,11 @@
             <a:r>
               <a:rPr lang="en-US" sz="2700" b="1" dirty="0">
                 <a:solidFill>
-                  <a:srgbClr val="12242E"/>
-                </a:solidFill>
-                <a:latin typeface="Cambria" pitchFamily="34" charset="0"/>
-                <a:ea typeface="Cambria" pitchFamily="34" charset="-122"/>
-                <a:cs typeface="Cambria" pitchFamily="34" charset="-120"/>
+                  <a:srgbClr val="FFFFFF"/>
+                </a:solidFill>
+                <a:latin typeface="Telegraf" pitchFamily="34" charset="0"/>
+                <a:ea typeface="Telegraf" pitchFamily="34" charset="-122"/>
+                <a:cs typeface="Telegraf" pitchFamily="34" charset="-120"/>
               </a:rPr>
               <a:t>What it's costing you</a:t>
             </a:r>
@@ -18317,11 +18317,11 @@
             <a:r>
               <a:rPr lang="en-US" sz="1900" dirty="0">
                 <a:solidFill>
-                  <a:srgbClr val="5B7386"/>
-                </a:solidFill>
-                <a:latin typeface="Calibri" pitchFamily="34" charset="0"/>
-                <a:ea typeface="Calibri" pitchFamily="34" charset="-122"/>
-                <a:cs typeface="Calibri" pitchFamily="34" charset="-120"/>
+                  <a:srgbClr val="9AA3AA"/>
+                </a:solidFill>
+                <a:latin typeface="Telegraf" pitchFamily="34" charset="0"/>
+                <a:ea typeface="Telegraf" pitchFamily="34" charset="-122"/>
+                <a:cs typeface="Telegraf" pitchFamily="34" charset="-120"/>
               </a:rPr>
               <a:t>Four bills coming due at the same time</a:t>
             </a:r>
@@ -18346,11 +18346,11 @@
             </a:avLst>
           </a:prstGeom>
           <a:solidFill>
-            <a:srgbClr val="1C7293"/>
+            <a:srgbClr val="00A19C"/>
           </a:solidFill>
           <a:ln w="12700">
             <a:solidFill>
-              <a:srgbClr val="1C7293"/>
+              <a:srgbClr val="00A19C"/>
             </a:solidFill>
             <a:prstDash val="solid"/>
           </a:ln>
@@ -18385,9 +18385,9 @@
                 <a:solidFill>
                   <a:srgbClr val="FFFFFF"/>
                 </a:solidFill>
-                <a:latin typeface="Cambria" pitchFamily="34" charset="0"/>
-                <a:ea typeface="Cambria" pitchFamily="34" charset="-122"/>
-                <a:cs typeface="Cambria" pitchFamily="34" charset="-120"/>
+                <a:latin typeface="Telegraf" pitchFamily="34" charset="0"/>
+                <a:ea typeface="Telegraf" pitchFamily="34" charset="-122"/>
+                <a:cs typeface="Telegraf" pitchFamily="34" charset="-120"/>
               </a:rPr>
               <a:t>III</a:t>
             </a:r>
@@ -18422,11 +18422,11 @@
             <a:r>
               <a:rPr lang="en-US" sz="2700" b="1" dirty="0">
                 <a:solidFill>
-                  <a:srgbClr val="12242E"/>
-                </a:solidFill>
-                <a:latin typeface="Cambria" pitchFamily="34" charset="0"/>
-                <a:ea typeface="Cambria" pitchFamily="34" charset="-122"/>
-                <a:cs typeface="Cambria" pitchFamily="34" charset="-120"/>
+                  <a:srgbClr val="FFFFFF"/>
+                </a:solidFill>
+                <a:latin typeface="Telegraf" pitchFamily="34" charset="0"/>
+                <a:ea typeface="Telegraf" pitchFamily="34" charset="-122"/>
+                <a:cs typeface="Telegraf" pitchFamily="34" charset="-120"/>
               </a:rPr>
               <a:t>What actually changes</a:t>
             </a:r>
@@ -18461,11 +18461,11 @@
             <a:r>
               <a:rPr lang="en-US" sz="1900" dirty="0">
                 <a:solidFill>
-                  <a:srgbClr val="5B7386"/>
-                </a:solidFill>
-                <a:latin typeface="Calibri" pitchFamily="34" charset="0"/>
-                <a:ea typeface="Calibri" pitchFamily="34" charset="-122"/>
-                <a:cs typeface="Calibri" pitchFamily="34" charset="-120"/>
+                  <a:srgbClr val="9AA3AA"/>
+                </a:solidFill>
+                <a:latin typeface="Telegraf" pitchFamily="34" charset="0"/>
+                <a:ea typeface="Telegraf" pitchFamily="34" charset="-122"/>
+                <a:cs typeface="Telegraf" pitchFamily="34" charset="-120"/>
               </a:rPr>
               <a:t>Decoupling logic from hardware, and why "open" is the word that matters</a:t>
             </a:r>
@@ -18500,11 +18500,11 @@
             <a:r>
               <a:rPr lang="en-US" sz="2000" i="1" dirty="0">
                 <a:solidFill>
-                  <a:srgbClr val="1C7293"/>
-                </a:solidFill>
-                <a:latin typeface="Calibri" pitchFamily="34" charset="0"/>
-                <a:ea typeface="Calibri" pitchFamily="34" charset="-122"/>
-                <a:cs typeface="Calibri" pitchFamily="34" charset="-120"/>
+                  <a:srgbClr val="00A19C"/>
+                </a:solidFill>
+                <a:latin typeface="Telegraf" pitchFamily="34" charset="0"/>
+                <a:ea typeface="Telegraf" pitchFamily="34" charset="-122"/>
+                <a:cs typeface="Telegraf" pitchFamily="34" charset="-120"/>
               </a:rPr>
               <a:t>Then: what to do about it Monday morning.</a:t>
             </a:r>
@@ -18539,11 +18539,11 @@
             <a:r>
               <a:rPr lang="en-US" sz="1100" dirty="0">
                 <a:solidFill>
-                  <a:srgbClr val="AEC1CC"/>
-                </a:solidFill>
-                <a:latin typeface="Calibri" pitchFamily="34" charset="0"/>
-                <a:ea typeface="Calibri" pitchFamily="34" charset="-122"/>
-                <a:cs typeface="Calibri" pitchFamily="34" charset="-120"/>
+                  <a:srgbClr val="3A3A3A"/>
+                </a:solidFill>
+                <a:latin typeface="Telegraf" pitchFamily="34" charset="0"/>
+                <a:ea typeface="Telegraf" pitchFamily="34" charset="-122"/>
+                <a:cs typeface="Telegraf" pitchFamily="34" charset="-120"/>
               </a:rPr>
               <a:t>4</a:t>
             </a:r>
@@ -18565,7 +18565,7 @@
     <p:bg>
       <p:bgPr>
         <a:solidFill>
-          <a:srgbClr val="0E2A38"/>
+          <a:srgbClr val="000000"/>
         </a:solidFill>
       </p:bgPr>
     </p:bg>
@@ -18600,11 +18600,11 @@
             </a:avLst>
           </a:prstGeom>
           <a:solidFill>
-            <a:srgbClr val="E8A33D"/>
+            <a:srgbClr val="3DCD58"/>
           </a:solidFill>
           <a:ln w="12700">
             <a:solidFill>
-              <a:srgbClr val="E8A33D"/>
+              <a:srgbClr val="3DCD58"/>
             </a:solidFill>
             <a:prstDash val="solid"/>
           </a:ln>
@@ -18637,11 +18637,11 @@
             <a:r>
               <a:rPr lang="en-US" sz="1500" b="1" spc="110" kern="0" dirty="0">
                 <a:solidFill>
-                  <a:srgbClr val="0E2A38"/>
-                </a:solidFill>
-                <a:latin typeface="Calibri" pitchFamily="34" charset="0"/>
-                <a:ea typeface="Calibri" pitchFamily="34" charset="-122"/>
-                <a:cs typeface="Calibri" pitchFamily="34" charset="-120"/>
+                  <a:srgbClr val="000000"/>
+                </a:solidFill>
+                <a:latin typeface="Telegraf" pitchFamily="34" charset="0"/>
+                <a:ea typeface="Telegraf" pitchFamily="34" charset="-122"/>
+                <a:cs typeface="Telegraf" pitchFamily="34" charset="-120"/>
               </a:rPr>
               <a:t>ACT I</a:t>
             </a:r>
@@ -18678,9 +18678,9 @@
                 <a:solidFill>
                   <a:srgbClr val="FFFFFF"/>
                 </a:solidFill>
-                <a:latin typeface="Cambria" pitchFamily="34" charset="0"/>
-                <a:ea typeface="Cambria" pitchFamily="34" charset="-122"/>
-                <a:cs typeface="Cambria" pitchFamily="34" charset="-120"/>
+                <a:latin typeface="Telegraf" pitchFamily="34" charset="0"/>
+                <a:ea typeface="Telegraf" pitchFamily="34" charset="-122"/>
+                <a:cs typeface="Telegraf" pitchFamily="34" charset="-120"/>
               </a:rPr>
               <a:t>How we got here</a:t>
             </a:r>
@@ -18718,11 +18718,11 @@
             <a:r>
               <a:rPr lang="en-US" sz="2300" dirty="0">
                 <a:solidFill>
-                  <a:srgbClr val="7FB1C6"/>
-                </a:solidFill>
-                <a:latin typeface="Calibri" pitchFamily="34" charset="0"/>
-                <a:ea typeface="Calibri" pitchFamily="34" charset="-122"/>
-                <a:cs typeface="Calibri" pitchFamily="34" charset="-120"/>
+                  <a:srgbClr val="6FD9D4"/>
+                </a:solidFill>
+                <a:latin typeface="Telegraf" pitchFamily="34" charset="0"/>
+                <a:ea typeface="Telegraf" pitchFamily="34" charset="-122"/>
+                <a:cs typeface="Telegraf" pitchFamily="34" charset="-120"/>
               </a:rPr>
               <a:t>Every generation of automation solved the previous generation's problem —</a:t>
             </a:r>
@@ -18738,11 +18738,11 @@
             <a:r>
               <a:rPr lang="en-US" sz="2300" dirty="0">
                 <a:solidFill>
-                  <a:srgbClr val="7FB1C6"/>
-                </a:solidFill>
-                <a:latin typeface="Calibri" pitchFamily="34" charset="0"/>
-                <a:ea typeface="Calibri" pitchFamily="34" charset="-122"/>
-                <a:cs typeface="Calibri" pitchFamily="34" charset="-120"/>
+                  <a:srgbClr val="6FD9D4"/>
+                </a:solidFill>
+                <a:latin typeface="Telegraf" pitchFamily="34" charset="0"/>
+                <a:ea typeface="Telegraf" pitchFamily="34" charset="-122"/>
+                <a:cs typeface="Telegraf" pitchFamily="34" charset="-120"/>
               </a:rPr>
               <a:t>and quietly created the next one.</a:t>
             </a:r>
@@ -18777,11 +18777,11 @@
             <a:r>
               <a:rPr lang="en-US" sz="1100" dirty="0">
                 <a:solidFill>
-                  <a:srgbClr val="3E6072"/>
-                </a:solidFill>
-                <a:latin typeface="Calibri" pitchFamily="34" charset="0"/>
-                <a:ea typeface="Calibri" pitchFamily="34" charset="-122"/>
-                <a:cs typeface="Calibri" pitchFamily="34" charset="-120"/>
+                  <a:srgbClr val="3A3A3A"/>
+                </a:solidFill>
+                <a:latin typeface="Telegraf" pitchFamily="34" charset="0"/>
+                <a:ea typeface="Telegraf" pitchFamily="34" charset="-122"/>
+                <a:cs typeface="Telegraf" pitchFamily="34" charset="-120"/>
               </a:rPr>
               <a:t>5</a:t>
             </a:r>
@@ -18838,11 +18838,11 @@
             </a:avLst>
           </a:prstGeom>
           <a:solidFill>
-            <a:srgbClr val="1C7293"/>
+            <a:srgbClr val="00A19C"/>
           </a:solidFill>
           <a:ln w="12700">
             <a:solidFill>
-              <a:srgbClr val="1C7293"/>
+              <a:srgbClr val="00A19C"/>
             </a:solidFill>
             <a:prstDash val="solid"/>
           </a:ln>
@@ -18877,9 +18877,9 @@
                 <a:solidFill>
                   <a:srgbClr val="FFFFFF"/>
                 </a:solidFill>
-                <a:latin typeface="Calibri" pitchFamily="34" charset="0"/>
-                <a:ea typeface="Calibri" pitchFamily="34" charset="-122"/>
-                <a:cs typeface="Calibri" pitchFamily="34" charset="-120"/>
+                <a:latin typeface="Telegraf" pitchFamily="34" charset="0"/>
+                <a:ea typeface="Telegraf" pitchFamily="34" charset="-122"/>
+                <a:cs typeface="Telegraf" pitchFamily="34" charset="-120"/>
               </a:rPr>
               <a:t>1968</a:t>
             </a:r>
@@ -18914,11 +18914,11 @@
             <a:r>
               <a:rPr lang="en-US" sz="3800" b="1" dirty="0">
                 <a:solidFill>
-                  <a:srgbClr val="12242E"/>
-                </a:solidFill>
-                <a:latin typeface="Cambria" pitchFamily="34" charset="0"/>
-                <a:ea typeface="Cambria" pitchFamily="34" charset="-122"/>
-                <a:cs typeface="Cambria" pitchFamily="34" charset="-120"/>
+                  <a:srgbClr val="FFFFFF"/>
+                </a:solidFill>
+                <a:latin typeface="Telegraf" pitchFamily="34" charset="0"/>
+                <a:ea typeface="Telegraf" pitchFamily="34" charset="-122"/>
+                <a:cs typeface="Telegraf" pitchFamily="34" charset="-120"/>
               </a:rPr>
               <a:t>Before the PLC, logic was copper</a:t>
             </a:r>
@@ -18935,7 +18935,7 @@
         <p:spPr>
           <a:xfrm>
             <a:off x="640080" y="2194560"/>
-            <a:ext cx="5943600" cy="1371600"/>
+            <a:ext cx="5943600" cy="1417320"/>
           </a:xfrm>
           <a:prstGeom prst="rect">
             <a:avLst/>
@@ -18949,22 +18949,22 @@
           <a:p>
             <a:pPr indent="0" marL="0">
               <a:lnSpc>
-                <a:spcPts val="3000"/>
+                <a:spcPts val="2700"/>
               </a:lnSpc>
               <a:buNone/>
             </a:pPr>
             <a:r>
-              <a:rPr lang="en-US" sz="2200" dirty="0">
-                <a:solidFill>
-                  <a:srgbClr val="12242E"/>
-                </a:solidFill>
-                <a:latin typeface="Calibri" pitchFamily="34" charset="0"/>
-                <a:ea typeface="Calibri" pitchFamily="34" charset="-122"/>
-                <a:cs typeface="Calibri" pitchFamily="34" charset="-120"/>
+              <a:rPr lang="en-US" sz="2000" dirty="0">
+                <a:solidFill>
+                  <a:srgbClr val="FFFFFF"/>
+                </a:solidFill>
+                <a:latin typeface="Telegraf" pitchFamily="34" charset="0"/>
+                <a:ea typeface="Telegraf" pitchFamily="34" charset="-122"/>
+                <a:cs typeface="Telegraf" pitchFamily="34" charset="-120"/>
               </a:rPr>
               <a:t>A machine's control logic wasn't written. It was wired — hundreds of electromechanical relays, hard-wired into a panel.</a:t>
             </a:r>
-            <a:endParaRPr lang="en-US" sz="2200" dirty="0"/>
+            <a:endParaRPr lang="en-US" sz="2000" dirty="0"/>
           </a:p>
         </p:txBody>
       </p:sp>
@@ -18977,66 +18977,7 @@
         <p:spPr>
           <a:xfrm>
             <a:off x="640080" y="3611880"/>
-            <a:ext cx="5943600" cy="1554480"/>
-          </a:xfrm>
-          <a:prstGeom prst="rect">
-            <a:avLst/>
-          </a:prstGeom>
-          <a:noFill/>
-          <a:ln/>
-        </p:spPr>
-        <p:txBody>
-          <a:bodyPr wrap="square" lIns="0" tIns="0" rIns="0" bIns="0" rtlCol="0" anchor="t"/>
-          <a:lstStyle/>
-          <a:p>
-            <a:pPr indent="0" marL="0">
-              <a:lnSpc>
-                <a:spcPts val="3000"/>
-              </a:lnSpc>
-              <a:buNone/>
-            </a:pPr>
-            <a:r>
-              <a:rPr lang="en-US" sz="2200" b="1" dirty="0">
-                <a:solidFill>
-                  <a:srgbClr val="12242E"/>
-                </a:solidFill>
-                <a:latin typeface="Calibri" pitchFamily="34" charset="0"/>
-                <a:ea typeface="Calibri" pitchFamily="34" charset="-122"/>
-                <a:cs typeface="Calibri" pitchFamily="34" charset="-120"/>
-              </a:rPr>
-              <a:t>Change the process</a:t>
-            </a:r>
-            <a:pPr indent="0" marL="0">
-              <a:lnSpc>
-                <a:spcPts val="3000"/>
-              </a:lnSpc>
-              <a:buNone/>
-            </a:pPr>
-            <a:r>
-              <a:rPr lang="en-US" sz="2200" dirty="0">
-                <a:solidFill>
-                  <a:srgbClr val="12242E"/>
-                </a:solidFill>
-                <a:latin typeface="Calibri" pitchFamily="34" charset="0"/>
-                <a:ea typeface="Calibri" pitchFamily="34" charset="-122"/>
-                <a:cs typeface="Calibri" pitchFamily="34" charset="-120"/>
-              </a:rPr>
-              <a:t> and you didn't change a program. You sent electricians back into the panel to physically rewire it — for weeks.</a:t>
-            </a:r>
-            <a:endParaRPr lang="en-US" sz="2200" dirty="0"/>
-          </a:p>
-        </p:txBody>
-      </p:sp>
-      <p:sp>
-        <p:nvSpPr>
-          <p:cNvPr id="7" name="Text 5"/>
-          <p:cNvSpPr/>
-          <p:nvPr/>
-        </p:nvSpPr>
-        <p:spPr>
-          <a:xfrm>
-            <a:off x="640080" y="5303520"/>
-            <a:ext cx="5943600" cy="914400"/>
+            <a:ext cx="5943600" cy="1691640"/>
           </a:xfrm>
           <a:prstGeom prst="rect">
             <a:avLst/>
@@ -19055,13 +18996,72 @@
               <a:buNone/>
             </a:pPr>
             <a:r>
+              <a:rPr lang="en-US" sz="2100" b="1" dirty="0">
+                <a:solidFill>
+                  <a:srgbClr val="FFFFFF"/>
+                </a:solidFill>
+                <a:latin typeface="Telegraf" pitchFamily="34" charset="0"/>
+                <a:ea typeface="Telegraf" pitchFamily="34" charset="-122"/>
+                <a:cs typeface="Telegraf" pitchFamily="34" charset="-120"/>
+              </a:rPr>
+              <a:t>Change the process</a:t>
+            </a:r>
+            <a:pPr indent="0" marL="0">
+              <a:lnSpc>
+                <a:spcPts val="2800"/>
+              </a:lnSpc>
+              <a:buNone/>
+            </a:pPr>
+            <a:r>
+              <a:rPr lang="en-US" sz="2100" dirty="0">
+                <a:solidFill>
+                  <a:srgbClr val="FFFFFF"/>
+                </a:solidFill>
+                <a:latin typeface="Telegraf" pitchFamily="34" charset="0"/>
+                <a:ea typeface="Telegraf" pitchFamily="34" charset="-122"/>
+                <a:cs typeface="Telegraf" pitchFamily="34" charset="-120"/>
+              </a:rPr>
+              <a:t> and you didn't change a program. You sent electricians back into the panel to physically rewire it — for weeks.</a:t>
+            </a:r>
+            <a:endParaRPr lang="en-US" sz="2100" dirty="0"/>
+          </a:p>
+        </p:txBody>
+      </p:sp>
+      <p:sp>
+        <p:nvSpPr>
+          <p:cNvPr id="7" name="Text 5"/>
+          <p:cNvSpPr/>
+          <p:nvPr/>
+        </p:nvSpPr>
+        <p:spPr>
+          <a:xfrm>
+            <a:off x="640080" y="5440680"/>
+            <a:ext cx="5943600" cy="914400"/>
+          </a:xfrm>
+          <a:prstGeom prst="rect">
+            <a:avLst/>
+          </a:prstGeom>
+          <a:noFill/>
+          <a:ln/>
+        </p:spPr>
+        <p:txBody>
+          <a:bodyPr wrap="square" lIns="0" tIns="0" rIns="0" bIns="0" rtlCol="0" anchor="t"/>
+          <a:lstStyle/>
+          <a:p>
+            <a:pPr indent="0" marL="0">
+              <a:lnSpc>
+                <a:spcPts val="2800"/>
+              </a:lnSpc>
+              <a:buNone/>
+            </a:pPr>
+            <a:r>
               <a:rPr lang="en-US" sz="2000" i="1" dirty="0">
                 <a:solidFill>
-                  <a:srgbClr val="1C7293"/>
-                </a:solidFill>
-                <a:latin typeface="Calibri" pitchFamily="34" charset="0"/>
-                <a:ea typeface="Calibri" pitchFamily="34" charset="-122"/>
-                <a:cs typeface="Calibri" pitchFamily="34" charset="-120"/>
+                  <a:srgbClr val="00A19C"/>
+                </a:solidFill>
+                <a:latin typeface="Telegraf" pitchFamily="34" charset="0"/>
+                <a:ea typeface="Telegraf" pitchFamily="34" charset="-122"/>
+                <a:cs typeface="Telegraf" pitchFamily="34" charset="-120"/>
               </a:rPr>
               <a:t>General Motors was doing this every single model year, across every plant.</a:t>
             </a:r>
@@ -19086,11 +19086,11 @@
             </a:avLst>
           </a:prstGeom>
           <a:solidFill>
-            <a:srgbClr val="EDF3F6"/>
+            <a:srgbClr val="161616"/>
           </a:solidFill>
           <a:ln w="12700">
             <a:solidFill>
-              <a:srgbClr val="EDF3F6"/>
+              <a:srgbClr val="161616"/>
             </a:solidFill>
             <a:prstDash val="solid"/>
           </a:ln>
@@ -19123,11 +19123,11 @@
             <a:r>
               <a:rPr lang="en-US" sz="6000" b="1" dirty="0">
                 <a:solidFill>
-                  <a:srgbClr val="1C7293"/>
-                </a:solidFill>
-                <a:latin typeface="Cambria" pitchFamily="34" charset="0"/>
-                <a:ea typeface="Cambria" pitchFamily="34" charset="-122"/>
-                <a:cs typeface="Cambria" pitchFamily="34" charset="-120"/>
+                  <a:srgbClr val="00A19C"/>
+                </a:solidFill>
+                <a:latin typeface="Telegraf" pitchFamily="34" charset="0"/>
+                <a:ea typeface="Telegraf" pitchFamily="34" charset="-122"/>
+                <a:cs typeface="Telegraf" pitchFamily="34" charset="-120"/>
               </a:rPr>
               <a:t>Weeks</a:t>
             </a:r>
@@ -19162,11 +19162,11 @@
             <a:r>
               <a:rPr lang="en-US" sz="1700" dirty="0">
                 <a:solidFill>
-                  <a:srgbClr val="5B7386"/>
-                </a:solidFill>
-                <a:latin typeface="Calibri" pitchFamily="34" charset="0"/>
-                <a:ea typeface="Calibri" pitchFamily="34" charset="-122"/>
-                <a:cs typeface="Calibri" pitchFamily="34" charset="-120"/>
+                  <a:srgbClr val="9AA3AA"/>
+                </a:solidFill>
+                <a:latin typeface="Telegraf" pitchFamily="34" charset="0"/>
+                <a:ea typeface="Telegraf" pitchFamily="34" charset="-122"/>
+                <a:cs typeface="Telegraf" pitchFamily="34" charset="-120"/>
               </a:rPr>
               <a:t>of downtime to change what a</a:t>
             </a:r>
@@ -19179,11 +19179,11 @@
             <a:r>
               <a:rPr lang="en-US" sz="1700" dirty="0">
                 <a:solidFill>
-                  <a:srgbClr val="5B7386"/>
-                </a:solidFill>
-                <a:latin typeface="Calibri" pitchFamily="34" charset="0"/>
-                <a:ea typeface="Calibri" pitchFamily="34" charset="-122"/>
-                <a:cs typeface="Calibri" pitchFamily="34" charset="-120"/>
+                  <a:srgbClr val="9AA3AA"/>
+                </a:solidFill>
+                <a:latin typeface="Telegraf" pitchFamily="34" charset="0"/>
+                <a:ea typeface="Telegraf" pitchFamily="34" charset="-122"/>
+                <a:cs typeface="Telegraf" pitchFamily="34" charset="-120"/>
               </a:rPr>
               <a:t>machine did — every time</a:t>
             </a:r>
@@ -19221,11 +19221,11 @@
             <a:r>
               <a:rPr lang="en-US" sz="1800" dirty="0">
                 <a:solidFill>
-                  <a:srgbClr val="12242E"/>
-                </a:solidFill>
-                <a:latin typeface="Calibri" pitchFamily="34" charset="0"/>
-                <a:ea typeface="Calibri" pitchFamily="34" charset="-122"/>
-                <a:cs typeface="Calibri" pitchFamily="34" charset="-120"/>
+                  <a:srgbClr val="FFFFFF"/>
+                </a:solidFill>
+                <a:latin typeface="Telegraf" pitchFamily="34" charset="0"/>
+                <a:ea typeface="Telegraf" pitchFamily="34" charset="-122"/>
+                <a:cs typeface="Telegraf" pitchFamily="34" charset="-120"/>
               </a:rPr>
               <a:t>The logic and the wiring were the same physical object.</a:t>
             </a:r>
@@ -19260,11 +19260,11 @@
             <a:r>
               <a:rPr lang="en-US" sz="1100" dirty="0">
                 <a:solidFill>
-                  <a:srgbClr val="AEC1CC"/>
-                </a:solidFill>
-                <a:latin typeface="Calibri" pitchFamily="34" charset="0"/>
-                <a:ea typeface="Calibri" pitchFamily="34" charset="-122"/>
-                <a:cs typeface="Calibri" pitchFamily="34" charset="-120"/>
+                  <a:srgbClr val="3A3A3A"/>
+                </a:solidFill>
+                <a:latin typeface="Telegraf" pitchFamily="34" charset="0"/>
+                <a:ea typeface="Telegraf" pitchFamily="34" charset="-122"/>
+                <a:cs typeface="Telegraf" pitchFamily="34" charset="-120"/>
               </a:rPr>
               <a:t>6</a:t>
             </a:r>
@@ -19321,11 +19321,11 @@
             </a:avLst>
           </a:prstGeom>
           <a:solidFill>
-            <a:srgbClr val="1C7293"/>
+            <a:srgbClr val="00A19C"/>
           </a:solidFill>
           <a:ln w="12700">
             <a:solidFill>
-              <a:srgbClr val="1C7293"/>
+              <a:srgbClr val="00A19C"/>
             </a:solidFill>
             <a:prstDash val="solid"/>
           </a:ln>
@@ -19360,9 +19360,9 @@
                 <a:solidFill>
                   <a:srgbClr val="FFFFFF"/>
                 </a:solidFill>
-                <a:latin typeface="Calibri" pitchFamily="34" charset="0"/>
-                <a:ea typeface="Calibri" pitchFamily="34" charset="-122"/>
-                <a:cs typeface="Calibri" pitchFamily="34" charset="-120"/>
+                <a:latin typeface="Telegraf" pitchFamily="34" charset="0"/>
+                <a:ea typeface="Telegraf" pitchFamily="34" charset="-122"/>
+                <a:cs typeface="Telegraf" pitchFamily="34" charset="-120"/>
               </a:rPr>
               <a:t>1968</a:t>
             </a:r>
@@ -19397,11 +19397,11 @@
             <a:r>
               <a:rPr lang="en-US" sz="3800" b="1" dirty="0">
                 <a:solidFill>
-                  <a:srgbClr val="12242E"/>
-                </a:solidFill>
-                <a:latin typeface="Cambria" pitchFamily="34" charset="0"/>
-                <a:ea typeface="Cambria" pitchFamily="34" charset="-122"/>
-                <a:cs typeface="Cambria" pitchFamily="34" charset="-120"/>
+                  <a:srgbClr val="FFFFFF"/>
+                </a:solidFill>
+                <a:latin typeface="Telegraf" pitchFamily="34" charset="0"/>
+                <a:ea typeface="Telegraf" pitchFamily="34" charset="-122"/>
+                <a:cs typeface="Telegraf" pitchFamily="34" charset="-120"/>
               </a:rPr>
               <a:t>The PLC was an act of decoupling</a:t>
             </a:r>
@@ -19426,11 +19426,11 @@
             </a:avLst>
           </a:prstGeom>
           <a:solidFill>
-            <a:srgbClr val="EDF3F6"/>
+            <a:srgbClr val="161616"/>
           </a:solidFill>
           <a:ln w="12700">
             <a:solidFill>
-              <a:srgbClr val="EDF3F6"/>
+              <a:srgbClr val="161616"/>
             </a:solidFill>
             <a:prstDash val="solid"/>
           </a:ln>
@@ -19463,11 +19463,11 @@
             <a:r>
               <a:rPr lang="en-US" sz="2400" b="1" dirty="0">
                 <a:solidFill>
-                  <a:srgbClr val="1C7293"/>
-                </a:solidFill>
-                <a:latin typeface="Cambria" pitchFamily="34" charset="0"/>
-                <a:ea typeface="Cambria" pitchFamily="34" charset="-122"/>
-                <a:cs typeface="Cambria" pitchFamily="34" charset="-120"/>
+                  <a:srgbClr val="00A19C"/>
+                </a:solidFill>
+                <a:latin typeface="Telegraf" pitchFamily="34" charset="0"/>
+                <a:ea typeface="Telegraf" pitchFamily="34" charset="-122"/>
+                <a:cs typeface="Telegraf" pitchFamily="34" charset="-120"/>
               </a:rPr>
               <a:t>GM Hydramatic wrote a spec</a:t>
             </a:r>
@@ -19506,11 +19506,11 @@
             <a:r>
               <a:rPr lang="en-US" sz="1900" dirty="0">
                 <a:solidFill>
-                  <a:srgbClr val="12242E"/>
-                </a:solidFill>
-                <a:latin typeface="Calibri" pitchFamily="34" charset="0"/>
-                <a:ea typeface="Calibri" pitchFamily="34" charset="-122"/>
-                <a:cs typeface="Calibri" pitchFamily="34" charset="-120"/>
+                  <a:srgbClr val="FFFFFF"/>
+                </a:solidFill>
+                <a:latin typeface="Telegraf" pitchFamily="34" charset="0"/>
+                <a:ea typeface="Telegraf" pitchFamily="34" charset="-122"/>
+                <a:cs typeface="Telegraf" pitchFamily="34" charset="-120"/>
               </a:rPr>
               <a:t>Solid-state, not relays</a:t>
             </a:r>
@@ -19527,11 +19527,11 @@
             <a:r>
               <a:rPr lang="en-US" sz="1900" dirty="0">
                 <a:solidFill>
-                  <a:srgbClr val="12242E"/>
-                </a:solidFill>
-                <a:latin typeface="Calibri" pitchFamily="34" charset="0"/>
-                <a:ea typeface="Calibri" pitchFamily="34" charset="-122"/>
-                <a:cs typeface="Calibri" pitchFamily="34" charset="-120"/>
+                  <a:srgbClr val="FFFFFF"/>
+                </a:solidFill>
+                <a:latin typeface="Telegraf" pitchFamily="34" charset="0"/>
+                <a:ea typeface="Telegraf" pitchFamily="34" charset="-122"/>
+                <a:cs typeface="Telegraf" pitchFamily="34" charset="-120"/>
               </a:rPr>
               <a:t>Reprogrammable without rewiring</a:t>
             </a:r>
@@ -19548,11 +19548,11 @@
             <a:r>
               <a:rPr lang="en-US" sz="1900" dirty="0">
                 <a:solidFill>
-                  <a:srgbClr val="12242E"/>
-                </a:solidFill>
-                <a:latin typeface="Calibri" pitchFamily="34" charset="0"/>
-                <a:ea typeface="Calibri" pitchFamily="34" charset="-122"/>
-                <a:cs typeface="Calibri" pitchFamily="34" charset="-120"/>
+                  <a:srgbClr val="FFFFFF"/>
+                </a:solidFill>
+                <a:latin typeface="Telegraf" pitchFamily="34" charset="0"/>
+                <a:ea typeface="Telegraf" pitchFamily="34" charset="-122"/>
+                <a:cs typeface="Telegraf" pitchFamily="34" charset="-120"/>
               </a:rPr>
               <a:t>Modular and expandable</a:t>
             </a:r>
@@ -19569,11 +19569,11 @@
             <a:r>
               <a:rPr lang="en-US" sz="1900" dirty="0">
                 <a:solidFill>
-                  <a:srgbClr val="12242E"/>
-                </a:solidFill>
-                <a:latin typeface="Calibri" pitchFamily="34" charset="0"/>
-                <a:ea typeface="Calibri" pitchFamily="34" charset="-122"/>
-                <a:cs typeface="Calibri" pitchFamily="34" charset="-120"/>
+                  <a:srgbClr val="FFFFFF"/>
+                </a:solidFill>
+                <a:latin typeface="Telegraf" pitchFamily="34" charset="0"/>
+                <a:ea typeface="Telegraf" pitchFamily="34" charset="-122"/>
+                <a:cs typeface="Telegraf" pitchFamily="34" charset="-120"/>
               </a:rPr>
               <a:t>Survives a factory floor</a:t>
             </a:r>
@@ -19590,11 +19590,11 @@
             <a:r>
               <a:rPr lang="en-US" sz="1900" dirty="0">
                 <a:solidFill>
-                  <a:srgbClr val="12242E"/>
-                </a:solidFill>
-                <a:latin typeface="Calibri" pitchFamily="34" charset="0"/>
-                <a:ea typeface="Calibri" pitchFamily="34" charset="-122"/>
-                <a:cs typeface="Calibri" pitchFamily="34" charset="-120"/>
+                  <a:srgbClr val="FFFFFF"/>
+                </a:solidFill>
+                <a:latin typeface="Telegraf" pitchFamily="34" charset="0"/>
+                <a:ea typeface="Telegraf" pitchFamily="34" charset="-122"/>
+                <a:cs typeface="Telegraf" pitchFamily="34" charset="-120"/>
               </a:rPr>
               <a:t>Programmed the way electricians already think — ladder logic</a:t>
             </a:r>
@@ -19619,11 +19619,11 @@
             </a:avLst>
           </a:prstGeom>
           <a:solidFill>
-            <a:srgbClr val="EDF3F6"/>
+            <a:srgbClr val="161616"/>
           </a:solidFill>
           <a:ln w="12700">
             <a:solidFill>
-              <a:srgbClr val="EDF3F6"/>
+              <a:srgbClr val="161616"/>
             </a:solidFill>
             <a:prstDash val="solid"/>
           </a:ln>
@@ -19656,11 +19656,11 @@
             <a:r>
               <a:rPr lang="en-US" sz="2400" b="1" dirty="0">
                 <a:solidFill>
-                  <a:srgbClr val="1C7293"/>
-                </a:solidFill>
-                <a:latin typeface="Cambria" pitchFamily="34" charset="0"/>
-                <a:ea typeface="Cambria" pitchFamily="34" charset="-122"/>
-                <a:cs typeface="Cambria" pitchFamily="34" charset="-120"/>
+                  <a:srgbClr val="00A19C"/>
+                </a:solidFill>
+                <a:latin typeface="Telegraf" pitchFamily="34" charset="0"/>
+                <a:ea typeface="Telegraf" pitchFamily="34" charset="-122"/>
+                <a:cs typeface="Telegraf" pitchFamily="34" charset="-120"/>
               </a:rPr>
               <a:t>Bedford Associates answered</a:t>
             </a:r>
@@ -19698,11 +19698,11 @@
             <a:r>
               <a:rPr lang="en-US" sz="2600" b="1" dirty="0">
                 <a:solidFill>
-                  <a:srgbClr val="12242E"/>
-                </a:solidFill>
-                <a:latin typeface="Calibri" pitchFamily="34" charset="0"/>
-                <a:ea typeface="Calibri" pitchFamily="34" charset="-122"/>
-                <a:cs typeface="Calibri" pitchFamily="34" charset="-120"/>
+                  <a:srgbClr val="FFFFFF"/>
+                </a:solidFill>
+                <a:latin typeface="Telegraf" pitchFamily="34" charset="0"/>
+                <a:ea typeface="Telegraf" pitchFamily="34" charset="-122"/>
+                <a:cs typeface="Telegraf" pitchFamily="34" charset="-120"/>
               </a:rPr>
               <a:t>The Modicon 084</a:t>
             </a:r>
@@ -19718,11 +19718,11 @@
             <a:r>
               <a:rPr lang="en-US" sz="1800" dirty="0">
                 <a:solidFill>
-                  <a:srgbClr val="5B7386"/>
-                </a:solidFill>
-                <a:latin typeface="Calibri" pitchFamily="34" charset="0"/>
-                <a:ea typeface="Calibri" pitchFamily="34" charset="-122"/>
-                <a:cs typeface="Calibri" pitchFamily="34" charset="-120"/>
+                  <a:srgbClr val="9AA3AA"/>
+                </a:solidFill>
+                <a:latin typeface="Telegraf" pitchFamily="34" charset="0"/>
+                <a:ea typeface="Telegraf" pitchFamily="34" charset="-122"/>
+                <a:cs typeface="Telegraf" pitchFamily="34" charset="-120"/>
               </a:rPr>
               <a:t>Their 84th project. The company renamed itself after it.
 </a:t>
@@ -19739,11 +19739,11 @@
             <a:r>
               <a:rPr lang="en-US" sz="1800" dirty="0">
                 <a:solidFill>
-                  <a:srgbClr val="12242E"/>
-                </a:solidFill>
-                <a:latin typeface="Calibri" pitchFamily="34" charset="0"/>
-                <a:ea typeface="Calibri" pitchFamily="34" charset="-122"/>
-                <a:cs typeface="Calibri" pitchFamily="34" charset="-120"/>
+                  <a:srgbClr val="FFFFFF"/>
+                </a:solidFill>
+                <a:latin typeface="Telegraf" pitchFamily="34" charset="0"/>
+                <a:ea typeface="Telegraf" pitchFamily="34" charset="-122"/>
+                <a:cs typeface="Telegraf" pitchFamily="34" charset="-120"/>
               </a:rPr>
               <a:t>The founding promise of the PLC:
 </a:t>
@@ -19760,11 +19760,11 @@
             <a:r>
               <a:rPr lang="en-US" sz="2000" b="1" dirty="0">
                 <a:solidFill>
-                  <a:srgbClr val="1C7293"/>
-                </a:solidFill>
-                <a:latin typeface="Calibri" pitchFamily="34" charset="0"/>
-                <a:ea typeface="Calibri" pitchFamily="34" charset="-122"/>
-                <a:cs typeface="Calibri" pitchFamily="34" charset="-120"/>
+                  <a:srgbClr val="00A19C"/>
+                </a:solidFill>
+                <a:latin typeface="Telegraf" pitchFamily="34" charset="0"/>
+                <a:ea typeface="Telegraf" pitchFamily="34" charset="-122"/>
+                <a:cs typeface="Telegraf" pitchFamily="34" charset="-120"/>
               </a:rPr>
               <a:t>change what the machine does without touching what the machine is.</a:t>
             </a:r>
@@ -19799,11 +19799,11 @@
             <a:r>
               <a:rPr lang="en-US" sz="1100" dirty="0">
                 <a:solidFill>
-                  <a:srgbClr val="AEC1CC"/>
-                </a:solidFill>
-                <a:latin typeface="Calibri" pitchFamily="34" charset="0"/>
-                <a:ea typeface="Calibri" pitchFamily="34" charset="-122"/>
-                <a:cs typeface="Calibri" pitchFamily="34" charset="-120"/>
+                  <a:srgbClr val="3A3A3A"/>
+                </a:solidFill>
+                <a:latin typeface="Telegraf" pitchFamily="34" charset="0"/>
+                <a:ea typeface="Telegraf" pitchFamily="34" charset="-122"/>
+                <a:cs typeface="Telegraf" pitchFamily="34" charset="-120"/>
               </a:rPr>
               <a:t>7</a:t>
             </a:r>
@@ -19860,11 +19860,11 @@
             </a:avLst>
           </a:prstGeom>
           <a:solidFill>
-            <a:srgbClr val="1C7293"/>
+            <a:srgbClr val="00A19C"/>
           </a:solidFill>
           <a:ln w="12700">
             <a:solidFill>
-              <a:srgbClr val="1C7293"/>
+              <a:srgbClr val="00A19C"/>
             </a:solidFill>
             <a:prstDash val="solid"/>
           </a:ln>
@@ -19899,9 +19899,9 @@
                 <a:solidFill>
                   <a:srgbClr val="FFFFFF"/>
                 </a:solidFill>
-                <a:latin typeface="Calibri" pitchFamily="34" charset="0"/>
-                <a:ea typeface="Calibri" pitchFamily="34" charset="-122"/>
-                <a:cs typeface="Calibri" pitchFamily="34" charset="-120"/>
+                <a:latin typeface="Telegraf" pitchFamily="34" charset="0"/>
+                <a:ea typeface="Telegraf" pitchFamily="34" charset="-122"/>
+                <a:cs typeface="Telegraf" pitchFamily="34" charset="-120"/>
               </a:rPr>
               <a:t>1975</a:t>
             </a:r>
@@ -19936,11 +19936,11 @@
             <a:r>
               <a:rPr lang="en-US" sz="3800" b="1" dirty="0">
                 <a:solidFill>
-                  <a:srgbClr val="12242E"/>
-                </a:solidFill>
-                <a:latin typeface="Cambria" pitchFamily="34" charset="0"/>
-                <a:ea typeface="Cambria" pitchFamily="34" charset="-122"/>
-                <a:cs typeface="Cambria" pitchFamily="34" charset="-120"/>
+                  <a:srgbClr val="FFFFFF"/>
+                </a:solidFill>
+                <a:latin typeface="Telegraf" pitchFamily="34" charset="0"/>
+                <a:ea typeface="Telegraf" pitchFamily="34" charset="-122"/>
+                <a:cs typeface="Telegraf" pitchFamily="34" charset="-120"/>
               </a:rPr>
               <a:t>Then control spread out across the plant</a:t>
             </a:r>
@@ -19978,11 +19978,11 @@
             <a:r>
               <a:rPr lang="en-US" sz="2200" dirty="0">
                 <a:solidFill>
-                  <a:srgbClr val="12242E"/>
-                </a:solidFill>
-                <a:latin typeface="Calibri" pitchFamily="34" charset="0"/>
-                <a:ea typeface="Calibri" pitchFamily="34" charset="-122"/>
-                <a:cs typeface="Calibri" pitchFamily="34" charset="-120"/>
+                  <a:srgbClr val="FFFFFF"/>
+                </a:solidFill>
+                <a:latin typeface="Telegraf" pitchFamily="34" charset="0"/>
+                <a:ea typeface="Telegraf" pitchFamily="34" charset="-122"/>
+                <a:cs typeface="Telegraf" pitchFamily="34" charset="-120"/>
               </a:rPr>
               <a:t>The PLC solved the machine. It didn't solve the plant. Refineries needed hundreds of loops controlled together, and a single central computer was a single point of failure.</a:t>
             </a:r>
@@ -20007,11 +20007,11 @@
             </a:avLst>
           </a:prstGeom>
           <a:solidFill>
-            <a:srgbClr val="EDF3F6"/>
+            <a:srgbClr val="161616"/>
           </a:solidFill>
           <a:ln w="12700">
             <a:solidFill>
-              <a:srgbClr val="EDF3F6"/>
+              <a:srgbClr val="161616"/>
             </a:solidFill>
             <a:prstDash val="solid"/>
           </a:ln>
@@ -20044,11 +20044,11 @@
             <a:r>
               <a:rPr lang="en-US" sz="2000" b="1" dirty="0">
                 <a:solidFill>
-                  <a:srgbClr val="1C7293"/>
-                </a:solidFill>
-                <a:latin typeface="Cambria" pitchFamily="34" charset="0"/>
-                <a:ea typeface="Cambria" pitchFamily="34" charset="-122"/>
-                <a:cs typeface="Cambria" pitchFamily="34" charset="-120"/>
+                  <a:srgbClr val="00A19C"/>
+                </a:solidFill>
+                <a:latin typeface="Telegraf" pitchFamily="34" charset="0"/>
+                <a:ea typeface="Telegraf" pitchFamily="34" charset="-122"/>
+                <a:cs typeface="Telegraf" pitchFamily="34" charset="-120"/>
               </a:rPr>
               <a:t>The distributed control system</a:t>
             </a:r>
@@ -20086,11 +20086,11 @@
             <a:r>
               <a:rPr lang="en-US" sz="1600" dirty="0">
                 <a:solidFill>
-                  <a:srgbClr val="12242E"/>
-                </a:solidFill>
-                <a:latin typeface="Calibri" pitchFamily="34" charset="0"/>
-                <a:ea typeface="Calibri" pitchFamily="34" charset="-122"/>
-                <a:cs typeface="Calibri" pitchFamily="34" charset="-120"/>
+                  <a:srgbClr val="FFFFFF"/>
+                </a:solidFill>
+                <a:latin typeface="Telegraf" pitchFamily="34" charset="0"/>
+                <a:ea typeface="Telegraf" pitchFamily="34" charset="-122"/>
+                <a:cs typeface="Telegraf" pitchFamily="34" charset="-120"/>
               </a:rPr>
               <a:t>Honeywell's TDC 2000 and Yokogawa's CENTUM both landed in 1975. Control functions spread across modules — one failure no longer stopped everything.</a:t>
             </a:r>
@@ -20115,11 +20115,11 @@
             </a:avLst>
           </a:prstGeom>
           <a:solidFill>
-            <a:srgbClr val="EDF3F6"/>
+            <a:srgbClr val="161616"/>
           </a:solidFill>
           <a:ln w="12700">
             <a:solidFill>
-              <a:srgbClr val="EDF3F6"/>
+              <a:srgbClr val="161616"/>
             </a:solidFill>
             <a:prstDash val="solid"/>
           </a:ln>
@@ -20152,11 +20152,11 @@
             <a:r>
               <a:rPr lang="en-US" sz="2000" b="1" dirty="0">
                 <a:solidFill>
-                  <a:srgbClr val="1C7293"/>
-                </a:solidFill>
-                <a:latin typeface="Cambria" pitchFamily="34" charset="0"/>
-                <a:ea typeface="Cambria" pitchFamily="34" charset="-122"/>
-                <a:cs typeface="Cambria" pitchFamily="34" charset="-120"/>
+                  <a:srgbClr val="00A19C"/>
+                </a:solidFill>
+                <a:latin typeface="Telegraf" pitchFamily="34" charset="0"/>
+                <a:ea typeface="Telegraf" pitchFamily="34" charset="-122"/>
+                <a:cs typeface="Telegraf" pitchFamily="34" charset="-120"/>
               </a:rPr>
               <a:t>What you bought was a system</a:t>
             </a:r>
@@ -20194,11 +20194,11 @@
             <a:r>
               <a:rPr lang="en-US" sz="1600" dirty="0">
                 <a:solidFill>
-                  <a:srgbClr val="12242E"/>
-                </a:solidFill>
-                <a:latin typeface="Calibri" pitchFamily="34" charset="0"/>
-                <a:ea typeface="Calibri" pitchFamily="34" charset="-122"/>
-                <a:cs typeface="Calibri" pitchFamily="34" charset="-120"/>
+                  <a:srgbClr val="FFFFFF"/>
+                </a:solidFill>
+                <a:latin typeface="Telegraf" pitchFamily="34" charset="0"/>
+                <a:ea typeface="Telegraf" pitchFamily="34" charset="-122"/>
+                <a:cs typeface="Telegraf" pitchFamily="34" charset="-120"/>
               </a:rPr>
               <a:t>Controllers, I/O, operator stations, the network between them — engineered together, sold together, supported together. That was the value.</a:t>
             </a:r>
@@ -20223,11 +20223,11 @@
             </a:avLst>
           </a:prstGeom>
           <a:solidFill>
-            <a:srgbClr val="EDF3F6"/>
+            <a:srgbClr val="161616"/>
           </a:solidFill>
           <a:ln w="12700">
             <a:solidFill>
-              <a:srgbClr val="EDF3F6"/>
+              <a:srgbClr val="161616"/>
             </a:solidFill>
             <a:prstDash val="solid"/>
           </a:ln>
@@ -20260,11 +20260,11 @@
             <a:r>
               <a:rPr lang="en-US" sz="2000" b="1" dirty="0">
                 <a:solidFill>
-                  <a:srgbClr val="E8A33D"/>
-                </a:solidFill>
-                <a:latin typeface="Cambria" pitchFamily="34" charset="0"/>
-                <a:ea typeface="Cambria" pitchFamily="34" charset="-122"/>
-                <a:cs typeface="Cambria" pitchFamily="34" charset="-120"/>
+                  <a:srgbClr val="3DCD58"/>
+                </a:solidFill>
+                <a:latin typeface="Telegraf" pitchFamily="34" charset="0"/>
+                <a:ea typeface="Telegraf" pitchFamily="34" charset="-122"/>
+                <a:cs typeface="Telegraf" pitchFamily="34" charset="-120"/>
               </a:rPr>
               <a:t>And that was the trade</a:t>
             </a:r>
@@ -20302,11 +20302,11 @@
             <a:r>
               <a:rPr lang="en-US" sz="1600" dirty="0">
                 <a:solidFill>
-                  <a:srgbClr val="12242E"/>
-                </a:solidFill>
-                <a:latin typeface="Calibri" pitchFamily="34" charset="0"/>
-                <a:ea typeface="Calibri" pitchFamily="34" charset="-122"/>
-                <a:cs typeface="Calibri" pitchFamily="34" charset="-120"/>
+                  <a:srgbClr val="FFFFFF"/>
+                </a:solidFill>
+                <a:latin typeface="Telegraf" pitchFamily="34" charset="0"/>
+                <a:ea typeface="Telegraf" pitchFamily="34" charset="-122"/>
+                <a:cs typeface="Telegraf" pitchFamily="34" charset="-120"/>
               </a:rPr>
               <a:t>Integration you didn't have to build yourself, in exchange for a stack that only worked because one company controlled every layer of it.</a:t>
             </a:r>
@@ -20341,11 +20341,11 @@
             <a:r>
               <a:rPr lang="en-US" sz="1100" dirty="0">
                 <a:solidFill>
-                  <a:srgbClr val="AEC1CC"/>
-                </a:solidFill>
-                <a:latin typeface="Calibri" pitchFamily="34" charset="0"/>
-                <a:ea typeface="Calibri" pitchFamily="34" charset="-122"/>
-                <a:cs typeface="Calibri" pitchFamily="34" charset="-120"/>
+                  <a:srgbClr val="3A3A3A"/>
+                </a:solidFill>
+                <a:latin typeface="Telegraf" pitchFamily="34" charset="0"/>
+                <a:ea typeface="Telegraf" pitchFamily="34" charset="-122"/>
+                <a:cs typeface="Telegraf" pitchFamily="34" charset="-120"/>
               </a:rPr>
               <a:t>8</a:t>
             </a:r>
@@ -20402,11 +20402,11 @@
             </a:avLst>
           </a:prstGeom>
           <a:solidFill>
-            <a:srgbClr val="1C7293"/>
+            <a:srgbClr val="00A19C"/>
           </a:solidFill>
           <a:ln w="12700">
             <a:solidFill>
-              <a:srgbClr val="1C7293"/>
+              <a:srgbClr val="00A19C"/>
             </a:solidFill>
             <a:prstDash val="solid"/>
           </a:ln>
@@ -20441,9 +20441,9 @@
                 <a:solidFill>
                   <a:srgbClr val="FFFFFF"/>
                 </a:solidFill>
-                <a:latin typeface="Calibri" pitchFamily="34" charset="0"/>
-                <a:ea typeface="Calibri" pitchFamily="34" charset="-122"/>
-                <a:cs typeface="Calibri" pitchFamily="34" charset="-120"/>
+                <a:latin typeface="Telegraf" pitchFamily="34" charset="0"/>
+                <a:ea typeface="Telegraf" pitchFamily="34" charset="-122"/>
+                <a:cs typeface="Telegraf" pitchFamily="34" charset="-120"/>
               </a:rPr>
               <a:t>1989</a:t>
             </a:r>
@@ -20478,11 +20478,11 @@
             <a:r>
               <a:rPr lang="en-US" sz="3800" b="1" dirty="0">
                 <a:solidFill>
-                  <a:srgbClr val="12242E"/>
-                </a:solidFill>
-                <a:latin typeface="Cambria" pitchFamily="34" charset="0"/>
-                <a:ea typeface="Cambria" pitchFamily="34" charset="-122"/>
-                <a:cs typeface="Cambria" pitchFamily="34" charset="-120"/>
+                  <a:srgbClr val="FFFFFF"/>
+                </a:solidFill>
+                <a:latin typeface="Telegraf" pitchFamily="34" charset="0"/>
+                <a:ea typeface="Telegraf" pitchFamily="34" charset="-122"/>
+                <a:cs typeface="Telegraf" pitchFamily="34" charset="-120"/>
               </a:rPr>
               <a:t>Then we put a window on top of it</a:t>
             </a:r>
@@ -20520,11 +20520,11 @@
             <a:r>
               <a:rPr lang="en-US" sz="2200" dirty="0">
                 <a:solidFill>
-                  <a:srgbClr val="12242E"/>
-                </a:solidFill>
-                <a:latin typeface="Calibri" pitchFamily="34" charset="0"/>
-                <a:ea typeface="Calibri" pitchFamily="34" charset="-122"/>
-                <a:cs typeface="Calibri" pitchFamily="34" charset="-120"/>
+                  <a:srgbClr val="FFFFFF"/>
+                </a:solidFill>
+                <a:latin typeface="Telegraf" pitchFamily="34" charset="0"/>
+                <a:ea typeface="Telegraf" pitchFamily="34" charset="-122"/>
+                <a:cs typeface="Telegraf" pitchFamily="34" charset="-120"/>
               </a:rPr>
               <a:t>Wonderware shipped InTouch — the first HMI built for Windows. For the first time, a supervisory layer sat on top of the control system, independent of it.</a:t>
             </a:r>
@@ -20540,70 +20540,8 @@
         </p:nvSpPr>
         <p:spPr>
           <a:xfrm>
-            <a:off x="640080" y="3840480"/>
-            <a:ext cx="6492240" cy="1463040"/>
-          </a:xfrm>
-          <a:prstGeom prst="rect">
-            <a:avLst/>
-          </a:prstGeom>
-          <a:noFill/>
-          <a:ln/>
-        </p:spPr>
-        <p:txBody>
-          <a:bodyPr wrap="square" lIns="0" tIns="0" rIns="0" bIns="0" rtlCol="0" anchor="t"/>
-          <a:lstStyle/>
-          <a:p>
-            <a:pPr indent="0" marL="0">
-              <a:lnSpc>
-                <a:spcPts val="2900"/>
-              </a:lnSpc>
-              <a:buNone/>
-            </a:pPr>
-            <a:r>
-              <a:rPr lang="en-US" sz="2100" b="1" dirty="0">
-                <a:solidFill>
-                  <a:srgbClr val="12242E"/>
-                </a:solidFill>
-                <a:latin typeface="Calibri" pitchFamily="34" charset="0"/>
-                <a:ea typeface="Calibri" pitchFamily="34" charset="-122"/>
-                <a:cs typeface="Calibri" pitchFamily="34" charset="-120"/>
-              </a:rPr>
-              <a:t>This is the layer most of you actually live in.</a:t>
-            </a:r>
-            <a:endParaRPr lang="en-US" sz="2100" dirty="0"/>
-          </a:p>
-          <a:p>
-            <a:pPr indent="0" marL="0">
-              <a:lnSpc>
-                <a:spcPts val="2900"/>
-              </a:lnSpc>
-              <a:buNone/>
-            </a:pPr>
-            <a:r>
-              <a:rPr lang="en-US" sz="2100" dirty="0">
-                <a:solidFill>
-                  <a:srgbClr val="12242E"/>
-                </a:solidFill>
-                <a:latin typeface="Calibri" pitchFamily="34" charset="0"/>
-                <a:ea typeface="Calibri" pitchFamily="34" charset="-122"/>
-                <a:cs typeface="Calibri" pitchFamily="34" charset="-120"/>
-              </a:rPr>
-              <a:t>Alarms. Trends. Historian. The monthly compliance report. Situational awareness across a system too big to walk.</a:t>
-            </a:r>
-            <a:endParaRPr lang="en-US" sz="2100" dirty="0"/>
-          </a:p>
-        </p:txBody>
-      </p:sp>
-      <p:sp>
-        <p:nvSpPr>
-          <p:cNvPr id="7" name="Text 5"/>
-          <p:cNvSpPr/>
-          <p:nvPr/>
-        </p:nvSpPr>
-        <p:spPr>
-          <a:xfrm>
-            <a:off x="640080" y="5394960"/>
-            <a:ext cx="6492240" cy="822960"/>
+            <a:off x="640080" y="3794760"/>
+            <a:ext cx="6492240" cy="1691640"/>
           </a:xfrm>
           <a:prstGeom prst="rect">
             <a:avLst/>
@@ -20622,13 +20560,75 @@
               <a:buNone/>
             </a:pPr>
             <a:r>
+              <a:rPr lang="en-US" sz="1900" b="1" dirty="0">
+                <a:solidFill>
+                  <a:srgbClr val="FFFFFF"/>
+                </a:solidFill>
+                <a:latin typeface="Telegraf" pitchFamily="34" charset="0"/>
+                <a:ea typeface="Telegraf" pitchFamily="34" charset="-122"/>
+                <a:cs typeface="Telegraf" pitchFamily="34" charset="-120"/>
+              </a:rPr>
+              <a:t>This is the layer most of you actually live in.</a:t>
+            </a:r>
+            <a:endParaRPr lang="en-US" sz="1900" dirty="0"/>
+          </a:p>
+          <a:p>
+            <a:pPr indent="0" marL="0">
+              <a:lnSpc>
+                <a:spcPts val="2600"/>
+              </a:lnSpc>
+              <a:buNone/>
+            </a:pPr>
+            <a:r>
+              <a:rPr lang="en-US" sz="1900" dirty="0">
+                <a:solidFill>
+                  <a:srgbClr val="FFFFFF"/>
+                </a:solidFill>
+                <a:latin typeface="Telegraf" pitchFamily="34" charset="0"/>
+                <a:ea typeface="Telegraf" pitchFamily="34" charset="-122"/>
+                <a:cs typeface="Telegraf" pitchFamily="34" charset="-120"/>
+              </a:rPr>
+              <a:t>Alarms. Trends. Historian. The monthly compliance report. Situational awareness across a system too big to walk.</a:t>
+            </a:r>
+            <a:endParaRPr lang="en-US" sz="1900" dirty="0"/>
+          </a:p>
+        </p:txBody>
+      </p:sp>
+      <p:sp>
+        <p:nvSpPr>
+          <p:cNvPr id="7" name="Text 5"/>
+          <p:cNvSpPr/>
+          <p:nvPr/>
+        </p:nvSpPr>
+        <p:spPr>
+          <a:xfrm>
+            <a:off x="640080" y="5532120"/>
+            <a:ext cx="6492240" cy="822960"/>
+          </a:xfrm>
+          <a:prstGeom prst="rect">
+            <a:avLst/>
+          </a:prstGeom>
+          <a:noFill/>
+          <a:ln/>
+        </p:spPr>
+        <p:txBody>
+          <a:bodyPr wrap="square" lIns="0" tIns="0" rIns="0" bIns="0" rtlCol="0" anchor="t"/>
+          <a:lstStyle/>
+          <a:p>
+            <a:pPr indent="0" marL="0">
+              <a:lnSpc>
+                <a:spcPts val="2600"/>
+              </a:lnSpc>
+              <a:buNone/>
+            </a:pPr>
+            <a:r>
               <a:rPr lang="en-US" sz="1900" i="1" dirty="0">
                 <a:solidFill>
-                  <a:srgbClr val="1C7293"/>
-                </a:solidFill>
-                <a:latin typeface="Calibri" pitchFamily="34" charset="0"/>
-                <a:ea typeface="Calibri" pitchFamily="34" charset="-122"/>
-                <a:cs typeface="Calibri" pitchFamily="34" charset="-120"/>
+                  <a:srgbClr val="00A19C"/>
+                </a:solidFill>
+                <a:latin typeface="Telegraf" pitchFamily="34" charset="0"/>
+                <a:ea typeface="Telegraf" pitchFamily="34" charset="-122"/>
+                <a:cs typeface="Telegraf" pitchFamily="34" charset="-120"/>
               </a:rPr>
               <a:t>It was, genuinely, a leap. And it is still doing that job in your plant today.</a:t>
             </a:r>
@@ -20653,11 +20653,11 @@
             </a:avLst>
           </a:prstGeom>
           <a:solidFill>
-            <a:srgbClr val="E8A33D"/>
+            <a:srgbClr val="3DCD58"/>
           </a:solidFill>
           <a:ln w="12700">
             <a:solidFill>
-              <a:srgbClr val="E8A33D"/>
+              <a:srgbClr val="3DCD58"/>
             </a:solidFill>
             <a:prstDash val="solid"/>
           </a:ln>
@@ -20690,11 +20690,11 @@
             <a:r>
               <a:rPr lang="en-US" sz="1700" b="1" spc="150" kern="0" dirty="0">
                 <a:solidFill>
-                  <a:srgbClr val="0E2A38"/>
-                </a:solidFill>
-                <a:latin typeface="Calibri" pitchFamily="34" charset="0"/>
-                <a:ea typeface="Calibri" pitchFamily="34" charset="-122"/>
-                <a:cs typeface="Calibri" pitchFamily="34" charset="-120"/>
+                  <a:srgbClr val="000000"/>
+                </a:solidFill>
+                <a:latin typeface="Telegraf" pitchFamily="34" charset="0"/>
+                <a:ea typeface="Telegraf" pitchFamily="34" charset="-122"/>
+                <a:cs typeface="Telegraf" pitchFamily="34" charset="-120"/>
               </a:rPr>
               <a:t>SUPERVISORY</a:t>
             </a:r>
@@ -20729,11 +20729,11 @@
             <a:r>
               <a:rPr lang="en-US" sz="1600" dirty="0">
                 <a:solidFill>
-                  <a:srgbClr val="0E2A38"/>
-                </a:solidFill>
-                <a:latin typeface="Calibri" pitchFamily="34" charset="0"/>
-                <a:ea typeface="Calibri" pitchFamily="34" charset="-122"/>
-                <a:cs typeface="Calibri" pitchFamily="34" charset="-120"/>
+                  <a:srgbClr val="000000"/>
+                </a:solidFill>
+                <a:latin typeface="Telegraf" pitchFamily="34" charset="0"/>
+                <a:ea typeface="Telegraf" pitchFamily="34" charset="-122"/>
+                <a:cs typeface="Telegraf" pitchFamily="34" charset="-120"/>
               </a:rPr>
               <a:t>SCADA / HMI — 1989</a:t>
             </a:r>
@@ -20758,11 +20758,11 @@
             </a:avLst>
           </a:prstGeom>
           <a:solidFill>
-            <a:srgbClr val="1C7293"/>
+            <a:srgbClr val="00A19C"/>
           </a:solidFill>
           <a:ln w="12700">
             <a:solidFill>
-              <a:srgbClr val="1C7293"/>
+              <a:srgbClr val="00A19C"/>
             </a:solidFill>
             <a:prstDash val="solid"/>
           </a:ln>
@@ -20797,9 +20797,9 @@
                 <a:solidFill>
                   <a:srgbClr val="FFFFFF"/>
                 </a:solidFill>
-                <a:latin typeface="Calibri" pitchFamily="34" charset="0"/>
-                <a:ea typeface="Calibri" pitchFamily="34" charset="-122"/>
-                <a:cs typeface="Calibri" pitchFamily="34" charset="-120"/>
+                <a:latin typeface="Telegraf" pitchFamily="34" charset="0"/>
+                <a:ea typeface="Telegraf" pitchFamily="34" charset="-122"/>
+                <a:cs typeface="Telegraf" pitchFamily="34" charset="-120"/>
               </a:rPr>
               <a:t>CONTROL</a:t>
             </a:r>
@@ -20836,9 +20836,9 @@
                 <a:solidFill>
                   <a:srgbClr val="FFFFFF"/>
                 </a:solidFill>
-                <a:latin typeface="Calibri" pitchFamily="34" charset="0"/>
-                <a:ea typeface="Calibri" pitchFamily="34" charset="-122"/>
-                <a:cs typeface="Calibri" pitchFamily="34" charset="-120"/>
+                <a:latin typeface="Telegraf" pitchFamily="34" charset="0"/>
+                <a:ea typeface="Telegraf" pitchFamily="34" charset="-122"/>
+                <a:cs typeface="Telegraf" pitchFamily="34" charset="-120"/>
               </a:rPr>
               <a:t>PLC / DCS — 1968, 1975</a:t>
             </a:r>
@@ -20863,11 +20863,11 @@
             </a:avLst>
           </a:prstGeom>
           <a:solidFill>
-            <a:srgbClr val="9BB4C1"/>
+            <a:srgbClr val="E2231A"/>
           </a:solidFill>
           <a:ln w="12700">
             <a:solidFill>
-              <a:srgbClr val="9BB4C1"/>
+              <a:srgbClr val="E2231A"/>
             </a:solidFill>
             <a:prstDash val="solid"/>
           </a:ln>
@@ -20900,11 +20900,11 @@
             <a:r>
               <a:rPr lang="en-US" sz="1700" b="1" spc="150" kern="0" dirty="0">
                 <a:solidFill>
-                  <a:srgbClr val="12242E"/>
-                </a:solidFill>
-                <a:latin typeface="Calibri" pitchFamily="34" charset="0"/>
-                <a:ea typeface="Calibri" pitchFamily="34" charset="-122"/>
-                <a:cs typeface="Calibri" pitchFamily="34" charset="-120"/>
+                  <a:srgbClr val="FFFFFF"/>
+                </a:solidFill>
+                <a:latin typeface="Telegraf" pitchFamily="34" charset="0"/>
+                <a:ea typeface="Telegraf" pitchFamily="34" charset="-122"/>
+                <a:cs typeface="Telegraf" pitchFamily="34" charset="-120"/>
               </a:rPr>
               <a:t>FIELD</a:t>
             </a:r>
@@ -20939,11 +20939,11 @@
             <a:r>
               <a:rPr lang="en-US" sz="1600" dirty="0">
                 <a:solidFill>
-                  <a:srgbClr val="12242E"/>
-                </a:solidFill>
-                <a:latin typeface="Calibri" pitchFamily="34" charset="0"/>
-                <a:ea typeface="Calibri" pitchFamily="34" charset="-122"/>
-                <a:cs typeface="Calibri" pitchFamily="34" charset="-120"/>
+                  <a:srgbClr val="FFFFFF"/>
+                </a:solidFill>
+                <a:latin typeface="Telegraf" pitchFamily="34" charset="0"/>
+                <a:ea typeface="Telegraf" pitchFamily="34" charset="-122"/>
+                <a:cs typeface="Telegraf" pitchFamily="34" charset="-120"/>
               </a:rPr>
               <a:t>Pumps, valves, instruments</a:t>
             </a:r>
@@ -20978,11 +20978,11 @@
             <a:r>
               <a:rPr lang="en-US" sz="1600" i="1" dirty="0">
                 <a:solidFill>
-                  <a:srgbClr val="5B7386"/>
-                </a:solidFill>
-                <a:latin typeface="Calibri" pitchFamily="34" charset="0"/>
-                <a:ea typeface="Calibri" pitchFamily="34" charset="-122"/>
-                <a:cs typeface="Calibri" pitchFamily="34" charset="-120"/>
+                  <a:srgbClr val="9AA3AA"/>
+                </a:solidFill>
+                <a:latin typeface="Telegraf" pitchFamily="34" charset="0"/>
+                <a:ea typeface="Telegraf" pitchFamily="34" charset="-122"/>
+                <a:cs typeface="Telegraf" pitchFamily="34" charset="-120"/>
               </a:rPr>
               <a:t>Three layers. Two vendors' worth of lock-in.</a:t>
             </a:r>
@@ -21017,11 +21017,11 @@
             <a:r>
               <a:rPr lang="en-US" sz="1100" dirty="0">
                 <a:solidFill>
-                  <a:srgbClr val="AEC1CC"/>
-                </a:solidFill>
-                <a:latin typeface="Calibri" pitchFamily="34" charset="0"/>
-                <a:ea typeface="Calibri" pitchFamily="34" charset="-122"/>
-                <a:cs typeface="Calibri" pitchFamily="34" charset="-120"/>
+                  <a:srgbClr val="3A3A3A"/>
+                </a:solidFill>
+                <a:latin typeface="Telegraf" pitchFamily="34" charset="0"/>
+                <a:ea typeface="Telegraf" pitchFamily="34" charset="-122"/>
+                <a:cs typeface="Telegraf" pitchFamily="34" charset="-120"/>
               </a:rPr>
               <a:t>9</a:t>
             </a:r>

--- a/presentations/tri-state-2026/SDA-Water-Wastewater-TriState-2026.pptx
+++ b/presentations/tri-state-2026/SDA-Water-Wastewater-TriState-2026.pptx
@@ -3183,7 +3183,9 @@
           <a:p>
             <a:r>
               <a:rPr lang="en-US" dirty="0"/>
-              <a:t>Paint the picture physically. A relay panel the size of the back wall of this room. Hundreds of relays. A schematic that only two people in the building can read.
+              <a:t>OPENING FRAME FOR ACT I — say some version of this before you get into the relay panel: "I'm not a controls engineer. Most of you have probably programmed a PLC — I never have. But I went and dug into why they exist, and it's a better story than I expected."
+That's not an apology, and don't deliver it like one. You're not claiming to know this better than the room — you're reporting back on something you found interesting. That's the honest version of your authority for the next ten minutes, and it's a stronger position than pretending expertise you don't have. If someone in the audience knows a detail better than the slide, that's a good outcome, not a threat — let them add it and move on.
+Paint the picture physically. A relay panel the size of the back wall of this room. Hundreds of relays. A schematic that only two people in the building can read.
 The key idea to plant: logic and wiring were THE SAME PHYSICAL OBJECT. You could not change one without the other. Say that phrase — you'll call back to it three times.
 TIMING CHECKPOINT: off this slide by 0:07.</a:t>
             </a:r>
@@ -3277,6 +3279,9 @@
 The PLC was not invented to add features. It was invented to SEPARATE two things that had been welded together: what the machine does (logic) and how the machine is built (wiring).
 Say it plainly: "The PLC was the first act of decoupling in our industry. That's the whole reason it exists. Hold that thought, because in about ten minutes I'm going to argue that we stopped doing it."
 Detail worth one sentence: GM bought roughly a million dollars of them, which is what turned an 84th side project into an industry.
+STAY INSIDE THE BULLETS. Everything on this slide is a well-sourced fact at the level a non-engineer can say with a straight face — a spec list and a company history, not programming mechanics. Say what's written and stop. Don't try to ad-lib how ladder logic actually works, why solid-state beat relays electrically, or anything else below that line — you don't need to defend engineering you don't do, and reaching for it is the only way this slide goes wrong.
+If someone asks something more technical than the slide: "That's a great one for the room — anyone want to add color?" Handing it to an actual controls engineer in the audience makes you look more credible, not less. It's the same move as the disclosure on slide 2.
+POCKET FACT, only if asked "who actually invented it": the engineer most associated with it is Dick Morley, at Bedford Associates. You don't need his name on the slide — just don't get caught not knowing it if someone name-checks him.
 TIMING CHECKPOINT: off this slide by 0:09.</a:t>
             </a:r>
             <a:endParaRPr lang="en-US" dirty="0"/>
